--- a/Praesentation.pptx
+++ b/Praesentation.pptx
@@ -5,24 +5,26 @@
     <p:sldMasterId id="2147483650" r:id="rId4"/>
   </p:sldMasterIdLst>
   <p:notesMasterIdLst>
-    <p:notesMasterId r:id="rId17"/>
+    <p:notesMasterId r:id="rId19"/>
   </p:notesMasterIdLst>
   <p:handoutMasterIdLst>
-    <p:handoutMasterId r:id="rId18"/>
+    <p:handoutMasterId r:id="rId20"/>
   </p:handoutMasterIdLst>
   <p:sldIdLst>
-    <p:sldId id="312" r:id="rId5"/>
+    <p:sldId id="297" r:id="rId5"/>
     <p:sldId id="304" r:id="rId6"/>
     <p:sldId id="314" r:id="rId7"/>
-    <p:sldId id="323" r:id="rId8"/>
-    <p:sldId id="282" r:id="rId9"/>
+    <p:sldId id="317" r:id="rId8"/>
+    <p:sldId id="323" r:id="rId9"/>
     <p:sldId id="315" r:id="rId10"/>
-    <p:sldId id="317" r:id="rId11"/>
-    <p:sldId id="318" r:id="rId12"/>
-    <p:sldId id="319" r:id="rId13"/>
-    <p:sldId id="321" r:id="rId14"/>
-    <p:sldId id="322" r:id="rId15"/>
-    <p:sldId id="297" r:id="rId16"/>
+    <p:sldId id="324" r:id="rId11"/>
+    <p:sldId id="282" r:id="rId12"/>
+    <p:sldId id="327" r:id="rId13"/>
+    <p:sldId id="318" r:id="rId14"/>
+    <p:sldId id="326" r:id="rId15"/>
+    <p:sldId id="319" r:id="rId16"/>
+    <p:sldId id="325" r:id="rId17"/>
+    <p:sldId id="321" r:id="rId18"/>
   </p:sldIdLst>
   <p:sldSz cx="12192000" cy="6858000"/>
   <p:notesSz cx="13716000" cy="24384000"/>
@@ -627,7 +629,7 @@
     </p:spTree>
     <p:extLst>
       <p:ext uri="{BB962C8B-B14F-4D97-AF65-F5344CB8AC3E}">
-        <p14:creationId xmlns:p14="http://schemas.microsoft.com/office/powerpoint/2010/main" val="2997654815"/>
+        <p14:creationId xmlns:p14="http://schemas.microsoft.com/office/powerpoint/2010/main" val="389240070"/>
       </p:ext>
     </p:extLst>
   </p:cSld>
@@ -715,7 +717,7 @@
     </p:spTree>
     <p:extLst>
       <p:ext uri="{BB962C8B-B14F-4D97-AF65-F5344CB8AC3E}">
-        <p14:creationId xmlns:p14="http://schemas.microsoft.com/office/powerpoint/2010/main" val="3047668310"/>
+        <p14:creationId xmlns:p14="http://schemas.microsoft.com/office/powerpoint/2010/main" val="984541709"/>
       </p:ext>
     </p:extLst>
   </p:cSld>
@@ -730,7 +732,13 @@
   <p:cSld>
     <p:spTree>
       <p:nvGrpSpPr>
-        <p:cNvPr id="1" name=""/>
+        <p:cNvPr id="1" name="">
+          <a:extLst>
+            <a:ext uri="{FF2B5EF4-FFF2-40B4-BE49-F238E27FC236}">
+              <a16:creationId xmlns:a16="http://schemas.microsoft.com/office/drawing/2014/main" id="{F145F47F-6D50-9218-D8AD-81703F90AFA1}"/>
+            </a:ext>
+          </a:extLst>
+        </p:cNvPr>
         <p:cNvGrpSpPr/>
         <p:nvPr/>
       </p:nvGrpSpPr>
@@ -744,7 +752,13 @@
       </p:grpSpPr>
       <p:sp>
         <p:nvSpPr>
-          <p:cNvPr id="2" name="Folienbildplatzhalter 1"/>
+          <p:cNvPr id="2" name="Folienbildplatzhalter 1">
+            <a:extLst>
+              <a:ext uri="{FF2B5EF4-FFF2-40B4-BE49-F238E27FC236}">
+                <a16:creationId xmlns:a16="http://schemas.microsoft.com/office/drawing/2014/main" id="{3225C1A8-BB7A-B929-E309-D6B629E3FF87}"/>
+              </a:ext>
+            </a:extLst>
+          </p:cNvPr>
           <p:cNvSpPr>
             <a:spLocks noGrp="1" noRot="1" noChangeAspect="1"/>
           </p:cNvSpPr>
@@ -770,7 +784,13 @@
       </p:sp>
       <p:sp>
         <p:nvSpPr>
-          <p:cNvPr id="3" name="Notizenplatzhalter 2"/>
+          <p:cNvPr id="3" name="Notizenplatzhalter 2">
+            <a:extLst>
+              <a:ext uri="{FF2B5EF4-FFF2-40B4-BE49-F238E27FC236}">
+                <a16:creationId xmlns:a16="http://schemas.microsoft.com/office/drawing/2014/main" id="{A5ABF565-7F58-CCB4-1A53-31DC16A59AEC}"/>
+              </a:ext>
+            </a:extLst>
+          </p:cNvPr>
           <p:cNvSpPr>
             <a:spLocks noGrp="1"/>
           </p:cNvSpPr>
@@ -803,7 +823,7 @@
     </p:spTree>
     <p:extLst>
       <p:ext uri="{BB962C8B-B14F-4D97-AF65-F5344CB8AC3E}">
-        <p14:creationId xmlns:p14="http://schemas.microsoft.com/office/powerpoint/2010/main" val="2508814883"/>
+        <p14:creationId xmlns:p14="http://schemas.microsoft.com/office/powerpoint/2010/main" val="3980086164"/>
       </p:ext>
     </p:extLst>
   </p:cSld>
@@ -891,7 +911,201 @@
     </p:spTree>
     <p:extLst>
       <p:ext uri="{BB962C8B-B14F-4D97-AF65-F5344CB8AC3E}">
-        <p14:creationId xmlns:p14="http://schemas.microsoft.com/office/powerpoint/2010/main" val="931307476"/>
+        <p14:creationId xmlns:p14="http://schemas.microsoft.com/office/powerpoint/2010/main" val="4110138705"/>
+      </p:ext>
+    </p:extLst>
+  </p:cSld>
+  <p:clrMapOvr>
+    <a:masterClrMapping/>
+  </p:clrMapOvr>
+</p:notes>
+</file>
+
+<file path=ppt/notesSlides/notesSlide13.xml><?xml version="1.0" encoding="utf-8"?>
+<p:notes xmlns:a="http://schemas.openxmlformats.org/drawingml/2006/main" xmlns:r="http://schemas.openxmlformats.org/officeDocument/2006/relationships" xmlns:p="http://schemas.openxmlformats.org/presentationml/2006/main">
+  <p:cSld>
+    <p:spTree>
+      <p:nvGrpSpPr>
+        <p:cNvPr id="1" name="">
+          <a:extLst>
+            <a:ext uri="{FF2B5EF4-FFF2-40B4-BE49-F238E27FC236}">
+              <a16:creationId xmlns:a16="http://schemas.microsoft.com/office/drawing/2014/main" id="{1FD57EC7-09F4-46D0-E592-269C557BCF2E}"/>
+            </a:ext>
+          </a:extLst>
+        </p:cNvPr>
+        <p:cNvGrpSpPr/>
+        <p:nvPr/>
+      </p:nvGrpSpPr>
+      <p:grpSpPr>
+        <a:xfrm>
+          <a:off x="0" y="0"/>
+          <a:ext cx="0" cy="0"/>
+          <a:chOff x="0" y="0"/>
+          <a:chExt cx="0" cy="0"/>
+        </a:xfrm>
+      </p:grpSpPr>
+      <p:sp>
+        <p:nvSpPr>
+          <p:cNvPr id="2" name="Folienbildplatzhalter 1">
+            <a:extLst>
+              <a:ext uri="{FF2B5EF4-FFF2-40B4-BE49-F238E27FC236}">
+                <a16:creationId xmlns:a16="http://schemas.microsoft.com/office/drawing/2014/main" id="{2C16924C-3714-DE46-0800-DED9FA2F1298}"/>
+              </a:ext>
+            </a:extLst>
+          </p:cNvPr>
+          <p:cNvSpPr>
+            <a:spLocks noGrp="1" noRot="1" noChangeAspect="1"/>
+          </p:cNvSpPr>
+          <p:nvPr>
+            <p:ph type="sldImg"/>
+          </p:nvPr>
+        </p:nvSpPr>
+        <p:spPr>
+          <a:xfrm>
+            <a:off x="-457200" y="3048000"/>
+            <a:ext cx="14630400" cy="8229600"/>
+          </a:xfrm>
+          <a:prstGeom prst="rect">
+            <a:avLst/>
+          </a:prstGeom>
+          <a:noFill/>
+          <a:ln w="12700">
+            <a:solidFill>
+              <a:prstClr val="black"/>
+            </a:solidFill>
+          </a:ln>
+        </p:spPr>
+      </p:sp>
+      <p:sp>
+        <p:nvSpPr>
+          <p:cNvPr id="3" name="Notizenplatzhalter 2">
+            <a:extLst>
+              <a:ext uri="{FF2B5EF4-FFF2-40B4-BE49-F238E27FC236}">
+                <a16:creationId xmlns:a16="http://schemas.microsoft.com/office/drawing/2014/main" id="{E743E6CC-29C4-8513-036E-73D9A032DE09}"/>
+              </a:ext>
+            </a:extLst>
+          </p:cNvPr>
+          <p:cNvSpPr>
+            <a:spLocks noGrp="1"/>
+          </p:cNvSpPr>
+          <p:nvPr>
+            <p:ph type="body" idx="1"/>
+          </p:nvPr>
+        </p:nvSpPr>
+        <p:spPr>
+          <a:xfrm>
+            <a:off x="1371600" y="11734800"/>
+            <a:ext cx="10972800" cy="9601200"/>
+          </a:xfrm>
+          <a:prstGeom prst="rect">
+            <a:avLst/>
+          </a:prstGeom>
+        </p:spPr>
+        <p:txBody>
+          <a:bodyPr rtlCol="0"/>
+          <a:lstStyle>
+            <a:defPPr>
+              <a:defRPr lang="de-DE"/>
+            </a:defPPr>
+          </a:lstStyle>
+          <a:p>
+            <a:pPr rtl="0"/>
+            <a:endParaRPr lang="de-DE" dirty="0"/>
+          </a:p>
+        </p:txBody>
+      </p:sp>
+    </p:spTree>
+    <p:extLst>
+      <p:ext uri="{BB962C8B-B14F-4D97-AF65-F5344CB8AC3E}">
+        <p14:creationId xmlns:p14="http://schemas.microsoft.com/office/powerpoint/2010/main" val="3600188263"/>
+      </p:ext>
+    </p:extLst>
+  </p:cSld>
+  <p:clrMapOvr>
+    <a:masterClrMapping/>
+  </p:clrMapOvr>
+</p:notes>
+</file>
+
+<file path=ppt/notesSlides/notesSlide14.xml><?xml version="1.0" encoding="utf-8"?>
+<p:notes xmlns:a="http://schemas.openxmlformats.org/drawingml/2006/main" xmlns:r="http://schemas.openxmlformats.org/officeDocument/2006/relationships" xmlns:p="http://schemas.openxmlformats.org/presentationml/2006/main">
+  <p:cSld>
+    <p:spTree>
+      <p:nvGrpSpPr>
+        <p:cNvPr id="1" name=""/>
+        <p:cNvGrpSpPr/>
+        <p:nvPr/>
+      </p:nvGrpSpPr>
+      <p:grpSpPr>
+        <a:xfrm>
+          <a:off x="0" y="0"/>
+          <a:ext cx="0" cy="0"/>
+          <a:chOff x="0" y="0"/>
+          <a:chExt cx="0" cy="0"/>
+        </a:xfrm>
+      </p:grpSpPr>
+      <p:sp>
+        <p:nvSpPr>
+          <p:cNvPr id="2" name="Folienbildplatzhalter 1"/>
+          <p:cNvSpPr>
+            <a:spLocks noGrp="1" noRot="1" noChangeAspect="1"/>
+          </p:cNvSpPr>
+          <p:nvPr>
+            <p:ph type="sldImg"/>
+          </p:nvPr>
+        </p:nvSpPr>
+        <p:spPr>
+          <a:xfrm>
+            <a:off x="-457200" y="3048000"/>
+            <a:ext cx="14630400" cy="8229600"/>
+          </a:xfrm>
+          <a:prstGeom prst="rect">
+            <a:avLst/>
+          </a:prstGeom>
+          <a:noFill/>
+          <a:ln w="12700">
+            <a:solidFill>
+              <a:prstClr val="black"/>
+            </a:solidFill>
+          </a:ln>
+        </p:spPr>
+      </p:sp>
+      <p:sp>
+        <p:nvSpPr>
+          <p:cNvPr id="3" name="Notizenplatzhalter 2"/>
+          <p:cNvSpPr>
+            <a:spLocks noGrp="1"/>
+          </p:cNvSpPr>
+          <p:nvPr>
+            <p:ph type="body" idx="1"/>
+          </p:nvPr>
+        </p:nvSpPr>
+        <p:spPr>
+          <a:xfrm>
+            <a:off x="1371600" y="11734800"/>
+            <a:ext cx="10972800" cy="9601200"/>
+          </a:xfrm>
+          <a:prstGeom prst="rect">
+            <a:avLst/>
+          </a:prstGeom>
+        </p:spPr>
+        <p:txBody>
+          <a:bodyPr rtlCol="0"/>
+          <a:lstStyle>
+            <a:defPPr>
+              <a:defRPr lang="de-DE"/>
+            </a:defPPr>
+          </a:lstStyle>
+          <a:p>
+            <a:pPr rtl="0"/>
+            <a:endParaRPr lang="de-DE" dirty="0"/>
+          </a:p>
+        </p:txBody>
+      </p:sp>
+    </p:spTree>
+    <p:extLst>
+      <p:ext uri="{BB962C8B-B14F-4D97-AF65-F5344CB8AC3E}">
+        <p14:creationId xmlns:p14="http://schemas.microsoft.com/office/powerpoint/2010/main" val="3047668310"/>
       </p:ext>
     </p:extLst>
   </p:cSld>
@@ -1078,6 +1292,94 @@
 </file>
 
 <file path=ppt/notesSlides/notesSlide4.xml><?xml version="1.0" encoding="utf-8"?>
+<p:notes xmlns:a="http://schemas.openxmlformats.org/drawingml/2006/main" xmlns:r="http://schemas.openxmlformats.org/officeDocument/2006/relationships" xmlns:p="http://schemas.openxmlformats.org/presentationml/2006/main">
+  <p:cSld>
+    <p:spTree>
+      <p:nvGrpSpPr>
+        <p:cNvPr id="1" name=""/>
+        <p:cNvGrpSpPr/>
+        <p:nvPr/>
+      </p:nvGrpSpPr>
+      <p:grpSpPr>
+        <a:xfrm>
+          <a:off x="0" y="0"/>
+          <a:ext cx="0" cy="0"/>
+          <a:chOff x="0" y="0"/>
+          <a:chExt cx="0" cy="0"/>
+        </a:xfrm>
+      </p:grpSpPr>
+      <p:sp>
+        <p:nvSpPr>
+          <p:cNvPr id="2" name="Folienbildplatzhalter 1"/>
+          <p:cNvSpPr>
+            <a:spLocks noGrp="1" noRot="1" noChangeAspect="1"/>
+          </p:cNvSpPr>
+          <p:nvPr>
+            <p:ph type="sldImg"/>
+          </p:nvPr>
+        </p:nvSpPr>
+        <p:spPr>
+          <a:xfrm>
+            <a:off x="-457200" y="3048000"/>
+            <a:ext cx="14630400" cy="8229600"/>
+          </a:xfrm>
+          <a:prstGeom prst="rect">
+            <a:avLst/>
+          </a:prstGeom>
+          <a:noFill/>
+          <a:ln w="12700">
+            <a:solidFill>
+              <a:prstClr val="black"/>
+            </a:solidFill>
+          </a:ln>
+        </p:spPr>
+      </p:sp>
+      <p:sp>
+        <p:nvSpPr>
+          <p:cNvPr id="3" name="Notizenplatzhalter 2"/>
+          <p:cNvSpPr>
+            <a:spLocks noGrp="1"/>
+          </p:cNvSpPr>
+          <p:nvPr>
+            <p:ph type="body" idx="1"/>
+          </p:nvPr>
+        </p:nvSpPr>
+        <p:spPr>
+          <a:xfrm>
+            <a:off x="1371600" y="11734800"/>
+            <a:ext cx="10972800" cy="9601200"/>
+          </a:xfrm>
+          <a:prstGeom prst="rect">
+            <a:avLst/>
+          </a:prstGeom>
+        </p:spPr>
+        <p:txBody>
+          <a:bodyPr rtlCol="0"/>
+          <a:lstStyle>
+            <a:defPPr>
+              <a:defRPr lang="de-DE"/>
+            </a:defPPr>
+          </a:lstStyle>
+          <a:p>
+            <a:pPr rtl="0"/>
+            <a:endParaRPr lang="de-DE" dirty="0"/>
+          </a:p>
+        </p:txBody>
+      </p:sp>
+    </p:spTree>
+    <p:extLst>
+      <p:ext uri="{BB962C8B-B14F-4D97-AF65-F5344CB8AC3E}">
+        <p14:creationId xmlns:p14="http://schemas.microsoft.com/office/powerpoint/2010/main" val="177914689"/>
+      </p:ext>
+    </p:extLst>
+  </p:cSld>
+  <p:clrMapOvr>
+    <a:masterClrMapping/>
+  </p:clrMapOvr>
+</p:notes>
+</file>
+
+<file path=ppt/notesSlides/notesSlide5.xml><?xml version="1.0" encoding="utf-8"?>
 <p:notes xmlns:a="http://schemas.openxmlformats.org/drawingml/2006/main" xmlns:r="http://schemas.openxmlformats.org/officeDocument/2006/relationships" xmlns:p="http://schemas.openxmlformats.org/presentationml/2006/main">
   <p:cSld>
     <p:spTree>
@@ -1183,94 +1485,6 @@
 </p:notes>
 </file>
 
-<file path=ppt/notesSlides/notesSlide5.xml><?xml version="1.0" encoding="utf-8"?>
-<p:notes xmlns:a="http://schemas.openxmlformats.org/drawingml/2006/main" xmlns:r="http://schemas.openxmlformats.org/officeDocument/2006/relationships" xmlns:p="http://schemas.openxmlformats.org/presentationml/2006/main">
-  <p:cSld>
-    <p:spTree>
-      <p:nvGrpSpPr>
-        <p:cNvPr id="1" name=""/>
-        <p:cNvGrpSpPr/>
-        <p:nvPr/>
-      </p:nvGrpSpPr>
-      <p:grpSpPr>
-        <a:xfrm>
-          <a:off x="0" y="0"/>
-          <a:ext cx="0" cy="0"/>
-          <a:chOff x="0" y="0"/>
-          <a:chExt cx="0" cy="0"/>
-        </a:xfrm>
-      </p:grpSpPr>
-      <p:sp>
-        <p:nvSpPr>
-          <p:cNvPr id="2" name="Folienbildplatzhalter 1"/>
-          <p:cNvSpPr>
-            <a:spLocks noGrp="1" noRot="1" noChangeAspect="1"/>
-          </p:cNvSpPr>
-          <p:nvPr>
-            <p:ph type="sldImg"/>
-          </p:nvPr>
-        </p:nvSpPr>
-        <p:spPr>
-          <a:xfrm>
-            <a:off x="-457200" y="3048000"/>
-            <a:ext cx="14630400" cy="8229600"/>
-          </a:xfrm>
-          <a:prstGeom prst="rect">
-            <a:avLst/>
-          </a:prstGeom>
-          <a:noFill/>
-          <a:ln w="12700">
-            <a:solidFill>
-              <a:prstClr val="black"/>
-            </a:solidFill>
-          </a:ln>
-        </p:spPr>
-      </p:sp>
-      <p:sp>
-        <p:nvSpPr>
-          <p:cNvPr id="3" name="Notizenplatzhalter 2"/>
-          <p:cNvSpPr>
-            <a:spLocks noGrp="1"/>
-          </p:cNvSpPr>
-          <p:nvPr>
-            <p:ph type="body" idx="1"/>
-          </p:nvPr>
-        </p:nvSpPr>
-        <p:spPr>
-          <a:xfrm>
-            <a:off x="1371600" y="11734800"/>
-            <a:ext cx="10972800" cy="9601200"/>
-          </a:xfrm>
-          <a:prstGeom prst="rect">
-            <a:avLst/>
-          </a:prstGeom>
-        </p:spPr>
-        <p:txBody>
-          <a:bodyPr rtlCol="0"/>
-          <a:lstStyle>
-            <a:defPPr>
-              <a:defRPr lang="de-DE"/>
-            </a:defPPr>
-          </a:lstStyle>
-          <a:p>
-            <a:pPr rtl="0"/>
-            <a:endParaRPr lang="de-DE" dirty="0"/>
-          </a:p>
-        </p:txBody>
-      </p:sp>
-    </p:spTree>
-    <p:extLst>
-      <p:ext uri="{BB962C8B-B14F-4D97-AF65-F5344CB8AC3E}">
-        <p14:creationId xmlns:p14="http://schemas.microsoft.com/office/powerpoint/2010/main" val="1019397722"/>
-      </p:ext>
-    </p:extLst>
-  </p:cSld>
-  <p:clrMapOvr>
-    <a:masterClrMapping/>
-  </p:clrMapOvr>
-</p:notes>
-</file>
-
 <file path=ppt/notesSlides/notesSlide6.xml><?xml version="1.0" encoding="utf-8"?>
 <p:notes xmlns:a="http://schemas.openxmlformats.org/drawingml/2006/main" xmlns:r="http://schemas.openxmlformats.org/officeDocument/2006/relationships" xmlns:p="http://schemas.openxmlformats.org/presentationml/2006/main">
   <p:cSld>
@@ -1364,7 +1578,13 @@
   <p:cSld>
     <p:spTree>
       <p:nvGrpSpPr>
-        <p:cNvPr id="1" name=""/>
+        <p:cNvPr id="1" name="">
+          <a:extLst>
+            <a:ext uri="{FF2B5EF4-FFF2-40B4-BE49-F238E27FC236}">
+              <a16:creationId xmlns:a16="http://schemas.microsoft.com/office/drawing/2014/main" id="{DDF24303-D5E6-2BD7-8ED8-4C77F42A7835}"/>
+            </a:ext>
+          </a:extLst>
+        </p:cNvPr>
         <p:cNvGrpSpPr/>
         <p:nvPr/>
       </p:nvGrpSpPr>
@@ -1378,7 +1598,13 @@
       </p:grpSpPr>
       <p:sp>
         <p:nvSpPr>
-          <p:cNvPr id="2" name="Folienbildplatzhalter 1"/>
+          <p:cNvPr id="2" name="Folienbildplatzhalter 1">
+            <a:extLst>
+              <a:ext uri="{FF2B5EF4-FFF2-40B4-BE49-F238E27FC236}">
+                <a16:creationId xmlns:a16="http://schemas.microsoft.com/office/drawing/2014/main" id="{C65DBD8B-E73F-45CF-0FF6-058CD56BD22E}"/>
+              </a:ext>
+            </a:extLst>
+          </p:cNvPr>
           <p:cNvSpPr>
             <a:spLocks noGrp="1" noRot="1" noChangeAspect="1"/>
           </p:cNvSpPr>
@@ -1404,7 +1630,13 @@
       </p:sp>
       <p:sp>
         <p:nvSpPr>
-          <p:cNvPr id="3" name="Notizenplatzhalter 2"/>
+          <p:cNvPr id="3" name="Notizenplatzhalter 2">
+            <a:extLst>
+              <a:ext uri="{FF2B5EF4-FFF2-40B4-BE49-F238E27FC236}">
+                <a16:creationId xmlns:a16="http://schemas.microsoft.com/office/drawing/2014/main" id="{DA874F11-0DC1-8DF3-2687-BF3A6A3B585B}"/>
+              </a:ext>
+            </a:extLst>
+          </p:cNvPr>
           <p:cNvSpPr>
             <a:spLocks noGrp="1"/>
           </p:cNvSpPr>
@@ -1437,7 +1669,7 @@
     </p:spTree>
     <p:extLst>
       <p:ext uri="{BB962C8B-B14F-4D97-AF65-F5344CB8AC3E}">
-        <p14:creationId xmlns:p14="http://schemas.microsoft.com/office/powerpoint/2010/main" val="177914689"/>
+        <p14:creationId xmlns:p14="http://schemas.microsoft.com/office/powerpoint/2010/main" val="3035750674"/>
       </p:ext>
     </p:extLst>
   </p:cSld>
@@ -1525,7 +1757,7 @@
     </p:spTree>
     <p:extLst>
       <p:ext uri="{BB962C8B-B14F-4D97-AF65-F5344CB8AC3E}">
-        <p14:creationId xmlns:p14="http://schemas.microsoft.com/office/powerpoint/2010/main" val="984541709"/>
+        <p14:creationId xmlns:p14="http://schemas.microsoft.com/office/powerpoint/2010/main" val="1019397722"/>
       </p:ext>
     </p:extLst>
   </p:cSld>
@@ -1540,7 +1772,13 @@
   <p:cSld>
     <p:spTree>
       <p:nvGrpSpPr>
-        <p:cNvPr id="1" name=""/>
+        <p:cNvPr id="1" name="">
+          <a:extLst>
+            <a:ext uri="{FF2B5EF4-FFF2-40B4-BE49-F238E27FC236}">
+              <a16:creationId xmlns:a16="http://schemas.microsoft.com/office/drawing/2014/main" id="{68CF544C-2FCE-38CD-8B92-7119DC3DAB70}"/>
+            </a:ext>
+          </a:extLst>
+        </p:cNvPr>
         <p:cNvGrpSpPr/>
         <p:nvPr/>
       </p:nvGrpSpPr>
@@ -1554,7 +1792,13 @@
       </p:grpSpPr>
       <p:sp>
         <p:nvSpPr>
-          <p:cNvPr id="2" name="Folienbildplatzhalter 1"/>
+          <p:cNvPr id="2" name="Folienbildplatzhalter 1">
+            <a:extLst>
+              <a:ext uri="{FF2B5EF4-FFF2-40B4-BE49-F238E27FC236}">
+                <a16:creationId xmlns:a16="http://schemas.microsoft.com/office/drawing/2014/main" id="{2BA12F78-3096-D6A4-6749-2C1EAC5FD55F}"/>
+              </a:ext>
+            </a:extLst>
+          </p:cNvPr>
           <p:cNvSpPr>
             <a:spLocks noGrp="1" noRot="1" noChangeAspect="1"/>
           </p:cNvSpPr>
@@ -1580,7 +1824,13 @@
       </p:sp>
       <p:sp>
         <p:nvSpPr>
-          <p:cNvPr id="3" name="Notizenplatzhalter 2"/>
+          <p:cNvPr id="3" name="Notizenplatzhalter 2">
+            <a:extLst>
+              <a:ext uri="{FF2B5EF4-FFF2-40B4-BE49-F238E27FC236}">
+                <a16:creationId xmlns:a16="http://schemas.microsoft.com/office/drawing/2014/main" id="{F44BA5FC-4A90-B147-A368-1E590582A7A9}"/>
+              </a:ext>
+            </a:extLst>
+          </p:cNvPr>
           <p:cNvSpPr>
             <a:spLocks noGrp="1"/>
           </p:cNvSpPr>
@@ -1613,7 +1863,7 @@
     </p:spTree>
     <p:extLst>
       <p:ext uri="{BB962C8B-B14F-4D97-AF65-F5344CB8AC3E}">
-        <p14:creationId xmlns:p14="http://schemas.microsoft.com/office/powerpoint/2010/main" val="4110138705"/>
+        <p14:creationId xmlns:p14="http://schemas.microsoft.com/office/powerpoint/2010/main" val="282395794"/>
       </p:ext>
     </p:extLst>
   </p:cSld>
@@ -18086,7 +18336,7 @@
           <p:cNvPr id="2" name="Titel 1">
             <a:extLst>
               <a:ext uri="{FF2B5EF4-FFF2-40B4-BE49-F238E27FC236}">
-                <a16:creationId xmlns:a16="http://schemas.microsoft.com/office/drawing/2014/main" id="{4207FF65-A536-F639-8591-ED024C223308}"/>
+                <a16:creationId xmlns:a16="http://schemas.microsoft.com/office/drawing/2014/main" id="{509D22C5-0C9E-B582-A8FE-B45E70A01E7F}"/>
               </a:ext>
             </a:extLst>
           </p:cNvPr>
@@ -18099,12 +18349,12 @@
         </p:nvSpPr>
         <p:spPr>
           <a:xfrm>
-            <a:off x="3222931" y="810227"/>
-            <a:ext cx="5746140" cy="3831221"/>
+            <a:off x="914400" y="2065145"/>
+            <a:ext cx="5751575" cy="2727709"/>
           </a:xfrm>
         </p:spPr>
         <p:txBody>
-          <a:bodyPr rtlCol="0" anchor="ctr"/>
+          <a:bodyPr rtlCol="0"/>
           <a:lstStyle>
             <a:defPPr>
               <a:defRPr lang="de-DE"/>
@@ -18143,14 +18393,14 @@
               <a:rPr lang="de-AT" sz="2000" dirty="0"/>
               <a:t> (se25m050)</a:t>
             </a:r>
-            <a:endParaRPr lang="de-AT" sz="2000" b="0" dirty="0"/>
+            <a:endParaRPr lang="de-DE" dirty="0"/>
           </a:p>
         </p:txBody>
       </p:sp>
     </p:spTree>
     <p:extLst>
       <p:ext uri="{BB962C8B-B14F-4D97-AF65-F5344CB8AC3E}">
-        <p14:creationId xmlns:p14="http://schemas.microsoft.com/office/powerpoint/2010/main" val="2202437675"/>
+        <p14:creationId xmlns:p14="http://schemas.microsoft.com/office/powerpoint/2010/main" val="1237420169"/>
       </p:ext>
     </p:extLst>
   </p:cSld>
@@ -18161,6 +18411,882 @@
 </file>
 
 <file path=ppt/slides/slide10.xml><?xml version="1.0" encoding="utf-8"?>
+<p:sld xmlns:a="http://schemas.openxmlformats.org/drawingml/2006/main" xmlns:r="http://schemas.openxmlformats.org/officeDocument/2006/relationships" xmlns:p="http://schemas.openxmlformats.org/presentationml/2006/main">
+  <p:cSld>
+    <p:spTree>
+      <p:nvGrpSpPr>
+        <p:cNvPr id="1" name=""/>
+        <p:cNvGrpSpPr/>
+        <p:nvPr/>
+      </p:nvGrpSpPr>
+      <p:grpSpPr>
+        <a:xfrm>
+          <a:off x="0" y="0"/>
+          <a:ext cx="0" cy="0"/>
+          <a:chOff x="0" y="0"/>
+          <a:chExt cx="0" cy="0"/>
+        </a:xfrm>
+      </p:grpSpPr>
+      <p:sp>
+        <p:nvSpPr>
+          <p:cNvPr id="3" name="Titel 2">
+            <a:extLst>
+              <a:ext uri="{FF2B5EF4-FFF2-40B4-BE49-F238E27FC236}">
+                <a16:creationId xmlns:a16="http://schemas.microsoft.com/office/drawing/2014/main" id="{9443EC8A-1733-CCF7-081F-EB4667CB3285}"/>
+              </a:ext>
+            </a:extLst>
+          </p:cNvPr>
+          <p:cNvSpPr>
+            <a:spLocks noGrp="1"/>
+          </p:cNvSpPr>
+          <p:nvPr>
+            <p:ph type="title"/>
+          </p:nvPr>
+        </p:nvSpPr>
+        <p:spPr>
+          <a:xfrm>
+            <a:off x="914400" y="1057274"/>
+            <a:ext cx="7843837" cy="1012782"/>
+          </a:xfrm>
+        </p:spPr>
+        <p:txBody>
+          <a:bodyPr rtlCol="0"/>
+          <a:lstStyle>
+            <a:defPPr>
+              <a:defRPr lang="de-DE"/>
+            </a:defPPr>
+          </a:lstStyle>
+          <a:p>
+            <a:r>
+              <a:rPr lang="de-DE" dirty="0"/>
+              <a:t>Umsetzung: Skripte</a:t>
+            </a:r>
+          </a:p>
+        </p:txBody>
+      </p:sp>
+      <p:sp>
+        <p:nvSpPr>
+          <p:cNvPr id="4" name="Inhaltsplatzhalter 3">
+            <a:extLst>
+              <a:ext uri="{FF2B5EF4-FFF2-40B4-BE49-F238E27FC236}">
+                <a16:creationId xmlns:a16="http://schemas.microsoft.com/office/drawing/2014/main" id="{ACE55D3D-AA24-CF53-6679-29B3C83F7646}"/>
+              </a:ext>
+            </a:extLst>
+          </p:cNvPr>
+          <p:cNvSpPr>
+            <a:spLocks noGrp="1"/>
+          </p:cNvSpPr>
+          <p:nvPr>
+            <p:ph idx="13"/>
+          </p:nvPr>
+        </p:nvSpPr>
+        <p:spPr>
+          <a:xfrm>
+            <a:off x="914400" y="2331791"/>
+            <a:ext cx="9381744" cy="4123873"/>
+          </a:xfrm>
+        </p:spPr>
+        <p:txBody>
+          <a:bodyPr rtlCol="0">
+            <a:normAutofit/>
+          </a:bodyPr>
+          <a:lstStyle>
+            <a:defPPr>
+              <a:defRPr lang="de-DE"/>
+            </a:defPPr>
+          </a:lstStyle>
+          <a:p>
+            <a:pPr rtl="0"/>
+            <a:r>
+              <a:rPr lang="de-DE" sz="1800" dirty="0" err="1"/>
+              <a:t>PlanetTypeAudio</a:t>
+            </a:r>
+            <a:r>
+              <a:rPr lang="de-DE" sz="1800" dirty="0"/>
+              <a:t>: Audio für Detailansicht basierend auf Planetentyp</a:t>
+            </a:r>
+          </a:p>
+          <a:p>
+            <a:pPr rtl="0"/>
+            <a:endParaRPr lang="de-DE" sz="1800" dirty="0"/>
+          </a:p>
+          <a:p>
+            <a:pPr rtl="0"/>
+            <a:r>
+              <a:rPr lang="de-DE" sz="1800" dirty="0" err="1"/>
+              <a:t>LeftHandSpeedControl</a:t>
+            </a:r>
+            <a:r>
+              <a:rPr lang="de-DE" sz="1800" dirty="0"/>
+              <a:t>: Vergleich in Update Rotation von letztem mit aktuellen Frame und passt Speed von Controller an</a:t>
+            </a:r>
+          </a:p>
+          <a:p>
+            <a:pPr rtl="0"/>
+            <a:endParaRPr lang="de-DE" sz="1800" dirty="0"/>
+          </a:p>
+          <a:p>
+            <a:pPr rtl="0"/>
+            <a:r>
+              <a:rPr lang="de-DE" sz="1800" dirty="0" err="1"/>
+              <a:t>RealisticPlanet</a:t>
+            </a:r>
+            <a:r>
+              <a:rPr lang="de-DE" sz="1800" dirty="0"/>
+              <a:t>: Attribute Entfernung zur Sonne und Radius, skaliert und bewegt Planeten in XZ-Ebene durch Berechnung von Winkel basierend auf Verhältnis zu </a:t>
+            </a:r>
+            <a:r>
+              <a:rPr lang="de-DE" sz="1800" dirty="0" err="1"/>
+              <a:t>Erdjahr</a:t>
+            </a:r>
+            <a:endParaRPr lang="de-DE" sz="1800" dirty="0"/>
+          </a:p>
+          <a:p>
+            <a:pPr rtl="0"/>
+            <a:endParaRPr lang="de-DE" sz="1800" dirty="0"/>
+          </a:p>
+          <a:p>
+            <a:pPr rtl="0"/>
+            <a:r>
+              <a:rPr lang="de-DE" sz="1800" dirty="0" err="1"/>
+              <a:t>RealisticSolarSystemController</a:t>
+            </a:r>
+            <a:r>
+              <a:rPr lang="de-DE" sz="1800" dirty="0"/>
+              <a:t>: setzt Szene mit realistischem Sonnensystem aktiv/inaktiv (Sound &amp; Deaktivieren anderer), Pausieren von Rotation, Geschwindigkeit von Simulation, Update von Text in Canvas/Buttons</a:t>
+            </a:r>
+          </a:p>
+          <a:p>
+            <a:pPr rtl="0"/>
+            <a:endParaRPr lang="de-DE" sz="1800" dirty="0"/>
+          </a:p>
+          <a:p>
+            <a:pPr rtl="0"/>
+            <a:r>
+              <a:rPr lang="de-DE" sz="1800" dirty="0" err="1"/>
+              <a:t>PlanetDetailMode</a:t>
+            </a:r>
+            <a:r>
+              <a:rPr lang="de-DE" sz="1800" dirty="0"/>
+              <a:t>: Audio, setzt Detailszene und </a:t>
+            </a:r>
+            <a:r>
+              <a:rPr lang="de-DE" sz="1800" dirty="0" err="1"/>
+              <a:t>Vergleichszene</a:t>
+            </a:r>
+            <a:r>
+              <a:rPr lang="de-DE" sz="1800" dirty="0"/>
+              <a:t> aktiv/inaktiv,  bestimmt Typ für Detailaudio und </a:t>
+            </a:r>
+            <a:r>
+              <a:rPr lang="de-DE" sz="1800" dirty="0" err="1"/>
+              <a:t>ViewPoint</a:t>
+            </a:r>
+            <a:r>
+              <a:rPr lang="de-DE" sz="1800" dirty="0"/>
+              <a:t>, Handler für korrekte Detailobjekte und Auswahl von 2. Planeten</a:t>
+            </a:r>
+          </a:p>
+          <a:p>
+            <a:pPr rtl="0"/>
+            <a:endParaRPr lang="de-DE" sz="1800" dirty="0"/>
+          </a:p>
+        </p:txBody>
+      </p:sp>
+      <p:sp>
+        <p:nvSpPr>
+          <p:cNvPr id="2" name="Foliennummernplatzhalter 1">
+            <a:extLst>
+              <a:ext uri="{FF2B5EF4-FFF2-40B4-BE49-F238E27FC236}">
+                <a16:creationId xmlns:a16="http://schemas.microsoft.com/office/drawing/2014/main" id="{AB69D854-FB65-0E93-CFE2-041F7C41DD24}"/>
+              </a:ext>
+            </a:extLst>
+          </p:cNvPr>
+          <p:cNvSpPr>
+            <a:spLocks noGrp="1"/>
+          </p:cNvSpPr>
+          <p:nvPr>
+            <p:ph type="sldNum" sz="quarter" idx="10"/>
+          </p:nvPr>
+        </p:nvSpPr>
+        <p:spPr>
+          <a:xfrm>
+            <a:off x="10438475" y="457199"/>
+            <a:ext cx="987552" cy="471489"/>
+          </a:xfrm>
+        </p:spPr>
+        <p:txBody>
+          <a:bodyPr rtlCol="0"/>
+          <a:lstStyle>
+            <a:defPPr>
+              <a:defRPr lang="de-DE"/>
+            </a:defPPr>
+          </a:lstStyle>
+          <a:p>
+            <a:pPr rtl="0"/>
+            <a:fld id="{48F63A3B-78C7-47BE-AE5E-E10140E04643}" type="slidenum">
+              <a:rPr lang="de-DE" smtClean="0"/>
+              <a:pPr rtl="0"/>
+              <a:t>10</a:t>
+            </a:fld>
+            <a:endParaRPr lang="de-DE" dirty="0"/>
+          </a:p>
+        </p:txBody>
+      </p:sp>
+    </p:spTree>
+    <p:extLst>
+      <p:ext uri="{BB962C8B-B14F-4D97-AF65-F5344CB8AC3E}">
+        <p14:creationId xmlns:p14="http://schemas.microsoft.com/office/powerpoint/2010/main" val="4072101725"/>
+      </p:ext>
+    </p:extLst>
+  </p:cSld>
+  <p:clrMapOvr>
+    <a:masterClrMapping/>
+  </p:clrMapOvr>
+</p:sld>
+</file>
+
+<file path=ppt/slides/slide11.xml><?xml version="1.0" encoding="utf-8"?>
+<p:sld xmlns:a="http://schemas.openxmlformats.org/drawingml/2006/main" xmlns:r="http://schemas.openxmlformats.org/officeDocument/2006/relationships" xmlns:p="http://schemas.openxmlformats.org/presentationml/2006/main">
+  <p:cSld>
+    <p:spTree>
+      <p:nvGrpSpPr>
+        <p:cNvPr id="1" name="">
+          <a:extLst>
+            <a:ext uri="{FF2B5EF4-FFF2-40B4-BE49-F238E27FC236}">
+              <a16:creationId xmlns:a16="http://schemas.microsoft.com/office/drawing/2014/main" id="{78C0DA27-B273-ADD3-BBA1-FFE63BD80612}"/>
+            </a:ext>
+          </a:extLst>
+        </p:cNvPr>
+        <p:cNvGrpSpPr/>
+        <p:nvPr/>
+      </p:nvGrpSpPr>
+      <p:grpSpPr>
+        <a:xfrm>
+          <a:off x="0" y="0"/>
+          <a:ext cx="0" cy="0"/>
+          <a:chOff x="0" y="0"/>
+          <a:chExt cx="0" cy="0"/>
+        </a:xfrm>
+      </p:grpSpPr>
+      <p:sp>
+        <p:nvSpPr>
+          <p:cNvPr id="2" name="Titel 1">
+            <a:extLst>
+              <a:ext uri="{FF2B5EF4-FFF2-40B4-BE49-F238E27FC236}">
+                <a16:creationId xmlns:a16="http://schemas.microsoft.com/office/drawing/2014/main" id="{62058BAC-D905-F340-BEA7-AF1C51E841EC}"/>
+              </a:ext>
+            </a:extLst>
+          </p:cNvPr>
+          <p:cNvSpPr>
+            <a:spLocks noGrp="1"/>
+          </p:cNvSpPr>
+          <p:nvPr>
+            <p:ph type="title"/>
+          </p:nvPr>
+        </p:nvSpPr>
+        <p:spPr>
+          <a:xfrm>
+            <a:off x="4364809" y="1057274"/>
+            <a:ext cx="5161746" cy="2520217"/>
+          </a:xfrm>
+        </p:spPr>
+        <p:txBody>
+          <a:bodyPr rtlCol="0"/>
+          <a:lstStyle>
+            <a:defPPr>
+              <a:defRPr lang="de-DE"/>
+            </a:defPPr>
+          </a:lstStyle>
+          <a:p>
+            <a:pPr rtl="0"/>
+            <a:r>
+              <a:rPr lang="de-DE" dirty="0"/>
+              <a:t>Umsetzung: Interaktionen</a:t>
+            </a:r>
+          </a:p>
+        </p:txBody>
+      </p:sp>
+      <p:sp>
+        <p:nvSpPr>
+          <p:cNvPr id="3" name="Foliennummernplatzhalter 2">
+            <a:extLst>
+              <a:ext uri="{FF2B5EF4-FFF2-40B4-BE49-F238E27FC236}">
+                <a16:creationId xmlns:a16="http://schemas.microsoft.com/office/drawing/2014/main" id="{9C25756D-F6BD-17DA-05B7-9DA6FFE8BF69}"/>
+              </a:ext>
+            </a:extLst>
+          </p:cNvPr>
+          <p:cNvSpPr>
+            <a:spLocks noGrp="1"/>
+          </p:cNvSpPr>
+          <p:nvPr>
+            <p:ph type="sldNum" sz="quarter" idx="10"/>
+          </p:nvPr>
+        </p:nvSpPr>
+        <p:spPr>
+          <a:xfrm>
+            <a:off x="10438475" y="457199"/>
+            <a:ext cx="987552" cy="471489"/>
+          </a:xfrm>
+        </p:spPr>
+        <p:txBody>
+          <a:bodyPr rtlCol="0"/>
+          <a:lstStyle>
+            <a:defPPr>
+              <a:defRPr lang="de-DE"/>
+            </a:defPPr>
+          </a:lstStyle>
+          <a:p>
+            <a:pPr rtl="0"/>
+            <a:fld id="{48F63A3B-78C7-47BE-AE5E-E10140E04643}" type="slidenum">
+              <a:rPr lang="de-DE" smtClean="0"/>
+              <a:pPr rtl="0"/>
+              <a:t>11</a:t>
+            </a:fld>
+            <a:endParaRPr lang="de-DE" dirty="0"/>
+          </a:p>
+        </p:txBody>
+      </p:sp>
+      <p:sp>
+        <p:nvSpPr>
+          <p:cNvPr id="4" name="Inhaltsplatzhalter 3">
+            <a:extLst>
+              <a:ext uri="{FF2B5EF4-FFF2-40B4-BE49-F238E27FC236}">
+                <a16:creationId xmlns:a16="http://schemas.microsoft.com/office/drawing/2014/main" id="{37CB78F1-30CA-ED4A-499A-168B49507DB9}"/>
+              </a:ext>
+            </a:extLst>
+          </p:cNvPr>
+          <p:cNvSpPr>
+            <a:spLocks noGrp="1"/>
+          </p:cNvSpPr>
+          <p:nvPr>
+            <p:ph idx="11"/>
+          </p:nvPr>
+        </p:nvSpPr>
+        <p:spPr>
+          <a:xfrm>
+            <a:off x="4364808" y="3808750"/>
+            <a:ext cx="7043618" cy="2233233"/>
+          </a:xfrm>
+        </p:spPr>
+        <p:txBody>
+          <a:bodyPr rtlCol="0"/>
+          <a:lstStyle>
+            <a:defPPr>
+              <a:defRPr lang="de-DE"/>
+            </a:defPPr>
+          </a:lstStyle>
+          <a:p>
+            <a:pPr rtl="0"/>
+            <a:r>
+              <a:rPr lang="de-DE" dirty="0"/>
+              <a:t>Welche Interaktionen mit welchen Objekten wurden wie umgesetzt?</a:t>
+            </a:r>
+          </a:p>
+        </p:txBody>
+      </p:sp>
+    </p:spTree>
+    <p:extLst>
+      <p:ext uri="{BB962C8B-B14F-4D97-AF65-F5344CB8AC3E}">
+        <p14:creationId xmlns:p14="http://schemas.microsoft.com/office/powerpoint/2010/main" val="975633085"/>
+      </p:ext>
+    </p:extLst>
+  </p:cSld>
+  <p:clrMapOvr>
+    <a:masterClrMapping/>
+  </p:clrMapOvr>
+</p:sld>
+</file>
+
+<file path=ppt/slides/slide12.xml><?xml version="1.0" encoding="utf-8"?>
+<p:sld xmlns:a="http://schemas.openxmlformats.org/drawingml/2006/main" xmlns:r="http://schemas.openxmlformats.org/officeDocument/2006/relationships" xmlns:p="http://schemas.openxmlformats.org/presentationml/2006/main">
+  <p:cSld>
+    <p:spTree>
+      <p:nvGrpSpPr>
+        <p:cNvPr id="1" name=""/>
+        <p:cNvGrpSpPr/>
+        <p:nvPr/>
+      </p:nvGrpSpPr>
+      <p:grpSpPr>
+        <a:xfrm>
+          <a:off x="0" y="0"/>
+          <a:ext cx="0" cy="0"/>
+          <a:chOff x="0" y="0"/>
+          <a:chExt cx="0" cy="0"/>
+        </a:xfrm>
+      </p:grpSpPr>
+      <p:sp>
+        <p:nvSpPr>
+          <p:cNvPr id="5" name="Titel 4">
+            <a:extLst>
+              <a:ext uri="{FF2B5EF4-FFF2-40B4-BE49-F238E27FC236}">
+                <a16:creationId xmlns:a16="http://schemas.microsoft.com/office/drawing/2014/main" id="{2136FCF6-982C-CC37-9625-3EBFC7E7DD13}"/>
+              </a:ext>
+            </a:extLst>
+          </p:cNvPr>
+          <p:cNvSpPr>
+            <a:spLocks noGrp="1"/>
+          </p:cNvSpPr>
+          <p:nvPr>
+            <p:ph type="title"/>
+          </p:nvPr>
+        </p:nvSpPr>
+        <p:spPr>
+          <a:xfrm>
+            <a:off x="1550563" y="1089213"/>
+            <a:ext cx="9879437" cy="980844"/>
+          </a:xfrm>
+        </p:spPr>
+        <p:txBody>
+          <a:bodyPr rtlCol="0"/>
+          <a:lstStyle>
+            <a:defPPr>
+              <a:defRPr lang="de-DE"/>
+            </a:defPPr>
+          </a:lstStyle>
+          <a:p>
+            <a:r>
+              <a:rPr lang="de-DE" dirty="0"/>
+              <a:t>Umsetzung: Interaktionen</a:t>
+            </a:r>
+          </a:p>
+        </p:txBody>
+      </p:sp>
+      <p:sp>
+        <p:nvSpPr>
+          <p:cNvPr id="4" name="Textplatzhalter 3">
+            <a:extLst>
+              <a:ext uri="{FF2B5EF4-FFF2-40B4-BE49-F238E27FC236}">
+                <a16:creationId xmlns:a16="http://schemas.microsoft.com/office/drawing/2014/main" id="{97DCC342-9FD1-7055-EAAC-008DC851B13F}"/>
+              </a:ext>
+            </a:extLst>
+          </p:cNvPr>
+          <p:cNvSpPr>
+            <a:spLocks noGrp="1"/>
+          </p:cNvSpPr>
+          <p:nvPr>
+            <p:ph type="body" sz="quarter" idx="13"/>
+          </p:nvPr>
+        </p:nvSpPr>
+        <p:spPr>
+          <a:xfrm>
+            <a:off x="1550564" y="2331958"/>
+            <a:ext cx="10172044" cy="4379738"/>
+          </a:xfrm>
+        </p:spPr>
+        <p:txBody>
+          <a:bodyPr rtlCol="0"/>
+          <a:lstStyle>
+            <a:defPPr>
+              <a:defRPr lang="de-DE"/>
+            </a:defPPr>
+          </a:lstStyle>
+          <a:p>
+            <a:pPr rtl="0"/>
+            <a:r>
+              <a:rPr lang="de-DE" dirty="0"/>
+              <a:t>Interaktionen mit Canvas und mit 3D </a:t>
+            </a:r>
+            <a:r>
+              <a:rPr lang="de-DE" dirty="0" err="1"/>
+              <a:t>Object</a:t>
+            </a:r>
+            <a:r>
+              <a:rPr lang="de-DE" dirty="0"/>
+              <a:t> Square</a:t>
+            </a:r>
+          </a:p>
+          <a:p>
+            <a:pPr rtl="0"/>
+            <a:r>
+              <a:rPr lang="de-DE" b="1" dirty="0"/>
+              <a:t>1. 3D </a:t>
+            </a:r>
+            <a:r>
+              <a:rPr lang="de-DE" b="1" dirty="0" err="1"/>
+              <a:t>Object</a:t>
+            </a:r>
+            <a:r>
+              <a:rPr lang="de-DE" b="1" dirty="0"/>
+              <a:t> Square:</a:t>
+            </a:r>
+          </a:p>
+          <a:p>
+            <a:r>
+              <a:rPr lang="de-DE" dirty="0" err="1"/>
+              <a:t>Meta</a:t>
+            </a:r>
+            <a:r>
+              <a:rPr lang="de-DE" dirty="0"/>
+              <a:t> </a:t>
+            </a:r>
+            <a:r>
+              <a:rPr lang="de-DE" dirty="0" err="1"/>
+              <a:t>Buidling</a:t>
+            </a:r>
+            <a:r>
+              <a:rPr lang="de-DE" dirty="0"/>
+              <a:t> Block Hand Tracking und Interaction </a:t>
+            </a:r>
+            <a:r>
+              <a:rPr lang="de-DE" dirty="0" err="1"/>
+              <a:t>Rig</a:t>
+            </a:r>
+            <a:r>
+              <a:rPr lang="de-DE" dirty="0"/>
+              <a:t>: </a:t>
+            </a:r>
+            <a:r>
+              <a:rPr lang="de-AT" dirty="0"/>
+              <a:t>Hand Ray </a:t>
+            </a:r>
+            <a:r>
+              <a:rPr lang="de-AT" dirty="0" err="1"/>
+              <a:t>Interactors</a:t>
+            </a:r>
+            <a:endParaRPr lang="de-AT" dirty="0"/>
+          </a:p>
+          <a:p>
+            <a:r>
+              <a:rPr lang="de-AT" dirty="0" err="1"/>
+              <a:t>Sphere</a:t>
+            </a:r>
+            <a:r>
+              <a:rPr lang="de-AT" dirty="0"/>
+              <a:t> Collider und </a:t>
+            </a:r>
+            <a:r>
+              <a:rPr lang="de-AT" dirty="0" err="1"/>
+              <a:t>InteractionSurface</a:t>
+            </a:r>
+            <a:r>
+              <a:rPr lang="de-AT" dirty="0"/>
+              <a:t> (Collider Surface), Komponenten Ray </a:t>
+            </a:r>
+            <a:r>
+              <a:rPr lang="de-AT" dirty="0" err="1"/>
+              <a:t>Interactable</a:t>
+            </a:r>
+            <a:r>
+              <a:rPr lang="de-AT" dirty="0"/>
+              <a:t> und </a:t>
+            </a:r>
+            <a:r>
+              <a:rPr lang="de-AT" dirty="0" err="1"/>
+              <a:t>Interactable</a:t>
+            </a:r>
+            <a:r>
+              <a:rPr lang="de-AT" dirty="0"/>
+              <a:t> Unity Event Wrapper (</a:t>
+            </a:r>
+            <a:r>
+              <a:rPr lang="de-AT" dirty="0" err="1"/>
+              <a:t>When</a:t>
+            </a:r>
+            <a:r>
+              <a:rPr lang="de-AT" dirty="0"/>
+              <a:t> Select(): Funktion von Objekt)</a:t>
+            </a:r>
+          </a:p>
+          <a:p>
+            <a:r>
+              <a:rPr lang="de-AT" b="1" dirty="0"/>
+              <a:t>2. Canvas mit Buttons:</a:t>
+            </a:r>
+          </a:p>
+          <a:p>
+            <a:r>
+              <a:rPr lang="de-AT" dirty="0"/>
+              <a:t>Hinzufügen von </a:t>
+            </a:r>
+            <a:r>
+              <a:rPr lang="de-AT" dirty="0" err="1"/>
+              <a:t>RayCanvasInteraction</a:t>
+            </a:r>
+            <a:r>
+              <a:rPr lang="de-AT" dirty="0"/>
+              <a:t> von SDK (enthält Ray </a:t>
+            </a:r>
+            <a:r>
+              <a:rPr lang="de-AT" dirty="0" err="1"/>
+              <a:t>Interactable</a:t>
+            </a:r>
+            <a:r>
+              <a:rPr lang="de-AT" dirty="0"/>
+              <a:t> &amp; </a:t>
+            </a:r>
+            <a:r>
+              <a:rPr lang="de-AT" dirty="0" err="1"/>
+              <a:t>Pointable</a:t>
+            </a:r>
+            <a:r>
+              <a:rPr lang="de-AT" dirty="0"/>
+              <a:t> Canvas), </a:t>
+            </a:r>
+            <a:r>
+              <a:rPr lang="de-AT" dirty="0" err="1"/>
+              <a:t>EventSystem</a:t>
+            </a:r>
+            <a:r>
+              <a:rPr lang="de-AT" dirty="0"/>
+              <a:t> bekommt </a:t>
+            </a:r>
+            <a:r>
+              <a:rPr lang="de-AT" dirty="0" err="1"/>
+              <a:t>Pointable</a:t>
+            </a:r>
+            <a:r>
+              <a:rPr lang="de-AT" dirty="0"/>
+              <a:t> Canvas Module und deaktiviert Input System UI Input Module</a:t>
+            </a:r>
+          </a:p>
+          <a:p>
+            <a:r>
+              <a:rPr lang="de-AT" dirty="0"/>
+              <a:t>Canvas haben </a:t>
+            </a:r>
+            <a:r>
+              <a:rPr lang="de-AT" dirty="0" err="1"/>
+              <a:t>Pointable</a:t>
+            </a:r>
+            <a:r>
+              <a:rPr lang="de-AT" dirty="0"/>
+              <a:t> Canvas Komponente (</a:t>
+            </a:r>
+            <a:r>
+              <a:rPr lang="de-AT" dirty="0" err="1"/>
+              <a:t>Rendermode</a:t>
+            </a:r>
+            <a:r>
+              <a:rPr lang="de-AT" dirty="0"/>
+              <a:t> und </a:t>
+            </a:r>
+            <a:r>
+              <a:rPr lang="de-AT" dirty="0" err="1"/>
+              <a:t>Camera</a:t>
+            </a:r>
+            <a:r>
+              <a:rPr lang="de-AT" dirty="0"/>
+              <a:t>), Button </a:t>
+            </a:r>
+            <a:r>
+              <a:rPr lang="de-AT" dirty="0" err="1"/>
+              <a:t>interactable</a:t>
+            </a:r>
+            <a:r>
+              <a:rPr lang="de-AT" dirty="0"/>
+              <a:t> Checkbox und On Click() Konfiguration mit Funktion von Objekt</a:t>
+            </a:r>
+            <a:endParaRPr lang="de-DE" dirty="0"/>
+          </a:p>
+        </p:txBody>
+      </p:sp>
+      <p:sp>
+        <p:nvSpPr>
+          <p:cNvPr id="2" name="Foliennummernplatzhalter 1">
+            <a:extLst>
+              <a:ext uri="{FF2B5EF4-FFF2-40B4-BE49-F238E27FC236}">
+                <a16:creationId xmlns:a16="http://schemas.microsoft.com/office/drawing/2014/main" id="{A913EEC9-16E3-6C86-97D0-A7EC7EA09CDA}"/>
+              </a:ext>
+            </a:extLst>
+          </p:cNvPr>
+          <p:cNvSpPr>
+            <a:spLocks noGrp="1"/>
+          </p:cNvSpPr>
+          <p:nvPr>
+            <p:ph type="sldNum" sz="quarter" idx="10"/>
+          </p:nvPr>
+        </p:nvSpPr>
+        <p:spPr>
+          <a:xfrm>
+            <a:off x="10358437" y="457199"/>
+            <a:ext cx="1067589" cy="471489"/>
+          </a:xfrm>
+        </p:spPr>
+        <p:txBody>
+          <a:bodyPr rtlCol="0"/>
+          <a:lstStyle>
+            <a:defPPr>
+              <a:defRPr lang="de-DE"/>
+            </a:defPPr>
+          </a:lstStyle>
+          <a:p>
+            <a:pPr rtl="0"/>
+            <a:fld id="{48F63A3B-78C7-47BE-AE5E-E10140E04643}" type="slidenum">
+              <a:rPr lang="de-DE" smtClean="0"/>
+              <a:pPr rtl="0"/>
+              <a:t>12</a:t>
+            </a:fld>
+            <a:endParaRPr lang="de-DE" dirty="0"/>
+          </a:p>
+        </p:txBody>
+      </p:sp>
+    </p:spTree>
+    <p:extLst>
+      <p:ext uri="{BB962C8B-B14F-4D97-AF65-F5344CB8AC3E}">
+        <p14:creationId xmlns:p14="http://schemas.microsoft.com/office/powerpoint/2010/main" val="3969996159"/>
+      </p:ext>
+    </p:extLst>
+  </p:cSld>
+  <p:clrMapOvr>
+    <a:masterClrMapping/>
+  </p:clrMapOvr>
+</p:sld>
+</file>
+
+<file path=ppt/slides/slide13.xml><?xml version="1.0" encoding="utf-8"?>
+<p:sld xmlns:a="http://schemas.openxmlformats.org/drawingml/2006/main" xmlns:r="http://schemas.openxmlformats.org/officeDocument/2006/relationships" xmlns:p="http://schemas.openxmlformats.org/presentationml/2006/main">
+  <p:cSld>
+    <p:spTree>
+      <p:nvGrpSpPr>
+        <p:cNvPr id="1" name="">
+          <a:extLst>
+            <a:ext uri="{FF2B5EF4-FFF2-40B4-BE49-F238E27FC236}">
+              <a16:creationId xmlns:a16="http://schemas.microsoft.com/office/drawing/2014/main" id="{3B7B54C3-599C-B131-9081-B27C95F39383}"/>
+            </a:ext>
+          </a:extLst>
+        </p:cNvPr>
+        <p:cNvGrpSpPr/>
+        <p:nvPr/>
+      </p:nvGrpSpPr>
+      <p:grpSpPr>
+        <a:xfrm>
+          <a:off x="0" y="0"/>
+          <a:ext cx="0" cy="0"/>
+          <a:chOff x="0" y="0"/>
+          <a:chExt cx="0" cy="0"/>
+        </a:xfrm>
+      </p:grpSpPr>
+      <p:sp>
+        <p:nvSpPr>
+          <p:cNvPr id="2" name="Titel 1">
+            <a:extLst>
+              <a:ext uri="{FF2B5EF4-FFF2-40B4-BE49-F238E27FC236}">
+                <a16:creationId xmlns:a16="http://schemas.microsoft.com/office/drawing/2014/main" id="{EF57E447-5E58-E0FD-30C2-3E5B00DCD69D}"/>
+              </a:ext>
+            </a:extLst>
+          </p:cNvPr>
+          <p:cNvSpPr>
+            <a:spLocks noGrp="1"/>
+          </p:cNvSpPr>
+          <p:nvPr>
+            <p:ph type="title"/>
+          </p:nvPr>
+        </p:nvSpPr>
+        <p:spPr>
+          <a:xfrm>
+            <a:off x="4364809" y="1057274"/>
+            <a:ext cx="5161746" cy="2520217"/>
+          </a:xfrm>
+        </p:spPr>
+        <p:txBody>
+          <a:bodyPr rtlCol="0"/>
+          <a:lstStyle>
+            <a:defPPr>
+              <a:defRPr lang="de-DE"/>
+            </a:defPPr>
+          </a:lstStyle>
+          <a:p>
+            <a:pPr rtl="0"/>
+            <a:r>
+              <a:rPr lang="de-DE" dirty="0"/>
+              <a:t>Verbesserungs-potenzial</a:t>
+            </a:r>
+          </a:p>
+        </p:txBody>
+      </p:sp>
+      <p:sp>
+        <p:nvSpPr>
+          <p:cNvPr id="3" name="Foliennummernplatzhalter 2">
+            <a:extLst>
+              <a:ext uri="{FF2B5EF4-FFF2-40B4-BE49-F238E27FC236}">
+                <a16:creationId xmlns:a16="http://schemas.microsoft.com/office/drawing/2014/main" id="{5ED3A064-58E0-1EC0-B675-4D0085F99E27}"/>
+              </a:ext>
+            </a:extLst>
+          </p:cNvPr>
+          <p:cNvSpPr>
+            <a:spLocks noGrp="1"/>
+          </p:cNvSpPr>
+          <p:nvPr>
+            <p:ph type="sldNum" sz="quarter" idx="10"/>
+          </p:nvPr>
+        </p:nvSpPr>
+        <p:spPr>
+          <a:xfrm>
+            <a:off x="10438475" y="457199"/>
+            <a:ext cx="987552" cy="471489"/>
+          </a:xfrm>
+        </p:spPr>
+        <p:txBody>
+          <a:bodyPr rtlCol="0"/>
+          <a:lstStyle>
+            <a:defPPr>
+              <a:defRPr lang="de-DE"/>
+            </a:defPPr>
+          </a:lstStyle>
+          <a:p>
+            <a:pPr rtl="0"/>
+            <a:fld id="{48F63A3B-78C7-47BE-AE5E-E10140E04643}" type="slidenum">
+              <a:rPr lang="de-DE" smtClean="0"/>
+              <a:pPr rtl="0"/>
+              <a:t>13</a:t>
+            </a:fld>
+            <a:endParaRPr lang="de-DE" dirty="0"/>
+          </a:p>
+        </p:txBody>
+      </p:sp>
+      <p:sp>
+        <p:nvSpPr>
+          <p:cNvPr id="4" name="Inhaltsplatzhalter 3">
+            <a:extLst>
+              <a:ext uri="{FF2B5EF4-FFF2-40B4-BE49-F238E27FC236}">
+                <a16:creationId xmlns:a16="http://schemas.microsoft.com/office/drawing/2014/main" id="{CC757B3E-9F36-4E6A-00FF-388664C806B6}"/>
+              </a:ext>
+            </a:extLst>
+          </p:cNvPr>
+          <p:cNvSpPr>
+            <a:spLocks noGrp="1"/>
+          </p:cNvSpPr>
+          <p:nvPr>
+            <p:ph idx="11"/>
+          </p:nvPr>
+        </p:nvSpPr>
+        <p:spPr>
+          <a:xfrm>
+            <a:off x="4364808" y="3808750"/>
+            <a:ext cx="7043618" cy="2233233"/>
+          </a:xfrm>
+        </p:spPr>
+        <p:txBody>
+          <a:bodyPr rtlCol="0"/>
+          <a:lstStyle>
+            <a:defPPr>
+              <a:defRPr lang="de-DE"/>
+            </a:defPPr>
+          </a:lstStyle>
+          <a:p>
+            <a:pPr rtl="0"/>
+            <a:r>
+              <a:rPr lang="de-DE" dirty="0"/>
+              <a:t>Für welche Upgrades war keine Zeit mehr?</a:t>
+            </a:r>
+          </a:p>
+        </p:txBody>
+      </p:sp>
+    </p:spTree>
+    <p:extLst>
+      <p:ext uri="{BB962C8B-B14F-4D97-AF65-F5344CB8AC3E}">
+        <p14:creationId xmlns:p14="http://schemas.microsoft.com/office/powerpoint/2010/main" val="696659471"/>
+      </p:ext>
+    </p:extLst>
+  </p:cSld>
+  <p:clrMapOvr>
+    <a:masterClrMapping/>
+  </p:clrMapOvr>
+</p:sld>
+</file>
+
+<file path=ppt/slides/slide14.xml><?xml version="1.0" encoding="utf-8"?>
 <p:sld xmlns:a="http://schemas.openxmlformats.org/drawingml/2006/main" xmlns:r="http://schemas.openxmlformats.org/officeDocument/2006/relationships" xmlns:p="http://schemas.openxmlformats.org/presentationml/2006/main">
   <p:cSld>
     <p:spTree>
@@ -18209,8 +19335,8 @@
           <a:p>
             <a:pPr rtl="0"/>
             <a:r>
-              <a:rPr lang="de-DE"/>
-              <a:t>Letzte Tipps und Erkenntnisse</a:t>
+              <a:rPr lang="de-DE" dirty="0"/>
+              <a:t>Verbesserungspotenzial</a:t>
             </a:r>
           </a:p>
         </p:txBody>
@@ -18234,7 +19360,7 @@
         <p:spPr>
           <a:xfrm>
             <a:off x="1550564" y="2303028"/>
-            <a:ext cx="5829147" cy="3961593"/>
+            <a:ext cx="9970876" cy="3961593"/>
           </a:xfrm>
         </p:spPr>
         <p:txBody>
@@ -18250,122 +19376,87 @@
             <a:pPr rtl="0"/>
             <a:r>
               <a:rPr lang="de-DE" dirty="0"/>
-              <a:t>Konsequentes Üben</a:t>
-            </a:r>
-          </a:p>
-          <a:p>
-            <a:pPr lvl="1" rtl="0"/>
+              <a:t>Verbesserung/Verschönerung der Canvas/UI Elemente und korrigieren der Textinhalte</a:t>
+            </a:r>
+          </a:p>
+          <a:p>
+            <a:pPr rtl="0"/>
             <a:r>
               <a:rPr lang="de-DE" dirty="0"/>
-              <a:t>Stärken Ihrer Vertrautheit</a:t>
+              <a:t>Bewegung/Teleportieren auch in Y-Richtung (nach oben und unten)</a:t>
+            </a:r>
+          </a:p>
+          <a:p>
+            <a:r>
+              <a:rPr lang="de-DE" dirty="0"/>
+              <a:t>Konstantes Erscheinen der Szenen im selben Abstand basierend auf </a:t>
+            </a:r>
+            <a:r>
+              <a:rPr lang="de-DE" dirty="0" err="1"/>
+              <a:t>Headsetausrichtung</a:t>
+            </a:r>
+            <a:r>
+              <a:rPr lang="de-DE" dirty="0"/>
+              <a:t> (teilweise umgesetzt z.B. in </a:t>
+            </a:r>
+            <a:r>
+              <a:rPr lang="de-AT" dirty="0" err="1"/>
+              <a:t>OpenRealisticMode</a:t>
+            </a:r>
+            <a:r>
+              <a:rPr lang="de-AT" dirty="0"/>
+              <a:t>() &amp; </a:t>
+            </a:r>
+            <a:r>
+              <a:rPr lang="de-AT" dirty="0" err="1"/>
+              <a:t>OpenComparision</a:t>
+            </a:r>
+            <a:r>
+              <a:rPr lang="de-AT" dirty="0"/>
+              <a:t>() </a:t>
+            </a:r>
+            <a:r>
+              <a:rPr lang="de-DE" dirty="0"/>
+              <a:t>aber buganfällig)</a:t>
             </a:r>
           </a:p>
           <a:p>
             <a:pPr rtl="0"/>
             <a:r>
               <a:rPr lang="de-DE" dirty="0"/>
-              <a:t>Vortragsstil verfeinern</a:t>
-            </a:r>
-          </a:p>
-          <a:p>
-            <a:pPr lvl="1" rtl="0"/>
+              <a:t>Erweitern der Rotation der Planeten um mehrere Achsen (standardmäßig nur 1 Achse)</a:t>
+            </a:r>
+          </a:p>
+          <a:p>
+            <a:pPr rtl="0"/>
             <a:r>
               <a:rPr lang="de-DE" dirty="0"/>
-              <a:t>Tempo, Tonfall und Betonung</a:t>
+              <a:t>Bewegen der Simulation mit Sonne als rotierbarer Mittelpunkt bzw. Zoommöglichkeit</a:t>
             </a:r>
           </a:p>
           <a:p>
             <a:pPr rtl="0"/>
             <a:r>
               <a:rPr lang="de-DE" dirty="0"/>
-              <a:t>Timing und Übergänge</a:t>
-            </a:r>
-          </a:p>
-          <a:p>
-            <a:pPr lvl="1" rtl="0"/>
+              <a:t>Verbesserung der Geschwindigkeitsänderung durch Handgelenk</a:t>
+            </a:r>
+          </a:p>
+          <a:p>
+            <a:pPr rtl="0"/>
             <a:r>
               <a:rPr lang="de-DE" dirty="0"/>
-              <a:t>Streben Sie einen nahtlosen, professionellen Vortrag an.</a:t>
+              <a:t>Umsetzung der vorgeschlagenen Erweiterungen: Sternenbilder,  Werfen und Ablenken von Asteroiden (Drehen der Hand statt Slider für Geschwindigkeit wurde umgesetzt)</a:t>
             </a:r>
           </a:p>
           <a:p>
             <a:pPr rtl="0"/>
             <a:r>
+              <a:rPr lang="de-DE" dirty="0" err="1"/>
+              <a:t>Refactoring</a:t>
+            </a:r>
+            <a:r>
               <a:rPr lang="de-DE" dirty="0"/>
-              <a:t>Übungspublikum</a:t>
-            </a:r>
-          </a:p>
-          <a:p>
-            <a:pPr lvl="1" rtl="0"/>
-            <a:r>
-              <a:rPr lang="de-DE" dirty="0"/>
-              <a:t>Bitten Sie Ihre Kollegen, zuzuhören und Feedback zu geben.</a:t>
-            </a:r>
-          </a:p>
-        </p:txBody>
-      </p:sp>
-      <p:sp>
-        <p:nvSpPr>
-          <p:cNvPr id="13" name="Inhaltsplatzhalter 7">
-            <a:extLst>
-              <a:ext uri="{FF2B5EF4-FFF2-40B4-BE49-F238E27FC236}">
-                <a16:creationId xmlns:a16="http://schemas.microsoft.com/office/drawing/2014/main" id="{0853098E-C088-D323-4BF2-987893F262F6}"/>
-              </a:ext>
-            </a:extLst>
-          </p:cNvPr>
-          <p:cNvSpPr>
-            <a:spLocks noGrp="1"/>
-          </p:cNvSpPr>
-          <p:nvPr>
-            <p:ph sz="half" idx="15"/>
-          </p:nvPr>
-        </p:nvSpPr>
-        <p:spPr>
-          <a:xfrm>
-            <a:off x="7940842" y="2303028"/>
-            <a:ext cx="3485184" cy="3961593"/>
-          </a:xfrm>
-        </p:spPr>
-        <p:txBody>
-          <a:bodyPr rtlCol="0"/>
-          <a:lstStyle>
-            <a:defPPr>
-              <a:defRPr lang="de-DE"/>
-            </a:defPPr>
-          </a:lstStyle>
-          <a:p>
-            <a:pPr rtl="0"/>
-            <a:r>
-              <a:rPr lang="de-DE" dirty="0"/>
-              <a:t>Feedback einholen</a:t>
-            </a:r>
-          </a:p>
-          <a:p>
-            <a:pPr rtl="0"/>
-            <a:r>
-              <a:rPr lang="de-DE" dirty="0"/>
-              <a:t>Über Leistung nachdenken</a:t>
-            </a:r>
-          </a:p>
-          <a:p>
-            <a:pPr rtl="0"/>
-            <a:r>
-              <a:rPr lang="de-DE" dirty="0"/>
-              <a:t>Erkunden neuer Techniken</a:t>
-            </a:r>
-          </a:p>
-          <a:p>
-            <a:pPr rtl="0"/>
-            <a:r>
-              <a:rPr lang="de-DE" dirty="0"/>
-              <a:t>Persönliche Ziele festlegen</a:t>
-            </a:r>
-          </a:p>
-          <a:p>
-            <a:pPr rtl="0"/>
-            <a:r>
-              <a:rPr lang="de-DE" dirty="0"/>
-              <a:t>Wiederholen und Anpassen</a:t>
+              <a:t> und Verbesserung der Skripte wegen möglichen Redundanzen durch stückweises Erweitern</a:t>
             </a:r>
           </a:p>
         </p:txBody>
@@ -18404,7 +19495,7 @@
             <a:fld id="{48F63A3B-78C7-47BE-AE5E-E10140E04643}" type="slidenum">
               <a:rPr lang="de-DE" smtClean="0"/>
               <a:pPr rtl="0"/>
-              <a:t>10</a:t>
+              <a:t>14</a:t>
             </a:fld>
             <a:endParaRPr lang="de-DE" dirty="0"/>
           </a:p>
@@ -18414,780 +19505,6 @@
     <p:extLst>
       <p:ext uri="{BB962C8B-B14F-4D97-AF65-F5344CB8AC3E}">
         <p14:creationId xmlns:p14="http://schemas.microsoft.com/office/powerpoint/2010/main" val="2498021601"/>
-      </p:ext>
-    </p:extLst>
-  </p:cSld>
-  <p:clrMapOvr>
-    <a:masterClrMapping/>
-  </p:clrMapOvr>
-</p:sld>
-</file>
-
-<file path=ppt/slides/slide11.xml><?xml version="1.0" encoding="utf-8"?>
-<p:sld xmlns:a="http://schemas.openxmlformats.org/drawingml/2006/main" xmlns:r="http://schemas.openxmlformats.org/officeDocument/2006/relationships" xmlns:p="http://schemas.openxmlformats.org/presentationml/2006/main">
-  <p:cSld>
-    <p:spTree>
-      <p:nvGrpSpPr>
-        <p:cNvPr id="1" name=""/>
-        <p:cNvGrpSpPr/>
-        <p:nvPr/>
-      </p:nvGrpSpPr>
-      <p:grpSpPr>
-        <a:xfrm>
-          <a:off x="0" y="0"/>
-          <a:ext cx="0" cy="0"/>
-          <a:chOff x="0" y="0"/>
-          <a:chExt cx="0" cy="0"/>
-        </a:xfrm>
-      </p:grpSpPr>
-      <p:sp>
-        <p:nvSpPr>
-          <p:cNvPr id="2" name="Titel 1">
-            <a:extLst>
-              <a:ext uri="{FF2B5EF4-FFF2-40B4-BE49-F238E27FC236}">
-                <a16:creationId xmlns:a16="http://schemas.microsoft.com/office/drawing/2014/main" id="{4730A324-0737-F0DA-1F7D-10CBE06D7C3F}"/>
-              </a:ext>
-            </a:extLst>
-          </p:cNvPr>
-          <p:cNvSpPr>
-            <a:spLocks noGrp="1"/>
-          </p:cNvSpPr>
-          <p:nvPr>
-            <p:ph type="title"/>
-          </p:nvPr>
-        </p:nvSpPr>
-        <p:spPr>
-          <a:xfrm>
-            <a:off x="914400" y="1057274"/>
-            <a:ext cx="10511627" cy="1012785"/>
-          </a:xfrm>
-        </p:spPr>
-        <p:txBody>
-          <a:bodyPr rtlCol="0"/>
-          <a:lstStyle>
-            <a:defPPr>
-              <a:defRPr lang="de-DE"/>
-            </a:defPPr>
-          </a:lstStyle>
-          <a:p>
-            <a:pPr rtl="0"/>
-            <a:r>
-              <a:rPr lang="de-DE" dirty="0"/>
-              <a:t>Metriken zum Einsatz von Referenten</a:t>
-            </a:r>
-          </a:p>
-        </p:txBody>
-      </p:sp>
-      <p:graphicFrame>
-        <p:nvGraphicFramePr>
-          <p:cNvPr id="5" name="Inhaltsplatzhalter 4">
-            <a:extLst>
-              <a:ext uri="{FF2B5EF4-FFF2-40B4-BE49-F238E27FC236}">
-                <a16:creationId xmlns:a16="http://schemas.microsoft.com/office/drawing/2014/main" id="{AC0C7FF8-9CAF-6C67-C1E5-AF40401D0B3D}"/>
-              </a:ext>
-            </a:extLst>
-          </p:cNvPr>
-          <p:cNvGraphicFramePr>
-            <a:graphicFrameLocks noGrp="1"/>
-          </p:cNvGraphicFramePr>
-          <p:nvPr>
-            <p:ph sz="quarter" idx="4"/>
-            <p:extLst>
-              <p:ext uri="{D42A27DB-BD31-4B8C-83A1-F6EECF244321}">
-                <p14:modId xmlns:p14="http://schemas.microsoft.com/office/powerpoint/2010/main" val="3999503228"/>
-              </p:ext>
-            </p:extLst>
-          </p:nvPr>
-        </p:nvGraphicFramePr>
-        <p:xfrm>
-          <a:off x="914400" y="2316163"/>
-          <a:ext cx="10510836" cy="3948462"/>
-        </p:xfrm>
-        <a:graphic>
-          <a:graphicData uri="http://schemas.openxmlformats.org/drawingml/2006/table">
-            <a:tbl>
-              <a:tblPr firstRow="1" bandRow="1">
-                <a:tableStyleId>{C083E6E3-FA7D-4D7B-A595-EF9225AFEA82}</a:tableStyleId>
-              </a:tblPr>
-              <a:tblGrid>
-                <a:gridCol w="4080076">
-                  <a:extLst>
-                    <a:ext uri="{9D8B030D-6E8A-4147-A177-3AD203B41FA5}">
-                      <a16:colId xmlns:a16="http://schemas.microsoft.com/office/drawing/2014/main" val="1764027237"/>
-                    </a:ext>
-                  </a:extLst>
-                </a:gridCol>
-                <a:gridCol w="4080076">
-                  <a:extLst>
-                    <a:ext uri="{9D8B030D-6E8A-4147-A177-3AD203B41FA5}">
-                      <a16:colId xmlns:a16="http://schemas.microsoft.com/office/drawing/2014/main" val="778914542"/>
-                    </a:ext>
-                  </a:extLst>
-                </a:gridCol>
-                <a:gridCol w="1175342">
-                  <a:extLst>
-                    <a:ext uri="{9D8B030D-6E8A-4147-A177-3AD203B41FA5}">
-                      <a16:colId xmlns:a16="http://schemas.microsoft.com/office/drawing/2014/main" val="4233386372"/>
-                    </a:ext>
-                  </a:extLst>
-                </a:gridCol>
-                <a:gridCol w="1175342">
-                  <a:extLst>
-                    <a:ext uri="{9D8B030D-6E8A-4147-A177-3AD203B41FA5}">
-                      <a16:colId xmlns:a16="http://schemas.microsoft.com/office/drawing/2014/main" val="1626524931"/>
-                    </a:ext>
-                  </a:extLst>
-                </a:gridCol>
-              </a:tblGrid>
-              <a:tr h="658077">
-                <a:tc>
-                  <a:txBody>
-                    <a:bodyPr/>
-                    <a:lstStyle>
-                      <a:defPPr>
-                        <a:defRPr lang="de-DE"/>
-                      </a:defPPr>
-                    </a:lstStyle>
-                    <a:p>
-                      <a:pPr rtl="0"/>
-                      <a:r>
-                        <a:rPr lang="de-DE"/>
-                        <a:t>Einflussfaktor</a:t>
-                      </a:r>
-                    </a:p>
-                  </a:txBody>
-                  <a:tcPr anchor="ctr"/>
-                </a:tc>
-                <a:tc>
-                  <a:txBody>
-                    <a:bodyPr/>
-                    <a:lstStyle>
-                      <a:defPPr>
-                        <a:defRPr lang="de-DE"/>
-                      </a:defPPr>
-                    </a:lstStyle>
-                    <a:p>
-                      <a:pPr rtl="0"/>
-                      <a:r>
-                        <a:rPr lang="de-DE"/>
-                        <a:t>Messung</a:t>
-                      </a:r>
-                    </a:p>
-                  </a:txBody>
-                  <a:tcPr anchor="ctr"/>
-                </a:tc>
-                <a:tc>
-                  <a:txBody>
-                    <a:bodyPr/>
-                    <a:lstStyle>
-                      <a:defPPr>
-                        <a:defRPr lang="de-DE"/>
-                      </a:defPPr>
-                    </a:lstStyle>
-                    <a:p>
-                      <a:pPr rtl="0"/>
-                      <a:r>
-                        <a:rPr lang="de-DE"/>
-                        <a:t>Ziel</a:t>
-                      </a:r>
-                    </a:p>
-                  </a:txBody>
-                  <a:tcPr anchor="ctr"/>
-                </a:tc>
-                <a:tc>
-                  <a:txBody>
-                    <a:bodyPr/>
-                    <a:lstStyle>
-                      <a:defPPr>
-                        <a:defRPr lang="de-DE"/>
-                      </a:defPPr>
-                    </a:lstStyle>
-                    <a:p>
-                      <a:pPr rtl="0"/>
-                      <a:r>
-                        <a:rPr lang="de-DE"/>
-                        <a:t>Erreicht</a:t>
-                      </a:r>
-                    </a:p>
-                  </a:txBody>
-                  <a:tcPr anchor="ctr"/>
-                </a:tc>
-                <a:extLst>
-                  <a:ext uri="{0D108BD9-81ED-4DB2-BD59-A6C34878D82A}">
-                    <a16:rowId xmlns:a16="http://schemas.microsoft.com/office/drawing/2014/main" val="2865033212"/>
-                  </a:ext>
-                </a:extLst>
-              </a:tr>
-              <a:tr h="658077">
-                <a:tc>
-                  <a:txBody>
-                    <a:bodyPr/>
-                    <a:lstStyle>
-                      <a:defPPr>
-                        <a:defRPr lang="de-DE"/>
-                      </a:defPPr>
-                    </a:lstStyle>
-                    <a:p>
-                      <a:pPr rtl="0"/>
-                      <a:r>
-                        <a:rPr lang="de-DE"/>
-                        <a:t>Publikumsinteraktion</a:t>
-                      </a:r>
-                    </a:p>
-                  </a:txBody>
-                  <a:tcPr anchor="ctr"/>
-                </a:tc>
-                <a:tc>
-                  <a:txBody>
-                    <a:bodyPr/>
-                    <a:lstStyle>
-                      <a:defPPr>
-                        <a:defRPr lang="de-DE"/>
-                      </a:defPPr>
-                    </a:lstStyle>
-                    <a:p>
-                      <a:pPr rtl="0"/>
-                      <a:r>
-                        <a:rPr lang="de-DE"/>
-                        <a:t>Prozentsatz (%)</a:t>
-                      </a:r>
-                    </a:p>
-                  </a:txBody>
-                  <a:tcPr anchor="ctr"/>
-                </a:tc>
-                <a:tc>
-                  <a:txBody>
-                    <a:bodyPr/>
-                    <a:lstStyle>
-                      <a:defPPr>
-                        <a:defRPr lang="de-DE"/>
-                      </a:defPPr>
-                    </a:lstStyle>
-                    <a:p>
-                      <a:pPr rtl="0"/>
-                      <a:r>
-                        <a:rPr lang="de-DE"/>
-                        <a:t>85</a:t>
-                      </a:r>
-                    </a:p>
-                  </a:txBody>
-                  <a:tcPr anchor="ctr"/>
-                </a:tc>
-                <a:tc>
-                  <a:txBody>
-                    <a:bodyPr/>
-                    <a:lstStyle>
-                      <a:defPPr>
-                        <a:defRPr lang="de-DE"/>
-                      </a:defPPr>
-                    </a:lstStyle>
-                    <a:p>
-                      <a:pPr rtl="0"/>
-                      <a:r>
-                        <a:rPr lang="de-DE"/>
-                        <a:t>88</a:t>
-                      </a:r>
-                    </a:p>
-                  </a:txBody>
-                  <a:tcPr anchor="ctr"/>
-                </a:tc>
-                <a:extLst>
-                  <a:ext uri="{0D108BD9-81ED-4DB2-BD59-A6C34878D82A}">
-                    <a16:rowId xmlns:a16="http://schemas.microsoft.com/office/drawing/2014/main" val="773796761"/>
-                  </a:ext>
-                </a:extLst>
-              </a:tr>
-              <a:tr h="658077">
-                <a:tc>
-                  <a:txBody>
-                    <a:bodyPr/>
-                    <a:lstStyle>
-                      <a:defPPr>
-                        <a:defRPr lang="de-DE"/>
-                      </a:defPPr>
-                    </a:lstStyle>
-                    <a:p>
-                      <a:pPr rtl="0"/>
-                      <a:r>
-                        <a:rPr lang="de-DE"/>
-                        <a:t>Wissen bewahren</a:t>
-                      </a:r>
-                    </a:p>
-                  </a:txBody>
-                  <a:tcPr anchor="ctr"/>
-                </a:tc>
-                <a:tc>
-                  <a:txBody>
-                    <a:bodyPr/>
-                    <a:lstStyle>
-                      <a:defPPr>
-                        <a:defRPr lang="de-DE"/>
-                      </a:defPPr>
-                    </a:lstStyle>
-                    <a:p>
-                      <a:pPr rtl="0"/>
-                      <a:r>
-                        <a:rPr lang="de-DE"/>
-                        <a:t>Prozentsatz (%)</a:t>
-                      </a:r>
-                    </a:p>
-                  </a:txBody>
-                  <a:tcPr anchor="ctr"/>
-                </a:tc>
-                <a:tc>
-                  <a:txBody>
-                    <a:bodyPr/>
-                    <a:lstStyle>
-                      <a:defPPr>
-                        <a:defRPr lang="de-DE"/>
-                      </a:defPPr>
-                    </a:lstStyle>
-                    <a:p>
-                      <a:pPr rtl="0"/>
-                      <a:r>
-                        <a:rPr lang="de-DE"/>
-                        <a:t>75</a:t>
-                      </a:r>
-                    </a:p>
-                  </a:txBody>
-                  <a:tcPr anchor="ctr"/>
-                </a:tc>
-                <a:tc>
-                  <a:txBody>
-                    <a:bodyPr/>
-                    <a:lstStyle>
-                      <a:defPPr>
-                        <a:defRPr lang="de-DE"/>
-                      </a:defPPr>
-                    </a:lstStyle>
-                    <a:p>
-                      <a:pPr rtl="0"/>
-                      <a:r>
-                        <a:rPr lang="de-DE"/>
-                        <a:t>80</a:t>
-                      </a:r>
-                    </a:p>
-                  </a:txBody>
-                  <a:tcPr anchor="ctr"/>
-                </a:tc>
-                <a:extLst>
-                  <a:ext uri="{0D108BD9-81ED-4DB2-BD59-A6C34878D82A}">
-                    <a16:rowId xmlns:a16="http://schemas.microsoft.com/office/drawing/2014/main" val="1789202252"/>
-                  </a:ext>
-                </a:extLst>
-              </a:tr>
-              <a:tr h="658077">
-                <a:tc>
-                  <a:txBody>
-                    <a:bodyPr/>
-                    <a:lstStyle>
-                      <a:defPPr>
-                        <a:defRPr lang="de-DE"/>
-                      </a:defPPr>
-                    </a:lstStyle>
-                    <a:p>
-                      <a:pPr rtl="0"/>
-                      <a:r>
-                        <a:rPr lang="de-DE" dirty="0"/>
-                        <a:t>Umfragen nach der Präsentation</a:t>
-                      </a:r>
-                    </a:p>
-                  </a:txBody>
-                  <a:tcPr anchor="ctr"/>
-                </a:tc>
-                <a:tc>
-                  <a:txBody>
-                    <a:bodyPr/>
-                    <a:lstStyle>
-                      <a:defPPr>
-                        <a:defRPr lang="de-DE"/>
-                      </a:defPPr>
-                    </a:lstStyle>
-                    <a:p>
-                      <a:pPr rtl="0"/>
-                      <a:r>
-                        <a:rPr lang="de-DE"/>
-                        <a:t>Durchschnittliche Bewertung</a:t>
-                      </a:r>
-                    </a:p>
-                  </a:txBody>
-                  <a:tcPr anchor="ctr"/>
-                </a:tc>
-                <a:tc>
-                  <a:txBody>
-                    <a:bodyPr/>
-                    <a:lstStyle>
-                      <a:defPPr>
-                        <a:defRPr lang="de-DE"/>
-                      </a:defPPr>
-                    </a:lstStyle>
-                    <a:p>
-                      <a:pPr rtl="0"/>
-                      <a:r>
-                        <a:rPr lang="de-DE"/>
-                        <a:t>4,2</a:t>
-                      </a:r>
-                    </a:p>
-                  </a:txBody>
-                  <a:tcPr anchor="ctr"/>
-                </a:tc>
-                <a:tc>
-                  <a:txBody>
-                    <a:bodyPr/>
-                    <a:lstStyle>
-                      <a:defPPr>
-                        <a:defRPr lang="de-DE"/>
-                      </a:defPPr>
-                    </a:lstStyle>
-                    <a:p>
-                      <a:pPr rtl="0"/>
-                      <a:r>
-                        <a:rPr lang="de-DE"/>
-                        <a:t>4,5</a:t>
-                      </a:r>
-                    </a:p>
-                  </a:txBody>
-                  <a:tcPr anchor="ctr"/>
-                </a:tc>
-                <a:extLst>
-                  <a:ext uri="{0D108BD9-81ED-4DB2-BD59-A6C34878D82A}">
-                    <a16:rowId xmlns:a16="http://schemas.microsoft.com/office/drawing/2014/main" val="2325356481"/>
-                  </a:ext>
-                </a:extLst>
-              </a:tr>
-              <a:tr h="658077">
-                <a:tc>
-                  <a:txBody>
-                    <a:bodyPr/>
-                    <a:lstStyle>
-                      <a:defPPr>
-                        <a:defRPr lang="de-DE"/>
-                      </a:defPPr>
-                    </a:lstStyle>
-                    <a:p>
-                      <a:pPr rtl="0"/>
-                      <a:r>
-                        <a:rPr lang="de-DE"/>
-                        <a:t>Empfehlungsrate</a:t>
-                      </a:r>
-                    </a:p>
-                  </a:txBody>
-                  <a:tcPr anchor="ctr"/>
-                </a:tc>
-                <a:tc>
-                  <a:txBody>
-                    <a:bodyPr/>
-                    <a:lstStyle>
-                      <a:defPPr>
-                        <a:defRPr lang="de-DE"/>
-                      </a:defPPr>
-                    </a:lstStyle>
-                    <a:p>
-                      <a:pPr rtl="0"/>
-                      <a:r>
-                        <a:rPr lang="de-DE"/>
-                        <a:t>Prozentsatz (%)</a:t>
-                      </a:r>
-                    </a:p>
-                  </a:txBody>
-                  <a:tcPr anchor="ctr"/>
-                </a:tc>
-                <a:tc>
-                  <a:txBody>
-                    <a:bodyPr/>
-                    <a:lstStyle>
-                      <a:defPPr>
-                        <a:defRPr lang="de-DE"/>
-                      </a:defPPr>
-                    </a:lstStyle>
-                    <a:p>
-                      <a:pPr rtl="0"/>
-                      <a:r>
-                        <a:rPr lang="de-DE"/>
-                        <a:t>10</a:t>
-                      </a:r>
-                    </a:p>
-                  </a:txBody>
-                  <a:tcPr anchor="ctr"/>
-                </a:tc>
-                <a:tc>
-                  <a:txBody>
-                    <a:bodyPr/>
-                    <a:lstStyle>
-                      <a:defPPr>
-                        <a:defRPr lang="de-DE"/>
-                      </a:defPPr>
-                    </a:lstStyle>
-                    <a:p>
-                      <a:pPr rtl="0"/>
-                      <a:r>
-                        <a:rPr lang="de-DE"/>
-                        <a:t>12</a:t>
-                      </a:r>
-                    </a:p>
-                  </a:txBody>
-                  <a:tcPr anchor="ctr"/>
-                </a:tc>
-                <a:extLst>
-                  <a:ext uri="{0D108BD9-81ED-4DB2-BD59-A6C34878D82A}">
-                    <a16:rowId xmlns:a16="http://schemas.microsoft.com/office/drawing/2014/main" val="3322085491"/>
-                  </a:ext>
-                </a:extLst>
-              </a:tr>
-              <a:tr h="658077">
-                <a:tc>
-                  <a:txBody>
-                    <a:bodyPr/>
-                    <a:lstStyle>
-                      <a:defPPr>
-                        <a:defRPr lang="de-DE"/>
-                      </a:defPPr>
-                    </a:lstStyle>
-                    <a:p>
-                      <a:pPr rtl="0"/>
-                      <a:r>
-                        <a:rPr lang="de-DE"/>
-                        <a:t>Möglichkeiten der Zusammenarbeit</a:t>
-                      </a:r>
-                    </a:p>
-                  </a:txBody>
-                  <a:tcPr anchor="ctr"/>
-                </a:tc>
-                <a:tc>
-                  <a:txBody>
-                    <a:bodyPr/>
-                    <a:lstStyle>
-                      <a:defPPr>
-                        <a:defRPr lang="de-DE"/>
-                      </a:defPPr>
-                    </a:lstStyle>
-                    <a:p>
-                      <a:pPr rtl="0"/>
-                      <a:r>
-                        <a:rPr lang="de-DE"/>
-                        <a:t>Anzahl der Möglichkeiten</a:t>
-                      </a:r>
-                    </a:p>
-                  </a:txBody>
-                  <a:tcPr anchor="ctr"/>
-                </a:tc>
-                <a:tc>
-                  <a:txBody>
-                    <a:bodyPr/>
-                    <a:lstStyle>
-                      <a:defPPr>
-                        <a:defRPr lang="de-DE"/>
-                      </a:defPPr>
-                    </a:lstStyle>
-                    <a:p>
-                      <a:pPr rtl="0"/>
-                      <a:r>
-                        <a:rPr lang="de-DE"/>
-                        <a:t>8</a:t>
-                      </a:r>
-                    </a:p>
-                  </a:txBody>
-                  <a:tcPr anchor="ctr"/>
-                </a:tc>
-                <a:tc>
-                  <a:txBody>
-                    <a:bodyPr/>
-                    <a:lstStyle>
-                      <a:defPPr>
-                        <a:defRPr lang="de-DE"/>
-                      </a:defPPr>
-                    </a:lstStyle>
-                    <a:p>
-                      <a:pPr rtl="0"/>
-                      <a:r>
-                        <a:rPr lang="de-DE" dirty="0"/>
-                        <a:t>10</a:t>
-                      </a:r>
-                    </a:p>
-                  </a:txBody>
-                  <a:tcPr anchor="ctr"/>
-                </a:tc>
-                <a:extLst>
-                  <a:ext uri="{0D108BD9-81ED-4DB2-BD59-A6C34878D82A}">
-                    <a16:rowId xmlns:a16="http://schemas.microsoft.com/office/drawing/2014/main" val="2682318458"/>
-                  </a:ext>
-                </a:extLst>
-              </a:tr>
-            </a:tbl>
-          </a:graphicData>
-        </a:graphic>
-      </p:graphicFrame>
-      <p:sp>
-        <p:nvSpPr>
-          <p:cNvPr id="3" name="Foliennummernplatzhalter 2">
-            <a:extLst>
-              <a:ext uri="{FF2B5EF4-FFF2-40B4-BE49-F238E27FC236}">
-                <a16:creationId xmlns:a16="http://schemas.microsoft.com/office/drawing/2014/main" id="{AC21286A-7B29-3B58-1636-0F45723890AB}"/>
-              </a:ext>
-            </a:extLst>
-          </p:cNvPr>
-          <p:cNvSpPr>
-            <a:spLocks noGrp="1"/>
-          </p:cNvSpPr>
-          <p:nvPr>
-            <p:ph type="sldNum" sz="quarter" idx="10"/>
-          </p:nvPr>
-        </p:nvSpPr>
-        <p:spPr>
-          <a:xfrm>
-            <a:off x="10358437" y="457199"/>
-            <a:ext cx="1067589" cy="471489"/>
-          </a:xfrm>
-        </p:spPr>
-        <p:txBody>
-          <a:bodyPr rtlCol="0"/>
-          <a:lstStyle>
-            <a:defPPr>
-              <a:defRPr lang="de-DE"/>
-            </a:defPPr>
-          </a:lstStyle>
-          <a:p>
-            <a:pPr rtl="0"/>
-            <a:fld id="{48F63A3B-78C7-47BE-AE5E-E10140E04643}" type="slidenum">
-              <a:rPr lang="de-DE" smtClean="0"/>
-              <a:pPr rtl="0"/>
-              <a:t>11</a:t>
-            </a:fld>
-            <a:endParaRPr lang="de-DE" dirty="0"/>
-          </a:p>
-        </p:txBody>
-      </p:sp>
-    </p:spTree>
-    <p:extLst>
-      <p:ext uri="{BB962C8B-B14F-4D97-AF65-F5344CB8AC3E}">
-        <p14:creationId xmlns:p14="http://schemas.microsoft.com/office/powerpoint/2010/main" val="1686213229"/>
-      </p:ext>
-    </p:extLst>
-  </p:cSld>
-  <p:clrMapOvr>
-    <a:masterClrMapping/>
-  </p:clrMapOvr>
-</p:sld>
-</file>
-
-<file path=ppt/slides/slide12.xml><?xml version="1.0" encoding="utf-8"?>
-<p:sld xmlns:a="http://schemas.openxmlformats.org/drawingml/2006/main" xmlns:r="http://schemas.openxmlformats.org/officeDocument/2006/relationships" xmlns:p="http://schemas.openxmlformats.org/presentationml/2006/main">
-  <p:cSld>
-    <p:spTree>
-      <p:nvGrpSpPr>
-        <p:cNvPr id="1" name=""/>
-        <p:cNvGrpSpPr/>
-        <p:nvPr/>
-      </p:nvGrpSpPr>
-      <p:grpSpPr>
-        <a:xfrm>
-          <a:off x="0" y="0"/>
-          <a:ext cx="0" cy="0"/>
-          <a:chOff x="0" y="0"/>
-          <a:chExt cx="0" cy="0"/>
-        </a:xfrm>
-      </p:grpSpPr>
-      <p:sp>
-        <p:nvSpPr>
-          <p:cNvPr id="2" name="Titel 1">
-            <a:extLst>
-              <a:ext uri="{FF2B5EF4-FFF2-40B4-BE49-F238E27FC236}">
-                <a16:creationId xmlns:a16="http://schemas.microsoft.com/office/drawing/2014/main" id="{509D22C5-0C9E-B582-A8FE-B45E70A01E7F}"/>
-              </a:ext>
-            </a:extLst>
-          </p:cNvPr>
-          <p:cNvSpPr>
-            <a:spLocks noGrp="1"/>
-          </p:cNvSpPr>
-          <p:nvPr>
-            <p:ph type="ctrTitle"/>
-          </p:nvPr>
-        </p:nvSpPr>
-        <p:spPr>
-          <a:xfrm>
-            <a:off x="914401" y="849782"/>
-            <a:ext cx="3213716" cy="2727709"/>
-          </a:xfrm>
-        </p:spPr>
-        <p:txBody>
-          <a:bodyPr rtlCol="0"/>
-          <a:lstStyle>
-            <a:defPPr>
-              <a:defRPr lang="de-DE"/>
-            </a:defPPr>
-          </a:lstStyle>
-          <a:p>
-            <a:pPr rtl="0"/>
-            <a:r>
-              <a:rPr lang="de-DE" dirty="0"/>
-              <a:t>Vielen Dank</a:t>
-            </a:r>
-          </a:p>
-        </p:txBody>
-      </p:sp>
-      <p:sp>
-        <p:nvSpPr>
-          <p:cNvPr id="3" name="Untertitel 2">
-            <a:extLst>
-              <a:ext uri="{FF2B5EF4-FFF2-40B4-BE49-F238E27FC236}">
-                <a16:creationId xmlns:a16="http://schemas.microsoft.com/office/drawing/2014/main" id="{D8B5CEF2-E667-BBB5-2EA6-C06F93B6DE12}"/>
-              </a:ext>
-            </a:extLst>
-          </p:cNvPr>
-          <p:cNvSpPr>
-            <a:spLocks noGrp="1"/>
-          </p:cNvSpPr>
-          <p:nvPr>
-            <p:ph type="subTitle" idx="1"/>
-          </p:nvPr>
-        </p:nvSpPr>
-        <p:spPr>
-          <a:xfrm>
-            <a:off x="914401" y="3813606"/>
-            <a:ext cx="5715000" cy="2234642"/>
-          </a:xfrm>
-        </p:spPr>
-        <p:txBody>
-          <a:bodyPr rtlCol="0"/>
-          <a:lstStyle>
-            <a:defPPr>
-              <a:defRPr lang="de-DE"/>
-            </a:defPPr>
-          </a:lstStyle>
-          <a:p>
-            <a:pPr rtl="0"/>
-            <a:r>
-              <a:rPr lang="de-DE"/>
-              <a:t>Brita Tamm</a:t>
-            </a:r>
-          </a:p>
-          <a:p>
-            <a:pPr rtl="0"/>
-            <a:r>
-              <a:rPr lang="de-DE"/>
-              <a:t>502-555-0152</a:t>
-            </a:r>
-          </a:p>
-          <a:p>
-            <a:pPr rtl="0"/>
-            <a:r>
-              <a:rPr lang="de-DE"/>
-              <a:t>brita@firstupconsultants.com </a:t>
-            </a:r>
-          </a:p>
-          <a:p>
-            <a:pPr rtl="0"/>
-            <a:r>
-              <a:rPr lang="de-DE"/>
-              <a:t>www.firstupconsultants.com</a:t>
-            </a:r>
-          </a:p>
-        </p:txBody>
-      </p:sp>
-    </p:spTree>
-    <p:extLst>
-      <p:ext uri="{BB962C8B-B14F-4D97-AF65-F5344CB8AC3E}">
-        <p14:creationId xmlns:p14="http://schemas.microsoft.com/office/powerpoint/2010/main" val="1973173046"/>
       </p:ext>
     </p:extLst>
   </p:cSld>
@@ -19271,11 +19588,13 @@
         <p:spPr>
           <a:xfrm>
             <a:off x="914400" y="2834640"/>
-            <a:ext cx="6583680" cy="3207344"/>
+            <a:ext cx="6583680" cy="3813048"/>
           </a:xfrm>
         </p:spPr>
         <p:txBody>
-          <a:bodyPr rtlCol="0"/>
+          <a:bodyPr rtlCol="0">
+            <a:normAutofit/>
+          </a:bodyPr>
           <a:lstStyle>
             <a:defPPr>
               <a:defRPr lang="de-DE"/>
@@ -19299,21 +19618,28 @@
             <a:pPr rtl="0"/>
             <a:r>
               <a:rPr lang="de-DE" dirty="0"/>
-              <a:t>XXX</a:t>
+              <a:t>Umsetzung: Hierarchie</a:t>
             </a:r>
           </a:p>
           <a:p>
             <a:pPr rtl="0"/>
             <a:r>
               <a:rPr lang="de-DE" dirty="0"/>
-              <a:t>XXX</a:t>
+              <a:t>Umsetzung: Skripte</a:t>
             </a:r>
           </a:p>
           <a:p>
             <a:pPr rtl="0"/>
             <a:r>
               <a:rPr lang="de-DE" dirty="0"/>
-              <a:t>Verwendung von KI</a:t>
+              <a:t>Umsetzung: Interaktionen</a:t>
+            </a:r>
+          </a:p>
+          <a:p>
+            <a:pPr rtl="0"/>
+            <a:r>
+              <a:rPr lang="de-DE" dirty="0"/>
+              <a:t>Verbesserungspotenzial</a:t>
             </a:r>
           </a:p>
         </p:txBody>
@@ -19351,7 +19677,7 @@
             <a:pPr rtl="0"/>
             <a:fld id="{48F63A3B-78C7-47BE-AE5E-E10140E04643}" type="slidenum">
               <a:rPr lang="de-DE" smtClean="0"/>
-              <a:pPr/>
+              <a:pPr rtl="0"/>
               <a:t>2</a:t>
             </a:fld>
             <a:endParaRPr lang="de-DE" dirty="0"/>
@@ -19530,6 +19856,1441 @@
   <p:cSld>
     <p:spTree>
       <p:nvGrpSpPr>
+        <p:cNvPr id="1" name=""/>
+        <p:cNvGrpSpPr/>
+        <p:nvPr/>
+      </p:nvGrpSpPr>
+      <p:grpSpPr>
+        <a:xfrm>
+          <a:off x="0" y="0"/>
+          <a:ext cx="0" cy="0"/>
+          <a:chOff x="0" y="0"/>
+          <a:chExt cx="0" cy="0"/>
+        </a:xfrm>
+      </p:grpSpPr>
+      <p:sp>
+        <p:nvSpPr>
+          <p:cNvPr id="3" name="Titel 2">
+            <a:extLst>
+              <a:ext uri="{FF2B5EF4-FFF2-40B4-BE49-F238E27FC236}">
+                <a16:creationId xmlns:a16="http://schemas.microsoft.com/office/drawing/2014/main" id="{3D55F2D4-C20E-BEBC-1CCF-4449B0456A7E}"/>
+              </a:ext>
+            </a:extLst>
+          </p:cNvPr>
+          <p:cNvSpPr>
+            <a:spLocks noGrp="1"/>
+          </p:cNvSpPr>
+          <p:nvPr>
+            <p:ph type="title"/>
+          </p:nvPr>
+        </p:nvSpPr>
+        <p:spPr>
+          <a:xfrm>
+            <a:off x="914401" y="965393"/>
+            <a:ext cx="7725746" cy="1091627"/>
+          </a:xfrm>
+        </p:spPr>
+        <p:txBody>
+          <a:bodyPr rtlCol="0"/>
+          <a:lstStyle>
+            <a:defPPr>
+              <a:defRPr lang="de-DE"/>
+            </a:defPPr>
+          </a:lstStyle>
+          <a:p>
+            <a:pPr rtl="0"/>
+            <a:r>
+              <a:rPr lang="de-DE" dirty="0"/>
+              <a:t>Projektidee</a:t>
+            </a:r>
+          </a:p>
+        </p:txBody>
+      </p:sp>
+      <p:sp>
+        <p:nvSpPr>
+          <p:cNvPr id="14" name="Inhaltsplatzhalter 7">
+            <a:extLst>
+              <a:ext uri="{FF2B5EF4-FFF2-40B4-BE49-F238E27FC236}">
+                <a16:creationId xmlns:a16="http://schemas.microsoft.com/office/drawing/2014/main" id="{749C7CD1-A9AA-49E3-6734-AD9546F2DF5B}"/>
+              </a:ext>
+            </a:extLst>
+          </p:cNvPr>
+          <p:cNvSpPr>
+            <a:spLocks noGrp="1"/>
+          </p:cNvSpPr>
+          <p:nvPr>
+            <p:ph sz="half" idx="15"/>
+          </p:nvPr>
+        </p:nvSpPr>
+        <p:spPr>
+          <a:xfrm>
+            <a:off x="914399" y="2303463"/>
+            <a:ext cx="7379209" cy="4143375"/>
+          </a:xfrm>
+        </p:spPr>
+        <p:txBody>
+          <a:bodyPr rtlCol="0">
+            <a:normAutofit lnSpcReduction="10000"/>
+          </a:bodyPr>
+          <a:lstStyle>
+            <a:defPPr>
+              <a:defRPr lang="de-DE"/>
+            </a:defPPr>
+          </a:lstStyle>
+          <a:p>
+            <a:pPr marL="0" indent="0" rtl="0">
+              <a:buNone/>
+            </a:pPr>
+            <a:r>
+              <a:rPr lang="de-DE" dirty="0"/>
+              <a:t>Entfernungen und Größendimensionen im Weltall schwer zu begreifen bzw. unmöglich echt zu erleben</a:t>
+            </a:r>
+          </a:p>
+          <a:p>
+            <a:pPr marL="0" indent="0" rtl="0">
+              <a:buNone/>
+            </a:pPr>
+            <a:r>
+              <a:rPr lang="de-DE" dirty="0"/>
+              <a:t>Außerdem in 2D Illustrationen/Darstellungen inkorrekt</a:t>
+            </a:r>
+          </a:p>
+          <a:p>
+            <a:pPr marL="0" indent="0" rtl="0">
+              <a:buNone/>
+            </a:pPr>
+            <a:r>
+              <a:rPr lang="de-DE" dirty="0"/>
+              <a:t>Inhalt: </a:t>
+            </a:r>
+          </a:p>
+          <a:p>
+            <a:pPr marL="285750" indent="-285750">
+              <a:buFont typeface="Arial" panose="020B0604020202020204" pitchFamily="34" charset="0"/>
+              <a:buChar char="•"/>
+            </a:pPr>
+            <a:r>
+              <a:rPr lang="de-DE" dirty="0"/>
+              <a:t>Realistischer Modus und Explorationsmodus </a:t>
+            </a:r>
+          </a:p>
+          <a:p>
+            <a:pPr marL="285750" indent="-285750">
+              <a:buFont typeface="Arial" panose="020B0604020202020204" pitchFamily="34" charset="0"/>
+              <a:buChar char="•"/>
+            </a:pPr>
+            <a:r>
+              <a:rPr lang="de-DE" dirty="0"/>
+              <a:t>User kann sich innerhalb Simulation frei bewegen und so die Planeten von unterschiedlichen Seiten und Perspektiven sehen</a:t>
+            </a:r>
+          </a:p>
+          <a:p>
+            <a:pPr marL="285750" indent="-285750">
+              <a:buFont typeface="Arial" panose="020B0604020202020204" pitchFamily="34" charset="0"/>
+              <a:buChar char="•"/>
+            </a:pPr>
+            <a:r>
+              <a:rPr lang="de-DE" dirty="0"/>
+              <a:t>Detailansicht von Planeten mit schriftlichen Infos und Kugel, die von User gedreht und vergrößert/verkleinert werden kann</a:t>
+            </a:r>
+          </a:p>
+          <a:p>
+            <a:pPr marL="285750" indent="-285750">
+              <a:buFont typeface="Arial" panose="020B0604020202020204" pitchFamily="34" charset="0"/>
+              <a:buChar char="•"/>
+            </a:pPr>
+            <a:r>
+              <a:rPr lang="de-DE" dirty="0"/>
+              <a:t>Vergleich von zwei Planeten </a:t>
+            </a:r>
+          </a:p>
+          <a:p>
+            <a:pPr marL="285750" indent="-285750">
+              <a:buFont typeface="Arial" panose="020B0604020202020204" pitchFamily="34" charset="0"/>
+              <a:buChar char="•"/>
+            </a:pPr>
+            <a:r>
+              <a:rPr lang="de-DE" dirty="0"/>
+              <a:t>Simulation eines Erdjahres, alle Planeten rotieren um die Sonne und User steuert die Simulation</a:t>
+            </a:r>
+          </a:p>
+        </p:txBody>
+      </p:sp>
+      <p:sp>
+        <p:nvSpPr>
+          <p:cNvPr id="4" name="Foliennummernplatzhalter 3">
+            <a:extLst>
+              <a:ext uri="{FF2B5EF4-FFF2-40B4-BE49-F238E27FC236}">
+                <a16:creationId xmlns:a16="http://schemas.microsoft.com/office/drawing/2014/main" id="{C82CE1B8-1C92-D6D2-444B-652DB90E86D1}"/>
+              </a:ext>
+            </a:extLst>
+          </p:cNvPr>
+          <p:cNvSpPr>
+            <a:spLocks noGrp="1"/>
+          </p:cNvSpPr>
+          <p:nvPr>
+            <p:ph type="sldNum" sz="quarter" idx="10"/>
+          </p:nvPr>
+        </p:nvSpPr>
+        <p:spPr>
+          <a:xfrm>
+            <a:off x="10358437" y="457199"/>
+            <a:ext cx="1067589" cy="471489"/>
+          </a:xfrm>
+        </p:spPr>
+        <p:txBody>
+          <a:bodyPr rtlCol="0"/>
+          <a:lstStyle>
+            <a:defPPr>
+              <a:defRPr lang="de-DE"/>
+            </a:defPPr>
+          </a:lstStyle>
+          <a:p>
+            <a:pPr rtl="0"/>
+            <a:fld id="{48F63A3B-78C7-47BE-AE5E-E10140E04643}" type="slidenum">
+              <a:rPr lang="de-DE" smtClean="0"/>
+              <a:pPr rtl="0"/>
+              <a:t>4</a:t>
+            </a:fld>
+            <a:endParaRPr lang="de-DE" dirty="0"/>
+          </a:p>
+        </p:txBody>
+      </p:sp>
+      <p:sp>
+        <p:nvSpPr>
+          <p:cNvPr id="5" name="Bildplatzhalter 4">
+            <a:extLst>
+              <a:ext uri="{FF2B5EF4-FFF2-40B4-BE49-F238E27FC236}">
+                <a16:creationId xmlns:a16="http://schemas.microsoft.com/office/drawing/2014/main" id="{453A9D93-D5BF-9098-E9EE-7B87805111A9}"/>
+              </a:ext>
+            </a:extLst>
+          </p:cNvPr>
+          <p:cNvSpPr>
+            <a:spLocks noGrp="1"/>
+          </p:cNvSpPr>
+          <p:nvPr>
+            <p:ph type="pic" sz="quarter" idx="14"/>
+          </p:nvPr>
+        </p:nvSpPr>
+        <p:spPr/>
+        <p:txBody>
+          <a:bodyPr/>
+          <a:lstStyle/>
+          <a:p>
+            <a:endParaRPr lang="de-AT"/>
+          </a:p>
+        </p:txBody>
+      </p:sp>
+      <p:sp>
+        <p:nvSpPr>
+          <p:cNvPr id="8" name="Smiley 7">
+            <a:extLst>
+              <a:ext uri="{FF2B5EF4-FFF2-40B4-BE49-F238E27FC236}">
+                <a16:creationId xmlns:a16="http://schemas.microsoft.com/office/drawing/2014/main" id="{1665C235-2F65-2AF4-F494-9C235AD797C1}"/>
+              </a:ext>
+            </a:extLst>
+          </p:cNvPr>
+          <p:cNvSpPr/>
+          <p:nvPr/>
+        </p:nvSpPr>
+        <p:spPr>
+          <a:xfrm>
+            <a:off x="8165592" y="4109974"/>
+            <a:ext cx="256032" cy="265176"/>
+          </a:xfrm>
+          <a:prstGeom prst="smileyFace">
+            <a:avLst/>
+          </a:prstGeom>
+        </p:spPr>
+        <p:style>
+          <a:lnRef idx="2">
+            <a:schemeClr val="accent4">
+              <a:shade val="15000"/>
+            </a:schemeClr>
+          </a:lnRef>
+          <a:fillRef idx="1">
+            <a:schemeClr val="accent4"/>
+          </a:fillRef>
+          <a:effectRef idx="0">
+            <a:schemeClr val="accent4"/>
+          </a:effectRef>
+          <a:fontRef idx="minor">
+            <a:schemeClr val="lt1"/>
+          </a:fontRef>
+        </p:style>
+        <p:txBody>
+          <a:bodyPr rtlCol="0" anchor="ctr"/>
+          <a:lstStyle/>
+          <a:p>
+            <a:pPr algn="ctr"/>
+            <a:endParaRPr lang="de-AT"/>
+          </a:p>
+        </p:txBody>
+      </p:sp>
+      <p:sp>
+        <p:nvSpPr>
+          <p:cNvPr id="9" name="Wolke 8">
+            <a:extLst>
+              <a:ext uri="{FF2B5EF4-FFF2-40B4-BE49-F238E27FC236}">
+                <a16:creationId xmlns:a16="http://schemas.microsoft.com/office/drawing/2014/main" id="{A2EE98D5-7E74-DE5D-DCC1-A4CB855108D8}"/>
+              </a:ext>
+            </a:extLst>
+          </p:cNvPr>
+          <p:cNvSpPr/>
+          <p:nvPr/>
+        </p:nvSpPr>
+        <p:spPr>
+          <a:xfrm>
+            <a:off x="5718048" y="3646520"/>
+            <a:ext cx="356616" cy="265176"/>
+          </a:xfrm>
+          <a:prstGeom prst="cloud">
+            <a:avLst/>
+          </a:prstGeom>
+        </p:spPr>
+        <p:style>
+          <a:lnRef idx="2">
+            <a:schemeClr val="accent3">
+              <a:shade val="15000"/>
+            </a:schemeClr>
+          </a:lnRef>
+          <a:fillRef idx="1">
+            <a:schemeClr val="accent3"/>
+          </a:fillRef>
+          <a:effectRef idx="0">
+            <a:schemeClr val="accent3"/>
+          </a:effectRef>
+          <a:fontRef idx="minor">
+            <a:schemeClr val="lt1"/>
+          </a:fontRef>
+        </p:style>
+        <p:txBody>
+          <a:bodyPr rtlCol="0" anchor="ctr"/>
+          <a:lstStyle/>
+          <a:p>
+            <a:pPr algn="ctr"/>
+            <a:endParaRPr lang="de-AT"/>
+          </a:p>
+        </p:txBody>
+      </p:sp>
+      <p:sp>
+        <p:nvSpPr>
+          <p:cNvPr id="11" name="Verbotsymbol 10">
+            <a:extLst>
+              <a:ext uri="{FF2B5EF4-FFF2-40B4-BE49-F238E27FC236}">
+                <a16:creationId xmlns:a16="http://schemas.microsoft.com/office/drawing/2014/main" id="{3D815AFE-AD62-9332-FA7B-BD8F68CE3112}"/>
+              </a:ext>
+            </a:extLst>
+          </p:cNvPr>
+          <p:cNvSpPr/>
+          <p:nvPr/>
+        </p:nvSpPr>
+        <p:spPr>
+          <a:xfrm>
+            <a:off x="7031736" y="749145"/>
+            <a:ext cx="256032" cy="278191"/>
+          </a:xfrm>
+          <a:prstGeom prst="noSmoking">
+            <a:avLst/>
+          </a:prstGeom>
+        </p:spPr>
+        <p:style>
+          <a:lnRef idx="2">
+            <a:schemeClr val="accent1">
+              <a:shade val="15000"/>
+            </a:schemeClr>
+          </a:lnRef>
+          <a:fillRef idx="1">
+            <a:schemeClr val="accent1"/>
+          </a:fillRef>
+          <a:effectRef idx="0">
+            <a:schemeClr val="accent1"/>
+          </a:effectRef>
+          <a:fontRef idx="minor">
+            <a:schemeClr val="lt1"/>
+          </a:fontRef>
+        </p:style>
+        <p:txBody>
+          <a:bodyPr rtlCol="0" anchor="ctr"/>
+          <a:lstStyle/>
+          <a:p>
+            <a:pPr algn="ctr"/>
+            <a:endParaRPr lang="de-AT">
+              <a:solidFill>
+                <a:schemeClr val="tx1"/>
+              </a:solidFill>
+            </a:endParaRPr>
+          </a:p>
+        </p:txBody>
+      </p:sp>
+      <p:sp>
+        <p:nvSpPr>
+          <p:cNvPr id="15" name="Smiley 14">
+            <a:extLst>
+              <a:ext uri="{FF2B5EF4-FFF2-40B4-BE49-F238E27FC236}">
+                <a16:creationId xmlns:a16="http://schemas.microsoft.com/office/drawing/2014/main" id="{D6C856DD-BF64-A3D9-ECFC-0DB6F67E28D4}"/>
+              </a:ext>
+            </a:extLst>
+          </p:cNvPr>
+          <p:cNvSpPr/>
+          <p:nvPr/>
+        </p:nvSpPr>
+        <p:spPr>
+          <a:xfrm>
+            <a:off x="4302251" y="5249926"/>
+            <a:ext cx="256032" cy="265176"/>
+          </a:xfrm>
+          <a:prstGeom prst="smileyFace">
+            <a:avLst/>
+          </a:prstGeom>
+        </p:spPr>
+        <p:style>
+          <a:lnRef idx="2">
+            <a:schemeClr val="accent4">
+              <a:shade val="15000"/>
+            </a:schemeClr>
+          </a:lnRef>
+          <a:fillRef idx="1">
+            <a:schemeClr val="accent4"/>
+          </a:fillRef>
+          <a:effectRef idx="0">
+            <a:schemeClr val="accent4"/>
+          </a:effectRef>
+          <a:fontRef idx="minor">
+            <a:schemeClr val="lt1"/>
+          </a:fontRef>
+        </p:style>
+        <p:txBody>
+          <a:bodyPr rtlCol="0" anchor="ctr"/>
+          <a:lstStyle/>
+          <a:p>
+            <a:pPr algn="ctr"/>
+            <a:endParaRPr lang="de-AT"/>
+          </a:p>
+        </p:txBody>
+      </p:sp>
+      <p:sp>
+        <p:nvSpPr>
+          <p:cNvPr id="17" name="Wolke 16">
+            <a:extLst>
+              <a:ext uri="{FF2B5EF4-FFF2-40B4-BE49-F238E27FC236}">
+                <a16:creationId xmlns:a16="http://schemas.microsoft.com/office/drawing/2014/main" id="{9F117139-CF3A-7467-5D1A-4B01B623E2D0}"/>
+              </a:ext>
+            </a:extLst>
+          </p:cNvPr>
+          <p:cNvSpPr/>
+          <p:nvPr/>
+        </p:nvSpPr>
+        <p:spPr>
+          <a:xfrm>
+            <a:off x="8124444" y="4773549"/>
+            <a:ext cx="356616" cy="265176"/>
+          </a:xfrm>
+          <a:prstGeom prst="cloud">
+            <a:avLst/>
+          </a:prstGeom>
+        </p:spPr>
+        <p:style>
+          <a:lnRef idx="2">
+            <a:schemeClr val="accent3">
+              <a:shade val="15000"/>
+            </a:schemeClr>
+          </a:lnRef>
+          <a:fillRef idx="1">
+            <a:schemeClr val="accent3"/>
+          </a:fillRef>
+          <a:effectRef idx="0">
+            <a:schemeClr val="accent3"/>
+          </a:effectRef>
+          <a:fontRef idx="minor">
+            <a:schemeClr val="lt1"/>
+          </a:fontRef>
+        </p:style>
+        <p:txBody>
+          <a:bodyPr rtlCol="0" anchor="ctr"/>
+          <a:lstStyle/>
+          <a:p>
+            <a:pPr algn="ctr"/>
+            <a:endParaRPr lang="de-AT"/>
+          </a:p>
+        </p:txBody>
+      </p:sp>
+      <p:sp>
+        <p:nvSpPr>
+          <p:cNvPr id="21" name="Wolke 20">
+            <a:extLst>
+              <a:ext uri="{FF2B5EF4-FFF2-40B4-BE49-F238E27FC236}">
+                <a16:creationId xmlns:a16="http://schemas.microsoft.com/office/drawing/2014/main" id="{573691A7-A680-D80E-55B5-01F373C900A3}"/>
+              </a:ext>
+            </a:extLst>
+          </p:cNvPr>
+          <p:cNvSpPr/>
+          <p:nvPr/>
+        </p:nvSpPr>
+        <p:spPr>
+          <a:xfrm>
+            <a:off x="8065008" y="5856412"/>
+            <a:ext cx="356616" cy="265176"/>
+          </a:xfrm>
+          <a:prstGeom prst="cloud">
+            <a:avLst/>
+          </a:prstGeom>
+        </p:spPr>
+        <p:style>
+          <a:lnRef idx="2">
+            <a:schemeClr val="accent3">
+              <a:shade val="15000"/>
+            </a:schemeClr>
+          </a:lnRef>
+          <a:fillRef idx="1">
+            <a:schemeClr val="accent3"/>
+          </a:fillRef>
+          <a:effectRef idx="0">
+            <a:schemeClr val="accent3"/>
+          </a:effectRef>
+          <a:fontRef idx="minor">
+            <a:schemeClr val="lt1"/>
+          </a:fontRef>
+        </p:style>
+        <p:txBody>
+          <a:bodyPr rtlCol="0" anchor="ctr"/>
+          <a:lstStyle/>
+          <a:p>
+            <a:pPr algn="ctr"/>
+            <a:endParaRPr lang="de-AT"/>
+          </a:p>
+        </p:txBody>
+      </p:sp>
+      <p:sp>
+        <p:nvSpPr>
+          <p:cNvPr id="23" name="Wolke 22">
+            <a:extLst>
+              <a:ext uri="{FF2B5EF4-FFF2-40B4-BE49-F238E27FC236}">
+                <a16:creationId xmlns:a16="http://schemas.microsoft.com/office/drawing/2014/main" id="{F449F3A7-AAC3-A014-DD44-1592945E1B33}"/>
+              </a:ext>
+            </a:extLst>
+          </p:cNvPr>
+          <p:cNvSpPr/>
+          <p:nvPr/>
+        </p:nvSpPr>
+        <p:spPr>
+          <a:xfrm>
+            <a:off x="6981444" y="1141191"/>
+            <a:ext cx="356616" cy="265176"/>
+          </a:xfrm>
+          <a:prstGeom prst="cloud">
+            <a:avLst/>
+          </a:prstGeom>
+        </p:spPr>
+        <p:style>
+          <a:lnRef idx="2">
+            <a:schemeClr val="accent3">
+              <a:shade val="15000"/>
+            </a:schemeClr>
+          </a:lnRef>
+          <a:fillRef idx="1">
+            <a:schemeClr val="accent3"/>
+          </a:fillRef>
+          <a:effectRef idx="0">
+            <a:schemeClr val="accent3"/>
+          </a:effectRef>
+          <a:fontRef idx="minor">
+            <a:schemeClr val="lt1"/>
+          </a:fontRef>
+        </p:style>
+        <p:txBody>
+          <a:bodyPr rtlCol="0" anchor="ctr"/>
+          <a:lstStyle/>
+          <a:p>
+            <a:pPr algn="ctr"/>
+            <a:endParaRPr lang="de-AT"/>
+          </a:p>
+        </p:txBody>
+      </p:sp>
+      <p:sp>
+        <p:nvSpPr>
+          <p:cNvPr id="25" name="Smiley 24">
+            <a:extLst>
+              <a:ext uri="{FF2B5EF4-FFF2-40B4-BE49-F238E27FC236}">
+                <a16:creationId xmlns:a16="http://schemas.microsoft.com/office/drawing/2014/main" id="{84E1CB21-0A48-30F7-75B8-FED76EF98A52}"/>
+              </a:ext>
+            </a:extLst>
+          </p:cNvPr>
+          <p:cNvSpPr/>
+          <p:nvPr/>
+        </p:nvSpPr>
+        <p:spPr>
+          <a:xfrm>
+            <a:off x="7045452" y="1611790"/>
+            <a:ext cx="256032" cy="265176"/>
+          </a:xfrm>
+          <a:prstGeom prst="smileyFace">
+            <a:avLst/>
+          </a:prstGeom>
+        </p:spPr>
+        <p:style>
+          <a:lnRef idx="2">
+            <a:schemeClr val="accent4">
+              <a:shade val="15000"/>
+            </a:schemeClr>
+          </a:lnRef>
+          <a:fillRef idx="1">
+            <a:schemeClr val="accent4"/>
+          </a:fillRef>
+          <a:effectRef idx="0">
+            <a:schemeClr val="accent4"/>
+          </a:effectRef>
+          <a:fontRef idx="minor">
+            <a:schemeClr val="lt1"/>
+          </a:fontRef>
+        </p:style>
+        <p:txBody>
+          <a:bodyPr rtlCol="0" anchor="ctr"/>
+          <a:lstStyle/>
+          <a:p>
+            <a:pPr algn="ctr"/>
+            <a:endParaRPr lang="de-AT"/>
+          </a:p>
+        </p:txBody>
+      </p:sp>
+      <p:sp>
+        <p:nvSpPr>
+          <p:cNvPr id="26" name="Inhaltsplatzhalter 3">
+            <a:extLst>
+              <a:ext uri="{FF2B5EF4-FFF2-40B4-BE49-F238E27FC236}">
+                <a16:creationId xmlns:a16="http://schemas.microsoft.com/office/drawing/2014/main" id="{16C5C05A-5D71-DBB2-17AD-0B93BB568FC9}"/>
+              </a:ext>
+            </a:extLst>
+          </p:cNvPr>
+          <p:cNvSpPr txBox="1">
+            <a:spLocks/>
+          </p:cNvSpPr>
+          <p:nvPr/>
+        </p:nvSpPr>
+        <p:spPr>
+          <a:xfrm>
+            <a:off x="7336536" y="743903"/>
+            <a:ext cx="1560576" cy="285370"/>
+          </a:xfrm>
+          <a:prstGeom prst="rect">
+            <a:avLst/>
+          </a:prstGeom>
+        </p:spPr>
+        <p:txBody>
+          <a:bodyPr rtlCol="0"/>
+          <a:lstStyle>
+            <a:defPPr>
+              <a:defRPr lang="de-DE"/>
+            </a:defPPr>
+            <a:lvl1pPr marL="347472" indent="-347472" algn="l" defTabSz="914400" rtl="0" eaLnBrk="1" latinLnBrk="0" hangingPunct="1">
+              <a:lnSpc>
+                <a:spcPct val="100000"/>
+              </a:lnSpc>
+              <a:spcBef>
+                <a:spcPts val="360"/>
+              </a:spcBef>
+              <a:buFont typeface="Arial" panose="020B0604020202020204" pitchFamily="34" charset="0"/>
+              <a:buChar char="•"/>
+              <a:defRPr lang="de-DE" sz="2800" kern="1200">
+                <a:solidFill>
+                  <a:schemeClr val="accent6"/>
+                </a:solidFill>
+                <a:latin typeface="+mn-lt"/>
+                <a:ea typeface="+mn-ea"/>
+                <a:cs typeface="+mn-cs"/>
+              </a:defRPr>
+            </a:lvl1pPr>
+            <a:lvl2pPr marL="685800" indent="-347472" algn="l" defTabSz="914400" rtl="0" eaLnBrk="1" latinLnBrk="0" hangingPunct="1">
+              <a:lnSpc>
+                <a:spcPct val="100000"/>
+              </a:lnSpc>
+              <a:spcBef>
+                <a:spcPts val="360"/>
+              </a:spcBef>
+              <a:buFont typeface="Arial" panose="020B0604020202020204" pitchFamily="34" charset="0"/>
+              <a:buChar char="•"/>
+              <a:defRPr lang="de-DE" sz="2400" kern="1200">
+                <a:solidFill>
+                  <a:schemeClr val="accent6"/>
+                </a:solidFill>
+                <a:latin typeface="+mn-lt"/>
+                <a:ea typeface="+mn-ea"/>
+                <a:cs typeface="+mn-cs"/>
+              </a:defRPr>
+            </a:lvl2pPr>
+            <a:lvl3pPr marL="1143000" indent="-347472" algn="l" defTabSz="914400" rtl="0" eaLnBrk="1" latinLnBrk="0" hangingPunct="1">
+              <a:lnSpc>
+                <a:spcPct val="100000"/>
+              </a:lnSpc>
+              <a:spcBef>
+                <a:spcPts val="360"/>
+              </a:spcBef>
+              <a:buFont typeface="Arial" panose="020B0604020202020204" pitchFamily="34" charset="0"/>
+              <a:buChar char="•"/>
+              <a:defRPr lang="de-DE" sz="2000" kern="1200">
+                <a:solidFill>
+                  <a:schemeClr val="accent6"/>
+                </a:solidFill>
+                <a:latin typeface="+mn-lt"/>
+                <a:ea typeface="+mn-ea"/>
+                <a:cs typeface="+mn-cs"/>
+              </a:defRPr>
+            </a:lvl3pPr>
+            <a:lvl4pPr marL="1600200" indent="-347472" algn="l" defTabSz="914400" rtl="0" eaLnBrk="1" latinLnBrk="0" hangingPunct="1">
+              <a:lnSpc>
+                <a:spcPct val="100000"/>
+              </a:lnSpc>
+              <a:spcBef>
+                <a:spcPts val="360"/>
+              </a:spcBef>
+              <a:buFont typeface="Arial" panose="020B0604020202020204" pitchFamily="34" charset="0"/>
+              <a:buChar char="•"/>
+              <a:defRPr lang="de-DE" sz="1800" kern="1200">
+                <a:solidFill>
+                  <a:schemeClr val="accent6"/>
+                </a:solidFill>
+                <a:latin typeface="+mn-lt"/>
+                <a:ea typeface="+mn-ea"/>
+                <a:cs typeface="+mn-cs"/>
+              </a:defRPr>
+            </a:lvl4pPr>
+            <a:lvl5pPr marL="2057400" indent="-347472" algn="l" defTabSz="914400" rtl="0" eaLnBrk="1" latinLnBrk="0" hangingPunct="1">
+              <a:lnSpc>
+                <a:spcPct val="100000"/>
+              </a:lnSpc>
+              <a:spcBef>
+                <a:spcPts val="360"/>
+              </a:spcBef>
+              <a:buFont typeface="Arial" panose="020B0604020202020204" pitchFamily="34" charset="0"/>
+              <a:buChar char="•"/>
+              <a:defRPr lang="de-DE" sz="1800" kern="1200">
+                <a:solidFill>
+                  <a:schemeClr val="accent6"/>
+                </a:solidFill>
+                <a:latin typeface="+mn-lt"/>
+                <a:ea typeface="+mn-ea"/>
+                <a:cs typeface="+mn-cs"/>
+              </a:defRPr>
+            </a:lvl5pPr>
+            <a:lvl6pPr marL="2514600" indent="-228600" algn="l" defTabSz="914400" rtl="0" eaLnBrk="1" latinLnBrk="0" hangingPunct="1">
+              <a:lnSpc>
+                <a:spcPct val="90000"/>
+              </a:lnSpc>
+              <a:spcBef>
+                <a:spcPts val="500"/>
+              </a:spcBef>
+              <a:buFont typeface="Arial" panose="020B0604020202020204" pitchFamily="34" charset="0"/>
+              <a:buChar char="•"/>
+              <a:defRPr lang="de-DE" sz="1800" kern="1200">
+                <a:solidFill>
+                  <a:schemeClr val="tx1"/>
+                </a:solidFill>
+                <a:latin typeface="+mn-lt"/>
+                <a:ea typeface="+mn-ea"/>
+                <a:cs typeface="+mn-cs"/>
+              </a:defRPr>
+            </a:lvl6pPr>
+            <a:lvl7pPr marL="2971800" indent="-228600" algn="l" defTabSz="914400" rtl="0" eaLnBrk="1" latinLnBrk="0" hangingPunct="1">
+              <a:lnSpc>
+                <a:spcPct val="90000"/>
+              </a:lnSpc>
+              <a:spcBef>
+                <a:spcPts val="500"/>
+              </a:spcBef>
+              <a:buFont typeface="Arial" panose="020B0604020202020204" pitchFamily="34" charset="0"/>
+              <a:buChar char="•"/>
+              <a:defRPr lang="de-DE" sz="1800" kern="1200">
+                <a:solidFill>
+                  <a:schemeClr val="tx1"/>
+                </a:solidFill>
+                <a:latin typeface="+mn-lt"/>
+                <a:ea typeface="+mn-ea"/>
+                <a:cs typeface="+mn-cs"/>
+              </a:defRPr>
+            </a:lvl7pPr>
+            <a:lvl8pPr marL="3429000" indent="-228600" algn="l" defTabSz="914400" rtl="0" eaLnBrk="1" latinLnBrk="0" hangingPunct="1">
+              <a:lnSpc>
+                <a:spcPct val="90000"/>
+              </a:lnSpc>
+              <a:spcBef>
+                <a:spcPts val="500"/>
+              </a:spcBef>
+              <a:buFont typeface="Arial" panose="020B0604020202020204" pitchFamily="34" charset="0"/>
+              <a:buChar char="•"/>
+              <a:defRPr lang="de-DE" sz="1800" kern="1200">
+                <a:solidFill>
+                  <a:schemeClr val="tx1"/>
+                </a:solidFill>
+                <a:latin typeface="+mn-lt"/>
+                <a:ea typeface="+mn-ea"/>
+                <a:cs typeface="+mn-cs"/>
+              </a:defRPr>
+            </a:lvl8pPr>
+            <a:lvl9pPr marL="3886200" indent="-228600" algn="l" defTabSz="914400" rtl="0" eaLnBrk="1" latinLnBrk="0" hangingPunct="1">
+              <a:lnSpc>
+                <a:spcPct val="90000"/>
+              </a:lnSpc>
+              <a:spcBef>
+                <a:spcPts val="500"/>
+              </a:spcBef>
+              <a:buFont typeface="Arial" panose="020B0604020202020204" pitchFamily="34" charset="0"/>
+              <a:buChar char="•"/>
+              <a:defRPr lang="de-DE" sz="1800" kern="1200">
+                <a:solidFill>
+                  <a:schemeClr val="tx1"/>
+                </a:solidFill>
+                <a:latin typeface="+mn-lt"/>
+                <a:ea typeface="+mn-ea"/>
+                <a:cs typeface="+mn-cs"/>
+              </a:defRPr>
+            </a:lvl9pPr>
+          </a:lstStyle>
+          <a:p>
+            <a:pPr marL="0" indent="0">
+              <a:buNone/>
+            </a:pPr>
+            <a:r>
+              <a:rPr lang="de-AT" sz="1500" dirty="0"/>
+              <a:t>nicht umgesetzt</a:t>
+            </a:r>
+          </a:p>
+        </p:txBody>
+      </p:sp>
+      <p:sp>
+        <p:nvSpPr>
+          <p:cNvPr id="28" name="Inhaltsplatzhalter 3">
+            <a:extLst>
+              <a:ext uri="{FF2B5EF4-FFF2-40B4-BE49-F238E27FC236}">
+                <a16:creationId xmlns:a16="http://schemas.microsoft.com/office/drawing/2014/main" id="{34B11FCE-48E3-5938-1A4A-662F48F63664}"/>
+              </a:ext>
+            </a:extLst>
+          </p:cNvPr>
+          <p:cNvSpPr txBox="1">
+            <a:spLocks/>
+          </p:cNvSpPr>
+          <p:nvPr/>
+        </p:nvSpPr>
+        <p:spPr>
+          <a:xfrm>
+            <a:off x="7357250" y="1099503"/>
+            <a:ext cx="1560576" cy="285370"/>
+          </a:xfrm>
+          <a:prstGeom prst="rect">
+            <a:avLst/>
+          </a:prstGeom>
+        </p:spPr>
+        <p:txBody>
+          <a:bodyPr rtlCol="0"/>
+          <a:lstStyle>
+            <a:defPPr>
+              <a:defRPr lang="de-DE"/>
+            </a:defPPr>
+            <a:lvl1pPr marL="347472" indent="-347472" algn="l" defTabSz="914400" rtl="0" eaLnBrk="1" latinLnBrk="0" hangingPunct="1">
+              <a:lnSpc>
+                <a:spcPct val="100000"/>
+              </a:lnSpc>
+              <a:spcBef>
+                <a:spcPts val="360"/>
+              </a:spcBef>
+              <a:buFont typeface="Arial" panose="020B0604020202020204" pitchFamily="34" charset="0"/>
+              <a:buChar char="•"/>
+              <a:defRPr lang="de-DE" sz="2800" kern="1200">
+                <a:solidFill>
+                  <a:schemeClr val="accent6"/>
+                </a:solidFill>
+                <a:latin typeface="+mn-lt"/>
+                <a:ea typeface="+mn-ea"/>
+                <a:cs typeface="+mn-cs"/>
+              </a:defRPr>
+            </a:lvl1pPr>
+            <a:lvl2pPr marL="685800" indent="-347472" algn="l" defTabSz="914400" rtl="0" eaLnBrk="1" latinLnBrk="0" hangingPunct="1">
+              <a:lnSpc>
+                <a:spcPct val="100000"/>
+              </a:lnSpc>
+              <a:spcBef>
+                <a:spcPts val="360"/>
+              </a:spcBef>
+              <a:buFont typeface="Arial" panose="020B0604020202020204" pitchFamily="34" charset="0"/>
+              <a:buChar char="•"/>
+              <a:defRPr lang="de-DE" sz="2400" kern="1200">
+                <a:solidFill>
+                  <a:schemeClr val="accent6"/>
+                </a:solidFill>
+                <a:latin typeface="+mn-lt"/>
+                <a:ea typeface="+mn-ea"/>
+                <a:cs typeface="+mn-cs"/>
+              </a:defRPr>
+            </a:lvl2pPr>
+            <a:lvl3pPr marL="1143000" indent="-347472" algn="l" defTabSz="914400" rtl="0" eaLnBrk="1" latinLnBrk="0" hangingPunct="1">
+              <a:lnSpc>
+                <a:spcPct val="100000"/>
+              </a:lnSpc>
+              <a:spcBef>
+                <a:spcPts val="360"/>
+              </a:spcBef>
+              <a:buFont typeface="Arial" panose="020B0604020202020204" pitchFamily="34" charset="0"/>
+              <a:buChar char="•"/>
+              <a:defRPr lang="de-DE" sz="2000" kern="1200">
+                <a:solidFill>
+                  <a:schemeClr val="accent6"/>
+                </a:solidFill>
+                <a:latin typeface="+mn-lt"/>
+                <a:ea typeface="+mn-ea"/>
+                <a:cs typeface="+mn-cs"/>
+              </a:defRPr>
+            </a:lvl3pPr>
+            <a:lvl4pPr marL="1600200" indent="-347472" algn="l" defTabSz="914400" rtl="0" eaLnBrk="1" latinLnBrk="0" hangingPunct="1">
+              <a:lnSpc>
+                <a:spcPct val="100000"/>
+              </a:lnSpc>
+              <a:spcBef>
+                <a:spcPts val="360"/>
+              </a:spcBef>
+              <a:buFont typeface="Arial" panose="020B0604020202020204" pitchFamily="34" charset="0"/>
+              <a:buChar char="•"/>
+              <a:defRPr lang="de-DE" sz="1800" kern="1200">
+                <a:solidFill>
+                  <a:schemeClr val="accent6"/>
+                </a:solidFill>
+                <a:latin typeface="+mn-lt"/>
+                <a:ea typeface="+mn-ea"/>
+                <a:cs typeface="+mn-cs"/>
+              </a:defRPr>
+            </a:lvl4pPr>
+            <a:lvl5pPr marL="2057400" indent="-347472" algn="l" defTabSz="914400" rtl="0" eaLnBrk="1" latinLnBrk="0" hangingPunct="1">
+              <a:lnSpc>
+                <a:spcPct val="100000"/>
+              </a:lnSpc>
+              <a:spcBef>
+                <a:spcPts val="360"/>
+              </a:spcBef>
+              <a:buFont typeface="Arial" panose="020B0604020202020204" pitchFamily="34" charset="0"/>
+              <a:buChar char="•"/>
+              <a:defRPr lang="de-DE" sz="1800" kern="1200">
+                <a:solidFill>
+                  <a:schemeClr val="accent6"/>
+                </a:solidFill>
+                <a:latin typeface="+mn-lt"/>
+                <a:ea typeface="+mn-ea"/>
+                <a:cs typeface="+mn-cs"/>
+              </a:defRPr>
+            </a:lvl5pPr>
+            <a:lvl6pPr marL="2514600" indent="-228600" algn="l" defTabSz="914400" rtl="0" eaLnBrk="1" latinLnBrk="0" hangingPunct="1">
+              <a:lnSpc>
+                <a:spcPct val="90000"/>
+              </a:lnSpc>
+              <a:spcBef>
+                <a:spcPts val="500"/>
+              </a:spcBef>
+              <a:buFont typeface="Arial" panose="020B0604020202020204" pitchFamily="34" charset="0"/>
+              <a:buChar char="•"/>
+              <a:defRPr lang="de-DE" sz="1800" kern="1200">
+                <a:solidFill>
+                  <a:schemeClr val="tx1"/>
+                </a:solidFill>
+                <a:latin typeface="+mn-lt"/>
+                <a:ea typeface="+mn-ea"/>
+                <a:cs typeface="+mn-cs"/>
+              </a:defRPr>
+            </a:lvl6pPr>
+            <a:lvl7pPr marL="2971800" indent="-228600" algn="l" defTabSz="914400" rtl="0" eaLnBrk="1" latinLnBrk="0" hangingPunct="1">
+              <a:lnSpc>
+                <a:spcPct val="90000"/>
+              </a:lnSpc>
+              <a:spcBef>
+                <a:spcPts val="500"/>
+              </a:spcBef>
+              <a:buFont typeface="Arial" panose="020B0604020202020204" pitchFamily="34" charset="0"/>
+              <a:buChar char="•"/>
+              <a:defRPr lang="de-DE" sz="1800" kern="1200">
+                <a:solidFill>
+                  <a:schemeClr val="tx1"/>
+                </a:solidFill>
+                <a:latin typeface="+mn-lt"/>
+                <a:ea typeface="+mn-ea"/>
+                <a:cs typeface="+mn-cs"/>
+              </a:defRPr>
+            </a:lvl7pPr>
+            <a:lvl8pPr marL="3429000" indent="-228600" algn="l" defTabSz="914400" rtl="0" eaLnBrk="1" latinLnBrk="0" hangingPunct="1">
+              <a:lnSpc>
+                <a:spcPct val="90000"/>
+              </a:lnSpc>
+              <a:spcBef>
+                <a:spcPts val="500"/>
+              </a:spcBef>
+              <a:buFont typeface="Arial" panose="020B0604020202020204" pitchFamily="34" charset="0"/>
+              <a:buChar char="•"/>
+              <a:defRPr lang="de-DE" sz="1800" kern="1200">
+                <a:solidFill>
+                  <a:schemeClr val="tx1"/>
+                </a:solidFill>
+                <a:latin typeface="+mn-lt"/>
+                <a:ea typeface="+mn-ea"/>
+                <a:cs typeface="+mn-cs"/>
+              </a:defRPr>
+            </a:lvl8pPr>
+            <a:lvl9pPr marL="3886200" indent="-228600" algn="l" defTabSz="914400" rtl="0" eaLnBrk="1" latinLnBrk="0" hangingPunct="1">
+              <a:lnSpc>
+                <a:spcPct val="90000"/>
+              </a:lnSpc>
+              <a:spcBef>
+                <a:spcPts val="500"/>
+              </a:spcBef>
+              <a:buFont typeface="Arial" panose="020B0604020202020204" pitchFamily="34" charset="0"/>
+              <a:buChar char="•"/>
+              <a:defRPr lang="de-DE" sz="1800" kern="1200">
+                <a:solidFill>
+                  <a:schemeClr val="tx1"/>
+                </a:solidFill>
+                <a:latin typeface="+mn-lt"/>
+                <a:ea typeface="+mn-ea"/>
+                <a:cs typeface="+mn-cs"/>
+              </a:defRPr>
+            </a:lvl9pPr>
+          </a:lstStyle>
+          <a:p>
+            <a:pPr marL="0" indent="0">
+              <a:buNone/>
+            </a:pPr>
+            <a:r>
+              <a:rPr lang="de-AT" sz="1500" dirty="0"/>
+              <a:t>Teilweise/</a:t>
+            </a:r>
+            <a:r>
+              <a:rPr lang="de-AT" sz="1500" dirty="0" err="1"/>
+              <a:t>abge</a:t>
+            </a:r>
+            <a:r>
+              <a:rPr lang="de-AT" sz="1500" dirty="0"/>
+              <a:t>-ändert umgesetzt</a:t>
+            </a:r>
+          </a:p>
+        </p:txBody>
+      </p:sp>
+      <p:sp>
+        <p:nvSpPr>
+          <p:cNvPr id="30" name="Inhaltsplatzhalter 3">
+            <a:extLst>
+              <a:ext uri="{FF2B5EF4-FFF2-40B4-BE49-F238E27FC236}">
+                <a16:creationId xmlns:a16="http://schemas.microsoft.com/office/drawing/2014/main" id="{3EC5B5A5-EA38-24A3-E10D-3E2A7E9B9DF7}"/>
+              </a:ext>
+            </a:extLst>
+          </p:cNvPr>
+          <p:cNvSpPr txBox="1">
+            <a:spLocks/>
+          </p:cNvSpPr>
+          <p:nvPr/>
+        </p:nvSpPr>
+        <p:spPr>
+          <a:xfrm>
+            <a:off x="7345680" y="1601693"/>
+            <a:ext cx="1560576" cy="285370"/>
+          </a:xfrm>
+          <a:prstGeom prst="rect">
+            <a:avLst/>
+          </a:prstGeom>
+        </p:spPr>
+        <p:txBody>
+          <a:bodyPr rtlCol="0"/>
+          <a:lstStyle>
+            <a:defPPr>
+              <a:defRPr lang="de-DE"/>
+            </a:defPPr>
+            <a:lvl1pPr marL="347472" indent="-347472" algn="l" defTabSz="914400" rtl="0" eaLnBrk="1" latinLnBrk="0" hangingPunct="1">
+              <a:lnSpc>
+                <a:spcPct val="100000"/>
+              </a:lnSpc>
+              <a:spcBef>
+                <a:spcPts val="360"/>
+              </a:spcBef>
+              <a:buFont typeface="Arial" panose="020B0604020202020204" pitchFamily="34" charset="0"/>
+              <a:buChar char="•"/>
+              <a:defRPr lang="de-DE" sz="2800" kern="1200">
+                <a:solidFill>
+                  <a:schemeClr val="accent6"/>
+                </a:solidFill>
+                <a:latin typeface="+mn-lt"/>
+                <a:ea typeface="+mn-ea"/>
+                <a:cs typeface="+mn-cs"/>
+              </a:defRPr>
+            </a:lvl1pPr>
+            <a:lvl2pPr marL="685800" indent="-347472" algn="l" defTabSz="914400" rtl="0" eaLnBrk="1" latinLnBrk="0" hangingPunct="1">
+              <a:lnSpc>
+                <a:spcPct val="100000"/>
+              </a:lnSpc>
+              <a:spcBef>
+                <a:spcPts val="360"/>
+              </a:spcBef>
+              <a:buFont typeface="Arial" panose="020B0604020202020204" pitchFamily="34" charset="0"/>
+              <a:buChar char="•"/>
+              <a:defRPr lang="de-DE" sz="2400" kern="1200">
+                <a:solidFill>
+                  <a:schemeClr val="accent6"/>
+                </a:solidFill>
+                <a:latin typeface="+mn-lt"/>
+                <a:ea typeface="+mn-ea"/>
+                <a:cs typeface="+mn-cs"/>
+              </a:defRPr>
+            </a:lvl2pPr>
+            <a:lvl3pPr marL="1143000" indent="-347472" algn="l" defTabSz="914400" rtl="0" eaLnBrk="1" latinLnBrk="0" hangingPunct="1">
+              <a:lnSpc>
+                <a:spcPct val="100000"/>
+              </a:lnSpc>
+              <a:spcBef>
+                <a:spcPts val="360"/>
+              </a:spcBef>
+              <a:buFont typeface="Arial" panose="020B0604020202020204" pitchFamily="34" charset="0"/>
+              <a:buChar char="•"/>
+              <a:defRPr lang="de-DE" sz="2000" kern="1200">
+                <a:solidFill>
+                  <a:schemeClr val="accent6"/>
+                </a:solidFill>
+                <a:latin typeface="+mn-lt"/>
+                <a:ea typeface="+mn-ea"/>
+                <a:cs typeface="+mn-cs"/>
+              </a:defRPr>
+            </a:lvl3pPr>
+            <a:lvl4pPr marL="1600200" indent="-347472" algn="l" defTabSz="914400" rtl="0" eaLnBrk="1" latinLnBrk="0" hangingPunct="1">
+              <a:lnSpc>
+                <a:spcPct val="100000"/>
+              </a:lnSpc>
+              <a:spcBef>
+                <a:spcPts val="360"/>
+              </a:spcBef>
+              <a:buFont typeface="Arial" panose="020B0604020202020204" pitchFamily="34" charset="0"/>
+              <a:buChar char="•"/>
+              <a:defRPr lang="de-DE" sz="1800" kern="1200">
+                <a:solidFill>
+                  <a:schemeClr val="accent6"/>
+                </a:solidFill>
+                <a:latin typeface="+mn-lt"/>
+                <a:ea typeface="+mn-ea"/>
+                <a:cs typeface="+mn-cs"/>
+              </a:defRPr>
+            </a:lvl4pPr>
+            <a:lvl5pPr marL="2057400" indent="-347472" algn="l" defTabSz="914400" rtl="0" eaLnBrk="1" latinLnBrk="0" hangingPunct="1">
+              <a:lnSpc>
+                <a:spcPct val="100000"/>
+              </a:lnSpc>
+              <a:spcBef>
+                <a:spcPts val="360"/>
+              </a:spcBef>
+              <a:buFont typeface="Arial" panose="020B0604020202020204" pitchFamily="34" charset="0"/>
+              <a:buChar char="•"/>
+              <a:defRPr lang="de-DE" sz="1800" kern="1200">
+                <a:solidFill>
+                  <a:schemeClr val="accent6"/>
+                </a:solidFill>
+                <a:latin typeface="+mn-lt"/>
+                <a:ea typeface="+mn-ea"/>
+                <a:cs typeface="+mn-cs"/>
+              </a:defRPr>
+            </a:lvl5pPr>
+            <a:lvl6pPr marL="2514600" indent="-228600" algn="l" defTabSz="914400" rtl="0" eaLnBrk="1" latinLnBrk="0" hangingPunct="1">
+              <a:lnSpc>
+                <a:spcPct val="90000"/>
+              </a:lnSpc>
+              <a:spcBef>
+                <a:spcPts val="500"/>
+              </a:spcBef>
+              <a:buFont typeface="Arial" panose="020B0604020202020204" pitchFamily="34" charset="0"/>
+              <a:buChar char="•"/>
+              <a:defRPr lang="de-DE" sz="1800" kern="1200">
+                <a:solidFill>
+                  <a:schemeClr val="tx1"/>
+                </a:solidFill>
+                <a:latin typeface="+mn-lt"/>
+                <a:ea typeface="+mn-ea"/>
+                <a:cs typeface="+mn-cs"/>
+              </a:defRPr>
+            </a:lvl6pPr>
+            <a:lvl7pPr marL="2971800" indent="-228600" algn="l" defTabSz="914400" rtl="0" eaLnBrk="1" latinLnBrk="0" hangingPunct="1">
+              <a:lnSpc>
+                <a:spcPct val="90000"/>
+              </a:lnSpc>
+              <a:spcBef>
+                <a:spcPts val="500"/>
+              </a:spcBef>
+              <a:buFont typeface="Arial" panose="020B0604020202020204" pitchFamily="34" charset="0"/>
+              <a:buChar char="•"/>
+              <a:defRPr lang="de-DE" sz="1800" kern="1200">
+                <a:solidFill>
+                  <a:schemeClr val="tx1"/>
+                </a:solidFill>
+                <a:latin typeface="+mn-lt"/>
+                <a:ea typeface="+mn-ea"/>
+                <a:cs typeface="+mn-cs"/>
+              </a:defRPr>
+            </a:lvl7pPr>
+            <a:lvl8pPr marL="3429000" indent="-228600" algn="l" defTabSz="914400" rtl="0" eaLnBrk="1" latinLnBrk="0" hangingPunct="1">
+              <a:lnSpc>
+                <a:spcPct val="90000"/>
+              </a:lnSpc>
+              <a:spcBef>
+                <a:spcPts val="500"/>
+              </a:spcBef>
+              <a:buFont typeface="Arial" panose="020B0604020202020204" pitchFamily="34" charset="0"/>
+              <a:buChar char="•"/>
+              <a:defRPr lang="de-DE" sz="1800" kern="1200">
+                <a:solidFill>
+                  <a:schemeClr val="tx1"/>
+                </a:solidFill>
+                <a:latin typeface="+mn-lt"/>
+                <a:ea typeface="+mn-ea"/>
+                <a:cs typeface="+mn-cs"/>
+              </a:defRPr>
+            </a:lvl8pPr>
+            <a:lvl9pPr marL="3886200" indent="-228600" algn="l" defTabSz="914400" rtl="0" eaLnBrk="1" latinLnBrk="0" hangingPunct="1">
+              <a:lnSpc>
+                <a:spcPct val="90000"/>
+              </a:lnSpc>
+              <a:spcBef>
+                <a:spcPts val="500"/>
+              </a:spcBef>
+              <a:buFont typeface="Arial" panose="020B0604020202020204" pitchFamily="34" charset="0"/>
+              <a:buChar char="•"/>
+              <a:defRPr lang="de-DE" sz="1800" kern="1200">
+                <a:solidFill>
+                  <a:schemeClr val="tx1"/>
+                </a:solidFill>
+                <a:latin typeface="+mn-lt"/>
+                <a:ea typeface="+mn-ea"/>
+                <a:cs typeface="+mn-cs"/>
+              </a:defRPr>
+            </a:lvl9pPr>
+          </a:lstStyle>
+          <a:p>
+            <a:pPr marL="0" indent="0">
+              <a:buNone/>
+            </a:pPr>
+            <a:r>
+              <a:rPr lang="de-AT" sz="1500" dirty="0"/>
+              <a:t>umgesetzt</a:t>
+            </a:r>
+          </a:p>
+        </p:txBody>
+      </p:sp>
+      <p:sp>
+        <p:nvSpPr>
+          <p:cNvPr id="32" name="Inhaltsplatzhalter 3">
+            <a:extLst>
+              <a:ext uri="{FF2B5EF4-FFF2-40B4-BE49-F238E27FC236}">
+                <a16:creationId xmlns:a16="http://schemas.microsoft.com/office/drawing/2014/main" id="{52B323D2-C34B-2A7C-6650-28F9D491FFFD}"/>
+              </a:ext>
+            </a:extLst>
+          </p:cNvPr>
+          <p:cNvSpPr txBox="1">
+            <a:spLocks/>
+          </p:cNvSpPr>
+          <p:nvPr/>
+        </p:nvSpPr>
+        <p:spPr>
+          <a:xfrm>
+            <a:off x="6981444" y="395795"/>
+            <a:ext cx="1560576" cy="285370"/>
+          </a:xfrm>
+          <a:prstGeom prst="rect">
+            <a:avLst/>
+          </a:prstGeom>
+        </p:spPr>
+        <p:txBody>
+          <a:bodyPr rtlCol="0"/>
+          <a:lstStyle>
+            <a:defPPr>
+              <a:defRPr lang="de-DE"/>
+            </a:defPPr>
+            <a:lvl1pPr marL="347472" indent="-347472" algn="l" defTabSz="914400" rtl="0" eaLnBrk="1" latinLnBrk="0" hangingPunct="1">
+              <a:lnSpc>
+                <a:spcPct val="100000"/>
+              </a:lnSpc>
+              <a:spcBef>
+                <a:spcPts val="360"/>
+              </a:spcBef>
+              <a:buFont typeface="Arial" panose="020B0604020202020204" pitchFamily="34" charset="0"/>
+              <a:buChar char="•"/>
+              <a:defRPr lang="de-DE" sz="2800" kern="1200">
+                <a:solidFill>
+                  <a:schemeClr val="accent6"/>
+                </a:solidFill>
+                <a:latin typeface="+mn-lt"/>
+                <a:ea typeface="+mn-ea"/>
+                <a:cs typeface="+mn-cs"/>
+              </a:defRPr>
+            </a:lvl1pPr>
+            <a:lvl2pPr marL="685800" indent="-347472" algn="l" defTabSz="914400" rtl="0" eaLnBrk="1" latinLnBrk="0" hangingPunct="1">
+              <a:lnSpc>
+                <a:spcPct val="100000"/>
+              </a:lnSpc>
+              <a:spcBef>
+                <a:spcPts val="360"/>
+              </a:spcBef>
+              <a:buFont typeface="Arial" panose="020B0604020202020204" pitchFamily="34" charset="0"/>
+              <a:buChar char="•"/>
+              <a:defRPr lang="de-DE" sz="2400" kern="1200">
+                <a:solidFill>
+                  <a:schemeClr val="accent6"/>
+                </a:solidFill>
+                <a:latin typeface="+mn-lt"/>
+                <a:ea typeface="+mn-ea"/>
+                <a:cs typeface="+mn-cs"/>
+              </a:defRPr>
+            </a:lvl2pPr>
+            <a:lvl3pPr marL="1143000" indent="-347472" algn="l" defTabSz="914400" rtl="0" eaLnBrk="1" latinLnBrk="0" hangingPunct="1">
+              <a:lnSpc>
+                <a:spcPct val="100000"/>
+              </a:lnSpc>
+              <a:spcBef>
+                <a:spcPts val="360"/>
+              </a:spcBef>
+              <a:buFont typeface="Arial" panose="020B0604020202020204" pitchFamily="34" charset="0"/>
+              <a:buChar char="•"/>
+              <a:defRPr lang="de-DE" sz="2000" kern="1200">
+                <a:solidFill>
+                  <a:schemeClr val="accent6"/>
+                </a:solidFill>
+                <a:latin typeface="+mn-lt"/>
+                <a:ea typeface="+mn-ea"/>
+                <a:cs typeface="+mn-cs"/>
+              </a:defRPr>
+            </a:lvl3pPr>
+            <a:lvl4pPr marL="1600200" indent="-347472" algn="l" defTabSz="914400" rtl="0" eaLnBrk="1" latinLnBrk="0" hangingPunct="1">
+              <a:lnSpc>
+                <a:spcPct val="100000"/>
+              </a:lnSpc>
+              <a:spcBef>
+                <a:spcPts val="360"/>
+              </a:spcBef>
+              <a:buFont typeface="Arial" panose="020B0604020202020204" pitchFamily="34" charset="0"/>
+              <a:buChar char="•"/>
+              <a:defRPr lang="de-DE" sz="1800" kern="1200">
+                <a:solidFill>
+                  <a:schemeClr val="accent6"/>
+                </a:solidFill>
+                <a:latin typeface="+mn-lt"/>
+                <a:ea typeface="+mn-ea"/>
+                <a:cs typeface="+mn-cs"/>
+              </a:defRPr>
+            </a:lvl4pPr>
+            <a:lvl5pPr marL="2057400" indent="-347472" algn="l" defTabSz="914400" rtl="0" eaLnBrk="1" latinLnBrk="0" hangingPunct="1">
+              <a:lnSpc>
+                <a:spcPct val="100000"/>
+              </a:lnSpc>
+              <a:spcBef>
+                <a:spcPts val="360"/>
+              </a:spcBef>
+              <a:buFont typeface="Arial" panose="020B0604020202020204" pitchFamily="34" charset="0"/>
+              <a:buChar char="•"/>
+              <a:defRPr lang="de-DE" sz="1800" kern="1200">
+                <a:solidFill>
+                  <a:schemeClr val="accent6"/>
+                </a:solidFill>
+                <a:latin typeface="+mn-lt"/>
+                <a:ea typeface="+mn-ea"/>
+                <a:cs typeface="+mn-cs"/>
+              </a:defRPr>
+            </a:lvl5pPr>
+            <a:lvl6pPr marL="2514600" indent="-228600" algn="l" defTabSz="914400" rtl="0" eaLnBrk="1" latinLnBrk="0" hangingPunct="1">
+              <a:lnSpc>
+                <a:spcPct val="90000"/>
+              </a:lnSpc>
+              <a:spcBef>
+                <a:spcPts val="500"/>
+              </a:spcBef>
+              <a:buFont typeface="Arial" panose="020B0604020202020204" pitchFamily="34" charset="0"/>
+              <a:buChar char="•"/>
+              <a:defRPr lang="de-DE" sz="1800" kern="1200">
+                <a:solidFill>
+                  <a:schemeClr val="tx1"/>
+                </a:solidFill>
+                <a:latin typeface="+mn-lt"/>
+                <a:ea typeface="+mn-ea"/>
+                <a:cs typeface="+mn-cs"/>
+              </a:defRPr>
+            </a:lvl6pPr>
+            <a:lvl7pPr marL="2971800" indent="-228600" algn="l" defTabSz="914400" rtl="0" eaLnBrk="1" latinLnBrk="0" hangingPunct="1">
+              <a:lnSpc>
+                <a:spcPct val="90000"/>
+              </a:lnSpc>
+              <a:spcBef>
+                <a:spcPts val="500"/>
+              </a:spcBef>
+              <a:buFont typeface="Arial" panose="020B0604020202020204" pitchFamily="34" charset="0"/>
+              <a:buChar char="•"/>
+              <a:defRPr lang="de-DE" sz="1800" kern="1200">
+                <a:solidFill>
+                  <a:schemeClr val="tx1"/>
+                </a:solidFill>
+                <a:latin typeface="+mn-lt"/>
+                <a:ea typeface="+mn-ea"/>
+                <a:cs typeface="+mn-cs"/>
+              </a:defRPr>
+            </a:lvl7pPr>
+            <a:lvl8pPr marL="3429000" indent="-228600" algn="l" defTabSz="914400" rtl="0" eaLnBrk="1" latinLnBrk="0" hangingPunct="1">
+              <a:lnSpc>
+                <a:spcPct val="90000"/>
+              </a:lnSpc>
+              <a:spcBef>
+                <a:spcPts val="500"/>
+              </a:spcBef>
+              <a:buFont typeface="Arial" panose="020B0604020202020204" pitchFamily="34" charset="0"/>
+              <a:buChar char="•"/>
+              <a:defRPr lang="de-DE" sz="1800" kern="1200">
+                <a:solidFill>
+                  <a:schemeClr val="tx1"/>
+                </a:solidFill>
+                <a:latin typeface="+mn-lt"/>
+                <a:ea typeface="+mn-ea"/>
+                <a:cs typeface="+mn-cs"/>
+              </a:defRPr>
+            </a:lvl8pPr>
+            <a:lvl9pPr marL="3886200" indent="-228600" algn="l" defTabSz="914400" rtl="0" eaLnBrk="1" latinLnBrk="0" hangingPunct="1">
+              <a:lnSpc>
+                <a:spcPct val="90000"/>
+              </a:lnSpc>
+              <a:spcBef>
+                <a:spcPts val="500"/>
+              </a:spcBef>
+              <a:buFont typeface="Arial" panose="020B0604020202020204" pitchFamily="34" charset="0"/>
+              <a:buChar char="•"/>
+              <a:defRPr lang="de-DE" sz="1800" kern="1200">
+                <a:solidFill>
+                  <a:schemeClr val="tx1"/>
+                </a:solidFill>
+                <a:latin typeface="+mn-lt"/>
+                <a:ea typeface="+mn-ea"/>
+                <a:cs typeface="+mn-cs"/>
+              </a:defRPr>
+            </a:lvl9pPr>
+          </a:lstStyle>
+          <a:p>
+            <a:pPr marL="0" indent="0">
+              <a:buNone/>
+            </a:pPr>
+            <a:r>
+              <a:rPr lang="de-AT" sz="1500" dirty="0"/>
+              <a:t>LEGENDE</a:t>
+            </a:r>
+          </a:p>
+        </p:txBody>
+      </p:sp>
+    </p:spTree>
+    <p:extLst>
+      <p:ext uri="{BB962C8B-B14F-4D97-AF65-F5344CB8AC3E}">
+        <p14:creationId xmlns:p14="http://schemas.microsoft.com/office/powerpoint/2010/main" val="1941619646"/>
+      </p:ext>
+    </p:extLst>
+  </p:cSld>
+  <p:clrMapOvr>
+    <a:masterClrMapping/>
+  </p:clrMapOvr>
+</p:sld>
+</file>
+
+<file path=ppt/slides/slide5.xml><?xml version="1.0" encoding="utf-8"?>
+<p:sld xmlns:a="http://schemas.openxmlformats.org/drawingml/2006/main" xmlns:r="http://schemas.openxmlformats.org/officeDocument/2006/relationships" xmlns:p="http://schemas.openxmlformats.org/presentationml/2006/main">
+  <p:cSld>
+    <p:spTree>
+      <p:nvGrpSpPr>
         <p:cNvPr id="1" name="">
           <a:extLst>
             <a:ext uri="{FF2B5EF4-FFF2-40B4-BE49-F238E27FC236}">
@@ -19620,7 +21381,7 @@
             <a:fld id="{48F63A3B-78C7-47BE-AE5E-E10140E04643}" type="slidenum">
               <a:rPr lang="de-DE" smtClean="0"/>
               <a:pPr rtl="0"/>
-              <a:t>4</a:t>
+              <a:t>5</a:t>
             </a:fld>
             <a:endParaRPr lang="de-DE" dirty="0"/>
           </a:p>
@@ -19676,173 +21437,6 @@
     <p:extLst>
       <p:ext uri="{BB962C8B-B14F-4D97-AF65-F5344CB8AC3E}">
         <p14:creationId xmlns:p14="http://schemas.microsoft.com/office/powerpoint/2010/main" val="1429873837"/>
-      </p:ext>
-    </p:extLst>
-  </p:cSld>
-  <p:clrMapOvr>
-    <a:masterClrMapping/>
-  </p:clrMapOvr>
-</p:sld>
-</file>
-
-<file path=ppt/slides/slide5.xml><?xml version="1.0" encoding="utf-8"?>
-<p:sld xmlns:a="http://schemas.openxmlformats.org/drawingml/2006/main" xmlns:r="http://schemas.openxmlformats.org/officeDocument/2006/relationships" xmlns:p="http://schemas.openxmlformats.org/presentationml/2006/main">
-  <p:cSld>
-    <p:spTree>
-      <p:nvGrpSpPr>
-        <p:cNvPr id="1" name=""/>
-        <p:cNvGrpSpPr/>
-        <p:nvPr/>
-      </p:nvGrpSpPr>
-      <p:grpSpPr>
-        <a:xfrm>
-          <a:off x="0" y="0"/>
-          <a:ext cx="0" cy="0"/>
-          <a:chOff x="0" y="0"/>
-          <a:chExt cx="0" cy="0"/>
-        </a:xfrm>
-      </p:grpSpPr>
-      <p:sp>
-        <p:nvSpPr>
-          <p:cNvPr id="2" name="Titel 1">
-            <a:extLst>
-              <a:ext uri="{FF2B5EF4-FFF2-40B4-BE49-F238E27FC236}">
-                <a16:creationId xmlns:a16="http://schemas.microsoft.com/office/drawing/2014/main" id="{FD5E8954-9BCB-7FD9-A210-38DC54382D45}"/>
-              </a:ext>
-            </a:extLst>
-          </p:cNvPr>
-          <p:cNvSpPr>
-            <a:spLocks noGrp="1"/>
-          </p:cNvSpPr>
-          <p:nvPr>
-            <p:ph type="title"/>
-          </p:nvPr>
-        </p:nvSpPr>
-        <p:spPr>
-          <a:xfrm>
-            <a:off x="3460565" y="1057274"/>
-            <a:ext cx="7965461" cy="994164"/>
-          </a:xfrm>
-        </p:spPr>
-        <p:txBody>
-          <a:bodyPr rtlCol="0"/>
-          <a:lstStyle>
-            <a:defPPr>
-              <a:defRPr lang="de-DE"/>
-            </a:defPPr>
-          </a:lstStyle>
-          <a:p>
-            <a:pPr rtl="0"/>
-            <a:r>
-              <a:rPr lang="de-DE"/>
-              <a:t>Einbindung des Publikums</a:t>
-            </a:r>
-          </a:p>
-        </p:txBody>
-      </p:sp>
-      <p:sp>
-        <p:nvSpPr>
-          <p:cNvPr id="3" name="Inhaltsplatzhalter 2">
-            <a:extLst>
-              <a:ext uri="{FF2B5EF4-FFF2-40B4-BE49-F238E27FC236}">
-                <a16:creationId xmlns:a16="http://schemas.microsoft.com/office/drawing/2014/main" id="{75111C33-898C-4414-4665-5136EB6FC126}"/>
-              </a:ext>
-            </a:extLst>
-          </p:cNvPr>
-          <p:cNvSpPr>
-            <a:spLocks noGrp="1"/>
-          </p:cNvSpPr>
-          <p:nvPr>
-            <p:ph sz="half" idx="2"/>
-          </p:nvPr>
-        </p:nvSpPr>
-        <p:spPr>
-          <a:xfrm>
-            <a:off x="3460565" y="2303029"/>
-            <a:ext cx="7965460" cy="3497698"/>
-          </a:xfrm>
-        </p:spPr>
-        <p:txBody>
-          <a:bodyPr rtlCol="0"/>
-          <a:lstStyle>
-            <a:defPPr>
-              <a:defRPr lang="de-DE"/>
-            </a:defPPr>
-          </a:lstStyle>
-          <a:p>
-            <a:pPr rtl="0"/>
-            <a:r>
-              <a:rPr lang="de-DE"/>
-              <a:t>Stellen Sie Augenkontakt mit Ihrem Publikum her, um ein Gefühl von Vertrautheit und Beteiligung zu erzeugen.</a:t>
-            </a:r>
-          </a:p>
-          <a:p>
-            <a:pPr rtl="0"/>
-            <a:r>
-              <a:rPr lang="de-DE"/>
-              <a:t>Binden Sie glaubwürdige Geschichten in Ihre Präsentation ein und verwenden Sie Erzählungen, die Ihre Botschaft einprägsam und überzeugend machen.</a:t>
-            </a:r>
-          </a:p>
-          <a:p>
-            <a:pPr rtl="0"/>
-            <a:r>
-              <a:rPr lang="de-DE"/>
-              <a:t>Ermutigen Sie zu Fragen und geben Sie durchdachte Antworten, um die Beteiligung des Publikums zu fördern.</a:t>
-            </a:r>
-          </a:p>
-          <a:p>
-            <a:pPr rtl="0"/>
-            <a:r>
-              <a:rPr lang="de-DE"/>
-              <a:t>Verwenden Sie Live-Abstimmungen oder Umfragen, um die Meinung des Publikums einzuholen, das Engagement zu fördern und dafür zu sorgen, dass sich das Publikum einbezogen fühlt.</a:t>
-            </a:r>
-          </a:p>
-        </p:txBody>
-      </p:sp>
-      <p:sp>
-        <p:nvSpPr>
-          <p:cNvPr id="23" name="Foliennummernplatzhalter 22">
-            <a:extLst>
-              <a:ext uri="{FF2B5EF4-FFF2-40B4-BE49-F238E27FC236}">
-                <a16:creationId xmlns:a16="http://schemas.microsoft.com/office/drawing/2014/main" id="{94FF72B7-0438-3641-5939-75128934B0DF}"/>
-              </a:ext>
-            </a:extLst>
-          </p:cNvPr>
-          <p:cNvSpPr>
-            <a:spLocks noGrp="1"/>
-          </p:cNvSpPr>
-          <p:nvPr>
-            <p:ph type="sldNum" sz="quarter" idx="10"/>
-          </p:nvPr>
-        </p:nvSpPr>
-        <p:spPr>
-          <a:xfrm>
-            <a:off x="10358437" y="457199"/>
-            <a:ext cx="1067589" cy="471489"/>
-          </a:xfrm>
-        </p:spPr>
-        <p:txBody>
-          <a:bodyPr rtlCol="0"/>
-          <a:lstStyle>
-            <a:defPPr>
-              <a:defRPr lang="de-DE"/>
-            </a:defPPr>
-          </a:lstStyle>
-          <a:p>
-            <a:pPr rtl="0"/>
-            <a:fld id="{48F63A3B-78C7-47BE-AE5E-E10140E04643}" type="slidenum">
-              <a:rPr lang="de-DE" smtClean="0"/>
-              <a:pPr rtl="0"/>
-              <a:t>5</a:t>
-            </a:fld>
-            <a:endParaRPr lang="de-DE" dirty="0"/>
-          </a:p>
-        </p:txBody>
-      </p:sp>
-    </p:spTree>
-    <p:extLst>
-      <p:ext uri="{BB962C8B-B14F-4D97-AF65-F5344CB8AC3E}">
-        <p14:creationId xmlns:p14="http://schemas.microsoft.com/office/powerpoint/2010/main" val="685681062"/>
       </p:ext>
     </p:extLst>
   </p:cSld>
@@ -19965,8 +21559,8 @@
         </p:nvSpPr>
         <p:spPr>
           <a:xfrm>
-            <a:off x="914400" y="2303028"/>
-            <a:ext cx="3283119" cy="3720337"/>
+            <a:off x="914400" y="2303029"/>
+            <a:ext cx="3643384" cy="2223252"/>
           </a:xfrm>
         </p:spPr>
         <p:txBody>
@@ -19982,36 +21576,55 @@
             <a:pPr rtl="0"/>
             <a:r>
               <a:rPr lang="de-DE" dirty="0"/>
-              <a:t>Unity 6.6</a:t>
-            </a:r>
-          </a:p>
-          <a:p>
-            <a:pPr marL="285750" indent="-285750" rtl="0">
-              <a:buFont typeface="Arial" panose="020B0604020202020204" pitchFamily="34" charset="0"/>
-              <a:buChar char="•"/>
-            </a:pPr>
+              <a:t>Unity 6.6 auf </a:t>
+            </a:r>
+            <a:r>
+              <a:rPr lang="de-DE" dirty="0" err="1"/>
+              <a:t>Win</a:t>
+            </a:r>
+            <a:endParaRPr lang="de-DE" dirty="0"/>
+          </a:p>
+          <a:p>
+            <a:pPr rtl="0"/>
+            <a:endParaRPr lang="de-DE" dirty="0"/>
+          </a:p>
+          <a:p>
+            <a:r>
+              <a:rPr lang="de-DE" dirty="0" err="1"/>
+              <a:t>Meta</a:t>
+            </a:r>
             <a:r>
               <a:rPr lang="de-DE" dirty="0"/>
-              <a:t>Free Asset for </a:t>
+              <a:t> Quest 2 (</a:t>
             </a:r>
             <a:r>
               <a:rPr lang="de-DE" dirty="0" err="1"/>
-              <a:t>Planets</a:t>
+              <a:t>borrowed</a:t>
             </a:r>
             <a:r>
               <a:rPr lang="de-DE" dirty="0"/>
-              <a:t> of Solarsystem </a:t>
-            </a:r>
-          </a:p>
-          <a:p>
-            <a:pPr marL="285750" indent="-285750" rtl="0">
-              <a:buFont typeface="Arial" panose="020B0604020202020204" pitchFamily="34" charset="0"/>
-              <a:buChar char="•"/>
-            </a:pPr>
+              <a:t> </a:t>
+            </a:r>
             <a:r>
               <a:rPr lang="de-DE" dirty="0" err="1"/>
-              <a:t>OpenXR</a:t>
-            </a:r>
+              <a:t>from</a:t>
+            </a:r>
+            <a:r>
+              <a:rPr lang="de-DE" dirty="0"/>
+              <a:t> FH)</a:t>
+            </a:r>
+          </a:p>
+          <a:p>
+            <a:endParaRPr lang="de-DE" dirty="0"/>
+          </a:p>
+          <a:p>
+            <a:r>
+              <a:rPr lang="de-DE" dirty="0"/>
+              <a:t>ChatGPT</a:t>
+            </a:r>
+          </a:p>
+          <a:p>
+            <a:pPr rtl="0"/>
             <a:endParaRPr lang="de-DE" dirty="0"/>
           </a:p>
         </p:txBody>
@@ -20048,31 +21661,53 @@
             </a:defPPr>
           </a:lstStyle>
           <a:p>
+            <a:r>
+              <a:rPr lang="de-DE" dirty="0"/>
+              <a:t>Gratis Asset für Planeten und </a:t>
+            </a:r>
+            <a:r>
+              <a:rPr lang="de-DE" dirty="0" err="1"/>
+              <a:t>Skybox</a:t>
+            </a:r>
+            <a:endParaRPr lang="de-DE" dirty="0"/>
+          </a:p>
+          <a:p>
+            <a:r>
+              <a:rPr lang="de-DE" dirty="0"/>
+              <a:t>Gratis Assets für Audiodateien</a:t>
+            </a:r>
+          </a:p>
+          <a:p>
+            <a:endParaRPr lang="de-DE" dirty="0"/>
+          </a:p>
+          <a:p>
+            <a:r>
+              <a:rPr lang="de-DE" dirty="0" err="1"/>
+              <a:t>OpenXR</a:t>
+            </a:r>
+            <a:r>
+              <a:rPr lang="de-DE" dirty="0"/>
+              <a:t> mit </a:t>
+            </a:r>
+            <a:r>
+              <a:rPr lang="de-DE" dirty="0" err="1"/>
+              <a:t>MetaXR</a:t>
+            </a:r>
+            <a:r>
+              <a:rPr lang="de-DE" dirty="0"/>
+              <a:t> (All-in-</a:t>
+            </a:r>
+            <a:r>
+              <a:rPr lang="de-DE" dirty="0" err="1"/>
+              <a:t>one</a:t>
+            </a:r>
+            <a:r>
+              <a:rPr lang="de-DE" dirty="0"/>
+              <a:t> SDK)</a:t>
+            </a:r>
+          </a:p>
+          <a:p>
             <a:pPr rtl="0"/>
-            <a:r>
-              <a:rPr lang="de-DE" dirty="0" err="1"/>
-              <a:t>Meta</a:t>
-            </a:r>
-            <a:r>
-              <a:rPr lang="de-DE" dirty="0"/>
-              <a:t> Quest 2 (</a:t>
-            </a:r>
-            <a:r>
-              <a:rPr lang="de-DE" dirty="0" err="1"/>
-              <a:t>borrowed</a:t>
-            </a:r>
-            <a:r>
-              <a:rPr lang="de-DE" dirty="0"/>
-              <a:t> </a:t>
-            </a:r>
-            <a:r>
-              <a:rPr lang="de-DE" dirty="0" err="1"/>
-              <a:t>from</a:t>
-            </a:r>
-            <a:r>
-              <a:rPr lang="de-DE"/>
-              <a:t> FH)</a:t>
-            </a:r>
             <a:endParaRPr lang="de-DE" dirty="0"/>
           </a:p>
         </p:txBody>
@@ -20095,7 +21730,13 @@
   <p:cSld>
     <p:spTree>
       <p:nvGrpSpPr>
-        <p:cNvPr id="1" name=""/>
+        <p:cNvPr id="1" name="">
+          <a:extLst>
+            <a:ext uri="{FF2B5EF4-FFF2-40B4-BE49-F238E27FC236}">
+              <a16:creationId xmlns:a16="http://schemas.microsoft.com/office/drawing/2014/main" id="{C514BBA9-815A-78A2-967E-8C6C224AA963}"/>
+            </a:ext>
+          </a:extLst>
+        </p:cNvPr>
         <p:cNvGrpSpPr/>
         <p:nvPr/>
       </p:nvGrpSpPr>
@@ -20109,10 +21750,10 @@
       </p:grpSpPr>
       <p:sp>
         <p:nvSpPr>
-          <p:cNvPr id="3" name="Titel 2">
+          <p:cNvPr id="2" name="Titel 1">
             <a:extLst>
               <a:ext uri="{FF2B5EF4-FFF2-40B4-BE49-F238E27FC236}">
-                <a16:creationId xmlns:a16="http://schemas.microsoft.com/office/drawing/2014/main" id="{3D55F2D4-C20E-BEBC-1CCF-4449B0456A7E}"/>
+                <a16:creationId xmlns:a16="http://schemas.microsoft.com/office/drawing/2014/main" id="{939946AE-E932-59A5-6BA0-5B96B2C83877}"/>
               </a:ext>
             </a:extLst>
           </p:cNvPr>
@@ -20125,8 +21766,8 @@
         </p:nvSpPr>
         <p:spPr>
           <a:xfrm>
-            <a:off x="914401" y="965393"/>
-            <a:ext cx="7725746" cy="1091627"/>
+            <a:off x="4364809" y="1057274"/>
+            <a:ext cx="5161746" cy="2520217"/>
           </a:xfrm>
         </p:spPr>
         <p:txBody>
@@ -20140,123 +21781,17 @@
             <a:pPr rtl="0"/>
             <a:r>
               <a:rPr lang="de-DE" dirty="0"/>
-              <a:t>NAVIGIEREN IN FRAGE-UND-ANTWORT-SITZUNGEN</a:t>
+              <a:t>Umsetzung: Hierarchie</a:t>
             </a:r>
           </a:p>
         </p:txBody>
       </p:sp>
       <p:sp>
         <p:nvSpPr>
-          <p:cNvPr id="14" name="Inhaltsplatzhalter 7">
+          <p:cNvPr id="3" name="Foliennummernplatzhalter 2">
             <a:extLst>
               <a:ext uri="{FF2B5EF4-FFF2-40B4-BE49-F238E27FC236}">
-                <a16:creationId xmlns:a16="http://schemas.microsoft.com/office/drawing/2014/main" id="{749C7CD1-A9AA-49E3-6734-AD9546F2DF5B}"/>
-              </a:ext>
-            </a:extLst>
-          </p:cNvPr>
-          <p:cNvSpPr>
-            <a:spLocks noGrp="1"/>
-          </p:cNvSpPr>
-          <p:nvPr>
-            <p:ph sz="half" idx="15"/>
-          </p:nvPr>
-        </p:nvSpPr>
-        <p:spPr>
-          <a:xfrm>
-            <a:off x="914399" y="2303463"/>
-            <a:ext cx="3666931" cy="4143375"/>
-          </a:xfrm>
-        </p:spPr>
-        <p:txBody>
-          <a:bodyPr rtlCol="0">
-            <a:normAutofit/>
-          </a:bodyPr>
-          <a:lstStyle>
-            <a:defPPr>
-              <a:defRPr lang="de-DE"/>
-            </a:defPPr>
-          </a:lstStyle>
-          <a:p>
-            <a:pPr rtl="0"/>
-            <a:r>
-              <a:rPr lang="de-DE" dirty="0"/>
-              <a:t>Um Selbstvertrauen und Autorität auszudrücken, ist es wichtig, während der Frage-und-Antwort-Runde Gelassenheit zu bewahren. Beachten Sie die folgenden Tipps, um gelassen zu bleiben:</a:t>
-            </a:r>
-          </a:p>
-          <a:p>
-            <a:pPr rtl="0"/>
-            <a:r>
-              <a:rPr lang="de-DE" dirty="0"/>
-              <a:t>Ruhig bleiben</a:t>
-            </a:r>
-          </a:p>
-          <a:p>
-            <a:pPr rtl="0"/>
-            <a:r>
-              <a:rPr lang="de-DE" dirty="0"/>
-              <a:t>Aktiv zuhören</a:t>
-            </a:r>
-          </a:p>
-          <a:p>
-            <a:pPr rtl="0"/>
-            <a:r>
-              <a:rPr lang="de-DE" dirty="0"/>
-              <a:t>Innehalten und nachdenken</a:t>
-            </a:r>
-          </a:p>
-          <a:p>
-            <a:pPr rtl="0"/>
-            <a:r>
-              <a:rPr lang="de-DE" dirty="0"/>
-              <a:t>Augenkontakt beibehalten</a:t>
-            </a:r>
-          </a:p>
-        </p:txBody>
-      </p:sp>
-      <p:sp>
-        <p:nvSpPr>
-          <p:cNvPr id="13" name="Inhaltsplatzhalter 5">
-            <a:extLst>
-              <a:ext uri="{FF2B5EF4-FFF2-40B4-BE49-F238E27FC236}">
-                <a16:creationId xmlns:a16="http://schemas.microsoft.com/office/drawing/2014/main" id="{58AC0C8B-8A7A-9FAE-2D0F-4D1C3A8C3FA5}"/>
-              </a:ext>
-            </a:extLst>
-          </p:cNvPr>
-          <p:cNvSpPr>
-            <a:spLocks noGrp="1"/>
-          </p:cNvSpPr>
-          <p:nvPr>
-            <p:ph sz="half" idx="1"/>
-          </p:nvPr>
-        </p:nvSpPr>
-        <p:spPr>
-          <a:xfrm>
-            <a:off x="4781550" y="2303463"/>
-            <a:ext cx="3763963" cy="4143375"/>
-          </a:xfrm>
-        </p:spPr>
-        <p:txBody>
-          <a:bodyPr rtlCol="0"/>
-          <a:lstStyle>
-            <a:defPPr>
-              <a:defRPr lang="de-DE"/>
-            </a:defPPr>
-          </a:lstStyle>
-          <a:p>
-            <a:pPr rtl="0"/>
-            <a:r>
-              <a:rPr lang="de-DE" dirty="0"/>
-              <a:t>Machen Sie sich im Voraus mit Ihrem Material vertraut. Antizipieren Sie häufige Fragen und üben Sie Ihre Antworten.</a:t>
-            </a:r>
-          </a:p>
-        </p:txBody>
-      </p:sp>
-      <p:sp>
-        <p:nvSpPr>
-          <p:cNvPr id="4" name="Foliennummernplatzhalter 3">
-            <a:extLst>
-              <a:ext uri="{FF2B5EF4-FFF2-40B4-BE49-F238E27FC236}">
-                <a16:creationId xmlns:a16="http://schemas.microsoft.com/office/drawing/2014/main" id="{C82CE1B8-1C92-D6D2-444B-652DB90E86D1}"/>
+                <a16:creationId xmlns:a16="http://schemas.microsoft.com/office/drawing/2014/main" id="{51D86A6A-0062-B6EB-E84E-30C39C9922A4}"/>
               </a:ext>
             </a:extLst>
           </p:cNvPr>
@@ -20269,8 +21804,8 @@
         </p:nvSpPr>
         <p:spPr>
           <a:xfrm>
-            <a:off x="10358437" y="457199"/>
-            <a:ext cx="1067589" cy="471489"/>
+            <a:off x="10438475" y="457199"/>
+            <a:ext cx="987552" cy="471489"/>
           </a:xfrm>
         </p:spPr>
         <p:txBody>
@@ -20293,10 +21828,10 @@
       </p:sp>
       <p:sp>
         <p:nvSpPr>
-          <p:cNvPr id="5" name="Bildplatzhalter 4">
+          <p:cNvPr id="4" name="Inhaltsplatzhalter 3">
             <a:extLst>
               <a:ext uri="{FF2B5EF4-FFF2-40B4-BE49-F238E27FC236}">
-                <a16:creationId xmlns:a16="http://schemas.microsoft.com/office/drawing/2014/main" id="{453A9D93-D5BF-9098-E9EE-7B87805111A9}"/>
+                <a16:creationId xmlns:a16="http://schemas.microsoft.com/office/drawing/2014/main" id="{FC64360C-BEDD-2B7B-5645-EB974442853D}"/>
               </a:ext>
             </a:extLst>
           </p:cNvPr>
@@ -20304,22 +21839,43 @@
             <a:spLocks noGrp="1"/>
           </p:cNvSpPr>
           <p:nvPr>
-            <p:ph type="pic" sz="quarter" idx="14"/>
+            <p:ph idx="11"/>
           </p:nvPr>
         </p:nvSpPr>
-        <p:spPr/>
+        <p:spPr>
+          <a:xfrm>
+            <a:off x="4364808" y="3808750"/>
+            <a:ext cx="7043618" cy="2233233"/>
+          </a:xfrm>
+        </p:spPr>
         <p:txBody>
-          <a:bodyPr/>
-          <a:lstStyle/>
-          <a:p>
-            <a:endParaRPr lang="de-AT"/>
+          <a:bodyPr rtlCol="0"/>
+          <a:lstStyle>
+            <a:defPPr>
+              <a:defRPr lang="de-DE"/>
+            </a:defPPr>
+          </a:lstStyle>
+          <a:p>
+            <a:pPr rtl="0"/>
+            <a:r>
+              <a:rPr lang="de-DE" dirty="0"/>
+              <a:t>Wie sieht die </a:t>
+            </a:r>
+            <a:r>
+              <a:rPr lang="de-DE" dirty="0" err="1"/>
+              <a:t>Hierarchy</a:t>
+            </a:r>
+            <a:r>
+              <a:rPr lang="de-DE" dirty="0"/>
+              <a:t> in Unity aus?</a:t>
+            </a:r>
           </a:p>
         </p:txBody>
       </p:sp>
     </p:spTree>
     <p:extLst>
       <p:ext uri="{BB962C8B-B14F-4D97-AF65-F5344CB8AC3E}">
-        <p14:creationId xmlns:p14="http://schemas.microsoft.com/office/powerpoint/2010/main" val="1941619646"/>
+        <p14:creationId xmlns:p14="http://schemas.microsoft.com/office/powerpoint/2010/main" val="779327877"/>
       </p:ext>
     </p:extLst>
   </p:cSld>
@@ -20348,10 +21904,10 @@
       </p:grpSpPr>
       <p:sp>
         <p:nvSpPr>
-          <p:cNvPr id="3" name="Titel 2">
+          <p:cNvPr id="2" name="Titel 1">
             <a:extLst>
               <a:ext uri="{FF2B5EF4-FFF2-40B4-BE49-F238E27FC236}">
-                <a16:creationId xmlns:a16="http://schemas.microsoft.com/office/drawing/2014/main" id="{9443EC8A-1733-CCF7-081F-EB4667CB3285}"/>
+                <a16:creationId xmlns:a16="http://schemas.microsoft.com/office/drawing/2014/main" id="{FD5E8954-9BCB-7FD9-A210-38DC54382D45}"/>
               </a:ext>
             </a:extLst>
           </p:cNvPr>
@@ -20364,8 +21920,8 @@
         </p:nvSpPr>
         <p:spPr>
           <a:xfrm>
-            <a:off x="914400" y="1057274"/>
-            <a:ext cx="7843837" cy="1012782"/>
+            <a:off x="3460565" y="1057274"/>
+            <a:ext cx="7965461" cy="994164"/>
           </a:xfrm>
         </p:spPr>
         <p:txBody>
@@ -20376,20 +21932,19 @@
             </a:defPPr>
           </a:lstStyle>
           <a:p>
-            <a:pPr rtl="0"/>
-            <a:r>
-              <a:rPr lang="de-DE"/>
-              <a:t>Wirkung der Rede</a:t>
+            <a:r>
+              <a:rPr lang="de-DE" dirty="0"/>
+              <a:t>Umsetzung: Hierarchie</a:t>
             </a:r>
           </a:p>
         </p:txBody>
       </p:sp>
       <p:sp>
         <p:nvSpPr>
-          <p:cNvPr id="4" name="Inhaltsplatzhalter 3">
+          <p:cNvPr id="3" name="Inhaltsplatzhalter 2">
             <a:extLst>
               <a:ext uri="{FF2B5EF4-FFF2-40B4-BE49-F238E27FC236}">
-                <a16:creationId xmlns:a16="http://schemas.microsoft.com/office/drawing/2014/main" id="{ACE55D3D-AA24-CF53-6679-29B3C83F7646}"/>
+                <a16:creationId xmlns:a16="http://schemas.microsoft.com/office/drawing/2014/main" id="{75111C33-898C-4414-4665-5136EB6FC126}"/>
               </a:ext>
             </a:extLst>
           </p:cNvPr>
@@ -20397,13 +21952,255 @@
             <a:spLocks noGrp="1"/>
           </p:cNvSpPr>
           <p:nvPr>
-            <p:ph idx="13"/>
+            <p:ph sz="half" idx="2"/>
           </p:nvPr>
         </p:nvSpPr>
         <p:spPr>
           <a:xfrm>
-            <a:off x="914400" y="2331791"/>
-            <a:ext cx="6903076" cy="3721817"/>
+            <a:off x="3460564" y="2303028"/>
+            <a:ext cx="8563795" cy="4372091"/>
+          </a:xfrm>
+        </p:spPr>
+        <p:txBody>
+          <a:bodyPr rtlCol="0">
+            <a:normAutofit/>
+          </a:bodyPr>
+          <a:lstStyle>
+            <a:defPPr>
+              <a:defRPr lang="de-DE"/>
+            </a:defPPr>
+          </a:lstStyle>
+          <a:p>
+            <a:pPr marL="0" indent="0" rtl="0">
+              <a:buNone/>
+            </a:pPr>
+            <a:r>
+              <a:rPr lang="de-DE" dirty="0" err="1"/>
+              <a:t>CameraRig</a:t>
+            </a:r>
+            <a:r>
+              <a:rPr lang="de-DE" dirty="0"/>
+              <a:t> (einheitlicher Tracking Space für alle Szenen)</a:t>
+            </a:r>
+          </a:p>
+          <a:p>
+            <a:pPr marL="0" indent="0" rtl="0">
+              <a:buNone/>
+            </a:pPr>
+            <a:r>
+              <a:rPr lang="de-DE" dirty="0" err="1"/>
+              <a:t>InteractionRig</a:t>
+            </a:r>
+            <a:r>
+              <a:rPr lang="de-DE" dirty="0"/>
+              <a:t> (Handtracking, Interactions, Pointer und Rays)</a:t>
+            </a:r>
+          </a:p>
+          <a:p>
+            <a:pPr marL="0" indent="0" rtl="0">
+              <a:buNone/>
+            </a:pPr>
+            <a:r>
+              <a:rPr lang="de-DE" dirty="0" err="1"/>
+              <a:t>EventSystem</a:t>
+            </a:r>
+            <a:r>
+              <a:rPr lang="de-DE" dirty="0"/>
+              <a:t> (</a:t>
+            </a:r>
+            <a:r>
+              <a:rPr lang="de-DE" dirty="0" err="1"/>
+              <a:t>Pointable</a:t>
+            </a:r>
+            <a:r>
+              <a:rPr lang="de-DE" dirty="0"/>
+              <a:t> Canvas)</a:t>
+            </a:r>
+          </a:p>
+          <a:p>
+            <a:pPr marL="0" indent="0" rtl="0">
+              <a:buNone/>
+            </a:pPr>
+            <a:r>
+              <a:rPr lang="de-DE" dirty="0" err="1"/>
+              <a:t>SolarSystemMode</a:t>
+            </a:r>
+            <a:r>
+              <a:rPr lang="de-DE" dirty="0"/>
+              <a:t> (alle 9 Planeten in einer Linie und Canvas)</a:t>
+            </a:r>
+          </a:p>
+          <a:p>
+            <a:pPr marL="0" indent="0" rtl="0">
+              <a:buNone/>
+            </a:pPr>
+            <a:r>
+              <a:rPr lang="de-DE" dirty="0"/>
+              <a:t>9 </a:t>
+            </a:r>
+            <a:r>
+              <a:rPr lang="de-DE" dirty="0" err="1"/>
+              <a:t>DetailModes</a:t>
+            </a:r>
+            <a:r>
+              <a:rPr lang="de-DE" dirty="0"/>
+              <a:t> (mit Planeten und Canvas daneben)</a:t>
+            </a:r>
+          </a:p>
+          <a:p>
+            <a:pPr marL="0" indent="0" rtl="0">
+              <a:buNone/>
+            </a:pPr>
+            <a:r>
+              <a:rPr lang="de-DE" dirty="0" err="1"/>
+              <a:t>ComparisonMode</a:t>
+            </a:r>
+            <a:r>
+              <a:rPr lang="de-DE" dirty="0"/>
+              <a:t> (2 </a:t>
+            </a:r>
+            <a:r>
+              <a:rPr lang="de-DE" dirty="0" err="1"/>
+              <a:t>DetailModes</a:t>
+            </a:r>
+            <a:r>
+              <a:rPr lang="de-DE" dirty="0"/>
+              <a:t> übereinander plus Trennung und gemeinsamer Zurückbutton)</a:t>
+            </a:r>
+          </a:p>
+          <a:p>
+            <a:pPr marL="0" indent="0" rtl="0">
+              <a:buNone/>
+            </a:pPr>
+            <a:r>
+              <a:rPr lang="de-DE" dirty="0" err="1"/>
+              <a:t>RealisticUI</a:t>
+            </a:r>
+            <a:r>
+              <a:rPr lang="de-DE" dirty="0"/>
+              <a:t>, </a:t>
+            </a:r>
+            <a:r>
+              <a:rPr lang="de-DE" dirty="0" err="1"/>
+              <a:t>RealisticSolarSystem</a:t>
+            </a:r>
+            <a:r>
+              <a:rPr lang="de-DE" dirty="0"/>
+              <a:t> (Planeten ohne Interaktionen aber Skripte für Bewegung und eigene Canvas)</a:t>
+            </a:r>
+          </a:p>
+          <a:p>
+            <a:pPr marL="0" indent="0" rtl="0">
+              <a:buNone/>
+            </a:pPr>
+            <a:r>
+              <a:rPr lang="de-DE" dirty="0"/>
+              <a:t>4 Audio Objekte für 4 Modi (</a:t>
+            </a:r>
+            <a:r>
+              <a:rPr lang="de-DE" dirty="0" err="1"/>
+              <a:t>SolarSystem</a:t>
+            </a:r>
+            <a:r>
+              <a:rPr lang="de-DE" dirty="0"/>
+              <a:t>, </a:t>
+            </a:r>
+            <a:r>
+              <a:rPr lang="de-DE" dirty="0" err="1"/>
+              <a:t>RealisticSolarSystem</a:t>
+            </a:r>
+            <a:r>
+              <a:rPr lang="de-DE" dirty="0"/>
+              <a:t>, Detail, </a:t>
+            </a:r>
+            <a:r>
+              <a:rPr lang="de-DE" dirty="0" err="1"/>
+              <a:t>Compare</a:t>
+            </a:r>
+            <a:r>
+              <a:rPr lang="de-DE" dirty="0"/>
+              <a:t>)</a:t>
+            </a:r>
+          </a:p>
+          <a:p>
+            <a:pPr marL="0" indent="0" rtl="0">
+              <a:buNone/>
+            </a:pPr>
+            <a:r>
+              <a:rPr lang="de-DE" dirty="0"/>
+              <a:t>2 </a:t>
+            </a:r>
+            <a:r>
+              <a:rPr lang="de-DE" dirty="0" err="1"/>
+              <a:t>ModeManager</a:t>
+            </a:r>
+            <a:r>
+              <a:rPr lang="de-DE" dirty="0"/>
+              <a:t> (1 für </a:t>
+            </a:r>
+            <a:r>
+              <a:rPr lang="de-DE" dirty="0" err="1"/>
+              <a:t>SolarSystem</a:t>
+            </a:r>
+            <a:r>
+              <a:rPr lang="de-DE" dirty="0"/>
+              <a:t> + </a:t>
+            </a:r>
+            <a:r>
+              <a:rPr lang="de-DE" dirty="0" err="1"/>
+              <a:t>RealisticSolarSystem</a:t>
+            </a:r>
+            <a:r>
+              <a:rPr lang="de-DE" dirty="0"/>
+              <a:t> und 1 für </a:t>
+            </a:r>
+            <a:r>
+              <a:rPr lang="de-DE" dirty="0" err="1"/>
+              <a:t>SolarSystem</a:t>
+            </a:r>
+            <a:r>
+              <a:rPr lang="de-DE" dirty="0"/>
+              <a:t> + Detail/</a:t>
+            </a:r>
+            <a:r>
+              <a:rPr lang="de-DE" dirty="0" err="1"/>
+              <a:t>Compare</a:t>
+            </a:r>
+            <a:r>
+              <a:rPr lang="de-DE" dirty="0"/>
+              <a:t>)</a:t>
+            </a:r>
+          </a:p>
+          <a:p>
+            <a:pPr rtl="0"/>
+            <a:endParaRPr lang="de-DE" dirty="0"/>
+          </a:p>
+          <a:p>
+            <a:pPr rtl="0"/>
+            <a:endParaRPr lang="de-DE" dirty="0"/>
+          </a:p>
+        </p:txBody>
+      </p:sp>
+      <p:sp>
+        <p:nvSpPr>
+          <p:cNvPr id="23" name="Foliennummernplatzhalter 22">
+            <a:extLst>
+              <a:ext uri="{FF2B5EF4-FFF2-40B4-BE49-F238E27FC236}">
+                <a16:creationId xmlns:a16="http://schemas.microsoft.com/office/drawing/2014/main" id="{94FF72B7-0438-3641-5939-75128934B0DF}"/>
+              </a:ext>
+            </a:extLst>
+          </p:cNvPr>
+          <p:cNvSpPr>
+            <a:spLocks noGrp="1"/>
+          </p:cNvSpPr>
+          <p:nvPr>
+            <p:ph type="sldNum" sz="quarter" idx="10"/>
+          </p:nvPr>
+        </p:nvSpPr>
+        <p:spPr>
+          <a:xfrm>
+            <a:off x="10358437" y="457199"/>
+            <a:ext cx="1067589" cy="471489"/>
           </a:xfrm>
         </p:spPr>
         <p:txBody>
@@ -20415,30 +22212,95 @@
           </a:lstStyle>
           <a:p>
             <a:pPr rtl="0"/>
+            <a:fld id="{48F63A3B-78C7-47BE-AE5E-E10140E04643}" type="slidenum">
+              <a:rPr lang="de-DE" smtClean="0"/>
+              <a:pPr rtl="0"/>
+              <a:t>8</a:t>
+            </a:fld>
+            <a:endParaRPr lang="de-DE" dirty="0"/>
+          </a:p>
+        </p:txBody>
+      </p:sp>
+    </p:spTree>
+    <p:extLst>
+      <p:ext uri="{BB962C8B-B14F-4D97-AF65-F5344CB8AC3E}">
+        <p14:creationId xmlns:p14="http://schemas.microsoft.com/office/powerpoint/2010/main" val="685681062"/>
+      </p:ext>
+    </p:extLst>
+  </p:cSld>
+  <p:clrMapOvr>
+    <a:masterClrMapping/>
+  </p:clrMapOvr>
+</p:sld>
+</file>
+
+<file path=ppt/slides/slide9.xml><?xml version="1.0" encoding="utf-8"?>
+<p:sld xmlns:a="http://schemas.openxmlformats.org/drawingml/2006/main" xmlns:r="http://schemas.openxmlformats.org/officeDocument/2006/relationships" xmlns:p="http://schemas.openxmlformats.org/presentationml/2006/main">
+  <p:cSld>
+    <p:spTree>
+      <p:nvGrpSpPr>
+        <p:cNvPr id="1" name="">
+          <a:extLst>
+            <a:ext uri="{FF2B5EF4-FFF2-40B4-BE49-F238E27FC236}">
+              <a16:creationId xmlns:a16="http://schemas.microsoft.com/office/drawing/2014/main" id="{8C4DF730-922B-D553-321D-A866F095FFEE}"/>
+            </a:ext>
+          </a:extLst>
+        </p:cNvPr>
+        <p:cNvGrpSpPr/>
+        <p:nvPr/>
+      </p:nvGrpSpPr>
+      <p:grpSpPr>
+        <a:xfrm>
+          <a:off x="0" y="0"/>
+          <a:ext cx="0" cy="0"/>
+          <a:chOff x="0" y="0"/>
+          <a:chExt cx="0" cy="0"/>
+        </a:xfrm>
+      </p:grpSpPr>
+      <p:sp>
+        <p:nvSpPr>
+          <p:cNvPr id="2" name="Titel 1">
+            <a:extLst>
+              <a:ext uri="{FF2B5EF4-FFF2-40B4-BE49-F238E27FC236}">
+                <a16:creationId xmlns:a16="http://schemas.microsoft.com/office/drawing/2014/main" id="{1FCC12D1-7C95-0B6A-219A-D1FBDDAA5AF5}"/>
+              </a:ext>
+            </a:extLst>
+          </p:cNvPr>
+          <p:cNvSpPr>
+            <a:spLocks noGrp="1"/>
+          </p:cNvSpPr>
+          <p:nvPr>
+            <p:ph type="title"/>
+          </p:nvPr>
+        </p:nvSpPr>
+        <p:spPr>
+          <a:xfrm>
+            <a:off x="4364809" y="1057274"/>
+            <a:ext cx="5161746" cy="2520217"/>
+          </a:xfrm>
+        </p:spPr>
+        <p:txBody>
+          <a:bodyPr rtlCol="0"/>
+          <a:lstStyle>
+            <a:defPPr>
+              <a:defRPr lang="de-DE"/>
+            </a:defPPr>
+          </a:lstStyle>
+          <a:p>
+            <a:pPr rtl="0"/>
             <a:r>
               <a:rPr lang="de-DE" dirty="0"/>
-              <a:t>Ihre Fähigkeit, effektiv zu kommunizieren, wird einen bleibenden Eindruck bei Ihrem Publikum hinterlassen.</a:t>
-            </a:r>
-          </a:p>
-          <a:p>
-            <a:pPr rtl="0"/>
-            <a:endParaRPr lang="de-DE" dirty="0"/>
-          </a:p>
-          <a:p>
-            <a:pPr rtl="0"/>
-            <a:r>
-              <a:rPr lang="de-DE" dirty="0"/>
-              <a:t>Zu einer effektiven Kommunikation gehört nicht nur die Übermittlung einer Botschaft, sondern auch die Auseinandersetzung mit den Erfahrungen, Werten und Emotionen der Zuhörer. </a:t>
+              <a:t>Umsetzung: Skripte</a:t>
             </a:r>
           </a:p>
         </p:txBody>
       </p:sp>
       <p:sp>
         <p:nvSpPr>
-          <p:cNvPr id="2" name="Foliennummernplatzhalter 1">
+          <p:cNvPr id="3" name="Foliennummernplatzhalter 2">
             <a:extLst>
               <a:ext uri="{FF2B5EF4-FFF2-40B4-BE49-F238E27FC236}">
-                <a16:creationId xmlns:a16="http://schemas.microsoft.com/office/drawing/2014/main" id="{AB69D854-FB65-0E93-CFE2-041F7C41DD24}"/>
+                <a16:creationId xmlns:a16="http://schemas.microsoft.com/office/drawing/2014/main" id="{E3F40162-242E-83BE-3AAE-16D697AA943E}"/>
               </a:ext>
             </a:extLst>
           </p:cNvPr>
@@ -20467,7 +22329,7 @@
             <a:fld id="{48F63A3B-78C7-47BE-AE5E-E10140E04643}" type="slidenum">
               <a:rPr lang="de-DE" smtClean="0"/>
               <a:pPr rtl="0"/>
-              <a:t>8</a:t>
+              <a:t>9</a:t>
             </a:fld>
             <a:endParaRPr lang="de-DE" dirty="0"/>
           </a:p>
@@ -20475,10 +22337,10 @@
       </p:sp>
       <p:sp>
         <p:nvSpPr>
-          <p:cNvPr id="6" name="Bildplatzhalter 5">
+          <p:cNvPr id="4" name="Inhaltsplatzhalter 3">
             <a:extLst>
               <a:ext uri="{FF2B5EF4-FFF2-40B4-BE49-F238E27FC236}">
-                <a16:creationId xmlns:a16="http://schemas.microsoft.com/office/drawing/2014/main" id="{9218FB2D-2AB8-7BAF-0AA5-F1CE69BDFF80}"/>
+                <a16:creationId xmlns:a16="http://schemas.microsoft.com/office/drawing/2014/main" id="{06ABD877-AFFF-184C-3FE8-62C2E72CF10B}"/>
               </a:ext>
             </a:extLst>
           </p:cNvPr>
@@ -20486,68 +22348,13 @@
             <a:spLocks noGrp="1"/>
           </p:cNvSpPr>
           <p:nvPr>
-            <p:ph type="pic" sz="quarter" idx="14"/>
-          </p:nvPr>
-        </p:nvSpPr>
-        <p:spPr/>
-        <p:txBody>
-          <a:bodyPr/>
-          <a:lstStyle/>
-          <a:p>
-            <a:endParaRPr lang="de-AT"/>
-          </a:p>
-        </p:txBody>
-      </p:sp>
-    </p:spTree>
-    <p:extLst>
-      <p:ext uri="{BB962C8B-B14F-4D97-AF65-F5344CB8AC3E}">
-        <p14:creationId xmlns:p14="http://schemas.microsoft.com/office/powerpoint/2010/main" val="4072101725"/>
-      </p:ext>
-    </p:extLst>
-  </p:cSld>
-  <p:clrMapOvr>
-    <a:masterClrMapping/>
-  </p:clrMapOvr>
-</p:sld>
-</file>
-
-<file path=ppt/slides/slide9.xml><?xml version="1.0" encoding="utf-8"?>
-<p:sld xmlns:a="http://schemas.openxmlformats.org/drawingml/2006/main" xmlns:r="http://schemas.openxmlformats.org/officeDocument/2006/relationships" xmlns:p="http://schemas.openxmlformats.org/presentationml/2006/main">
-  <p:cSld>
-    <p:spTree>
-      <p:nvGrpSpPr>
-        <p:cNvPr id="1" name=""/>
-        <p:cNvGrpSpPr/>
-        <p:nvPr/>
-      </p:nvGrpSpPr>
-      <p:grpSpPr>
-        <a:xfrm>
-          <a:off x="0" y="0"/>
-          <a:ext cx="0" cy="0"/>
-          <a:chOff x="0" y="0"/>
-          <a:chExt cx="0" cy="0"/>
-        </a:xfrm>
-      </p:grpSpPr>
-      <p:sp>
-        <p:nvSpPr>
-          <p:cNvPr id="5" name="Titel 4">
-            <a:extLst>
-              <a:ext uri="{FF2B5EF4-FFF2-40B4-BE49-F238E27FC236}">
-                <a16:creationId xmlns:a16="http://schemas.microsoft.com/office/drawing/2014/main" id="{2136FCF6-982C-CC37-9625-3EBFC7E7DD13}"/>
-              </a:ext>
-            </a:extLst>
-          </p:cNvPr>
-          <p:cNvSpPr>
-            <a:spLocks noGrp="1"/>
-          </p:cNvSpPr>
-          <p:nvPr>
-            <p:ph type="title"/>
+            <p:ph idx="11"/>
           </p:nvPr>
         </p:nvSpPr>
         <p:spPr>
           <a:xfrm>
-            <a:off x="1550563" y="1089213"/>
-            <a:ext cx="9879437" cy="980844"/>
+            <a:off x="4364808" y="3808750"/>
+            <a:ext cx="7043618" cy="2233233"/>
           </a:xfrm>
         </p:spPr>
         <p:txBody>
@@ -20560,736 +22367,16 @@
           <a:p>
             <a:pPr rtl="0"/>
             <a:r>
-              <a:rPr lang="de-DE"/>
-              <a:t>Dynamischer Vortrag</a:t>
-            </a:r>
-          </a:p>
-        </p:txBody>
-      </p:sp>
-      <p:sp>
-        <p:nvSpPr>
-          <p:cNvPr id="4" name="Textplatzhalter 3">
-            <a:extLst>
-              <a:ext uri="{FF2B5EF4-FFF2-40B4-BE49-F238E27FC236}">
-                <a16:creationId xmlns:a16="http://schemas.microsoft.com/office/drawing/2014/main" id="{97DCC342-9FD1-7055-EAAC-008DC851B13F}"/>
-              </a:ext>
-            </a:extLst>
-          </p:cNvPr>
-          <p:cNvSpPr>
-            <a:spLocks noGrp="1"/>
-          </p:cNvSpPr>
-          <p:nvPr>
-            <p:ph type="body" sz="quarter" idx="13"/>
-          </p:nvPr>
-        </p:nvSpPr>
-        <p:spPr>
-          <a:xfrm>
-            <a:off x="1550564" y="2331958"/>
-            <a:ext cx="2975217" cy="3704266"/>
-          </a:xfrm>
-        </p:spPr>
-        <p:txBody>
-          <a:bodyPr rtlCol="0"/>
-          <a:lstStyle>
-            <a:defPPr>
-              <a:defRPr lang="de-DE"/>
-            </a:defPPr>
-          </a:lstStyle>
-          <a:p>
-            <a:pPr rtl="0"/>
-            <a:r>
               <a:rPr lang="de-DE" dirty="0"/>
-              <a:t>Erfahren Sie, wie Sie Energie in Ihren Vortrag einfließen lassen, um einen bleibenden Eindruck zu hinterlassen.</a:t>
-            </a:r>
-          </a:p>
-          <a:p>
-            <a:pPr rtl="0"/>
-            <a:r>
-              <a:rPr lang="de-DE" dirty="0"/>
-              <a:t>Eines der Ziele einer effektiven Kommunikation besteht darin, Ihre Zielgruppe zu motivieren.</a:t>
-            </a:r>
-          </a:p>
-        </p:txBody>
-      </p:sp>
-      <p:graphicFrame>
-        <p:nvGraphicFramePr>
-          <p:cNvPr id="6" name="Inhaltsplatzhalter 5">
-            <a:extLst>
-              <a:ext uri="{FF2B5EF4-FFF2-40B4-BE49-F238E27FC236}">
-                <a16:creationId xmlns:a16="http://schemas.microsoft.com/office/drawing/2014/main" id="{4DB3991E-0605-C20E-53AD-D64E13638DA5}"/>
-              </a:ext>
-            </a:extLst>
-          </p:cNvPr>
-          <p:cNvGraphicFramePr>
-            <a:graphicFrameLocks noGrp="1"/>
-          </p:cNvGraphicFramePr>
-          <p:nvPr>
-            <p:ph sz="half" idx="1"/>
-            <p:extLst>
-              <p:ext uri="{D42A27DB-BD31-4B8C-83A1-F6EECF244321}">
-                <p14:modId xmlns:p14="http://schemas.microsoft.com/office/powerpoint/2010/main" val="1034980823"/>
-              </p:ext>
-            </p:extLst>
-          </p:nvPr>
-        </p:nvGraphicFramePr>
-        <p:xfrm>
-          <a:off x="5087938" y="2332038"/>
-          <a:ext cx="6621980" cy="3947181"/>
-        </p:xfrm>
-        <a:graphic>
-          <a:graphicData uri="http://schemas.openxmlformats.org/drawingml/2006/table">
-            <a:tbl>
-              <a:tblPr firstRow="1" bandRow="1">
-                <a:tableStyleId>{3B4B98B0-60AC-42C2-AFA5-B58CD77FA1E5}</a:tableStyleId>
-              </a:tblPr>
-              <a:tblGrid>
-                <a:gridCol w="2801543">
-                  <a:extLst>
-                    <a:ext uri="{9D8B030D-6E8A-4147-A177-3AD203B41FA5}">
-                      <a16:colId xmlns:a16="http://schemas.microsoft.com/office/drawing/2014/main" val="180956085"/>
-                    </a:ext>
-                  </a:extLst>
-                </a:gridCol>
-                <a:gridCol w="1758372">
-                  <a:extLst>
-                    <a:ext uri="{9D8B030D-6E8A-4147-A177-3AD203B41FA5}">
-                      <a16:colId xmlns:a16="http://schemas.microsoft.com/office/drawing/2014/main" val="1180706872"/>
-                    </a:ext>
-                  </a:extLst>
-                </a:gridCol>
-                <a:gridCol w="662474">
-                  <a:extLst>
-                    <a:ext uri="{9D8B030D-6E8A-4147-A177-3AD203B41FA5}">
-                      <a16:colId xmlns:a16="http://schemas.microsoft.com/office/drawing/2014/main" val="2050154702"/>
-                    </a:ext>
-                  </a:extLst>
-                </a:gridCol>
-                <a:gridCol w="1399591">
-                  <a:extLst>
-                    <a:ext uri="{9D8B030D-6E8A-4147-A177-3AD203B41FA5}">
-                      <a16:colId xmlns:a16="http://schemas.microsoft.com/office/drawing/2014/main" val="1872764148"/>
-                    </a:ext>
-                  </a:extLst>
-                </a:gridCol>
-              </a:tblGrid>
-              <a:tr h="606129">
-                <a:tc>
-                  <a:txBody>
-                    <a:bodyPr/>
-                    <a:lstStyle>
-                      <a:defPPr>
-                        <a:defRPr lang="de-DE"/>
-                      </a:defPPr>
-                    </a:lstStyle>
-                    <a:p>
-                      <a:pPr rtl="0"/>
-                      <a:r>
-                        <a:rPr lang="de-DE">
-                          <a:solidFill>
-                            <a:schemeClr val="accent6"/>
-                          </a:solidFill>
-                        </a:rPr>
-                        <a:t>Metrik</a:t>
-                      </a:r>
-                    </a:p>
-                  </a:txBody>
-                  <a:tcPr anchor="ctr"/>
-                </a:tc>
-                <a:tc>
-                  <a:txBody>
-                    <a:bodyPr/>
-                    <a:lstStyle>
-                      <a:defPPr>
-                        <a:defRPr lang="de-DE"/>
-                      </a:defPPr>
-                    </a:lstStyle>
-                    <a:p>
-                      <a:pPr rtl="0"/>
-                      <a:r>
-                        <a:rPr lang="de-DE">
-                          <a:solidFill>
-                            <a:schemeClr val="accent6"/>
-                          </a:solidFill>
-                        </a:rPr>
-                        <a:t>Messung</a:t>
-                      </a:r>
-                    </a:p>
-                  </a:txBody>
-                  <a:tcPr anchor="ctr"/>
-                </a:tc>
-                <a:tc>
-                  <a:txBody>
-                    <a:bodyPr/>
-                    <a:lstStyle>
-                      <a:defPPr>
-                        <a:defRPr lang="de-DE"/>
-                      </a:defPPr>
-                    </a:lstStyle>
-                    <a:p>
-                      <a:pPr rtl="0"/>
-                      <a:r>
-                        <a:rPr lang="de-DE">
-                          <a:solidFill>
-                            <a:schemeClr val="accent6"/>
-                          </a:solidFill>
-                        </a:rPr>
-                        <a:t>Ziel</a:t>
-                      </a:r>
-                    </a:p>
-                  </a:txBody>
-                  <a:tcPr anchor="ctr"/>
-                </a:tc>
-                <a:tc>
-                  <a:txBody>
-                    <a:bodyPr/>
-                    <a:lstStyle>
-                      <a:defPPr>
-                        <a:defRPr lang="de-DE"/>
-                      </a:defPPr>
-                    </a:lstStyle>
-                    <a:p>
-                      <a:pPr rtl="0"/>
-                      <a:r>
-                        <a:rPr lang="de-DE">
-                          <a:solidFill>
-                            <a:schemeClr val="accent6"/>
-                          </a:solidFill>
-                        </a:rPr>
-                        <a:t>Tatsächlich</a:t>
-                      </a:r>
-                    </a:p>
-                  </a:txBody>
-                  <a:tcPr anchor="ctr"/>
-                </a:tc>
-                <a:extLst>
-                  <a:ext uri="{0D108BD9-81ED-4DB2-BD59-A6C34878D82A}">
-                    <a16:rowId xmlns:a16="http://schemas.microsoft.com/office/drawing/2014/main" val="3059142786"/>
-                  </a:ext>
-                </a:extLst>
-              </a:tr>
-              <a:tr h="606129">
-                <a:tc>
-                  <a:txBody>
-                    <a:bodyPr/>
-                    <a:lstStyle>
-                      <a:defPPr>
-                        <a:defRPr lang="de-DE"/>
-                      </a:defPPr>
-                    </a:lstStyle>
-                    <a:p>
-                      <a:pPr rtl="0"/>
-                      <a:r>
-                        <a:rPr lang="de-DE">
-                          <a:solidFill>
-                            <a:schemeClr val="accent6"/>
-                          </a:solidFill>
-                        </a:rPr>
-                        <a:t>Anwesenheit des Publikums</a:t>
-                      </a:r>
-                    </a:p>
-                  </a:txBody>
-                  <a:tcPr anchor="ctr"/>
-                </a:tc>
-                <a:tc>
-                  <a:txBody>
-                    <a:bodyPr/>
-                    <a:lstStyle>
-                      <a:defPPr>
-                        <a:defRPr lang="de-DE"/>
-                      </a:defPPr>
-                    </a:lstStyle>
-                    <a:p>
-                      <a:pPr rtl="0"/>
-                      <a:r>
-                        <a:rPr lang="de-DE" dirty="0">
-                          <a:solidFill>
-                            <a:schemeClr val="accent6"/>
-                          </a:solidFill>
-                        </a:rPr>
-                        <a:t>Anzahl der Teilnehmer</a:t>
-                      </a:r>
-                    </a:p>
-                  </a:txBody>
-                  <a:tcPr anchor="ctr"/>
-                </a:tc>
-                <a:tc>
-                  <a:txBody>
-                    <a:bodyPr/>
-                    <a:lstStyle>
-                      <a:defPPr>
-                        <a:defRPr lang="de-DE"/>
-                      </a:defPPr>
-                    </a:lstStyle>
-                    <a:p>
-                      <a:pPr rtl="0"/>
-                      <a:r>
-                        <a:rPr lang="de-DE">
-                          <a:solidFill>
-                            <a:schemeClr val="accent6"/>
-                          </a:solidFill>
-                        </a:rPr>
-                        <a:t>150</a:t>
-                      </a:r>
-                    </a:p>
-                  </a:txBody>
-                  <a:tcPr anchor="ctr"/>
-                </a:tc>
-                <a:tc>
-                  <a:txBody>
-                    <a:bodyPr/>
-                    <a:lstStyle>
-                      <a:defPPr>
-                        <a:defRPr lang="de-DE"/>
-                      </a:defPPr>
-                    </a:lstStyle>
-                    <a:p>
-                      <a:pPr rtl="0"/>
-                      <a:r>
-                        <a:rPr lang="de-DE">
-                          <a:solidFill>
-                            <a:schemeClr val="accent6"/>
-                          </a:solidFill>
-                        </a:rPr>
-                        <a:t>120</a:t>
-                      </a:r>
-                    </a:p>
-                  </a:txBody>
-                  <a:tcPr anchor="ctr"/>
-                </a:tc>
-                <a:extLst>
-                  <a:ext uri="{0D108BD9-81ED-4DB2-BD59-A6C34878D82A}">
-                    <a16:rowId xmlns:a16="http://schemas.microsoft.com/office/drawing/2014/main" val="3588576737"/>
-                  </a:ext>
-                </a:extLst>
-              </a:tr>
-              <a:tr h="643498">
-                <a:tc>
-                  <a:txBody>
-                    <a:bodyPr/>
-                    <a:lstStyle>
-                      <a:defPPr>
-                        <a:defRPr lang="de-DE"/>
-                      </a:defPPr>
-                    </a:lstStyle>
-                    <a:p>
-                      <a:pPr rtl="0"/>
-                      <a:r>
-                        <a:rPr lang="de-DE">
-                          <a:solidFill>
-                            <a:schemeClr val="accent6"/>
-                          </a:solidFill>
-                        </a:rPr>
-                        <a:t>Vortragsdauer</a:t>
-                      </a:r>
-                    </a:p>
-                  </a:txBody>
-                  <a:tcPr anchor="ctr"/>
-                </a:tc>
-                <a:tc>
-                  <a:txBody>
-                    <a:bodyPr/>
-                    <a:lstStyle>
-                      <a:defPPr>
-                        <a:defRPr lang="de-DE"/>
-                      </a:defPPr>
-                    </a:lstStyle>
-                    <a:p>
-                      <a:pPr rtl="0"/>
-                      <a:r>
-                        <a:rPr lang="de-DE">
-                          <a:solidFill>
-                            <a:schemeClr val="accent6"/>
-                          </a:solidFill>
-                        </a:rPr>
-                        <a:t>Minuten</a:t>
-                      </a:r>
-                    </a:p>
-                  </a:txBody>
-                  <a:tcPr anchor="ctr"/>
-                </a:tc>
-                <a:tc>
-                  <a:txBody>
-                    <a:bodyPr/>
-                    <a:lstStyle>
-                      <a:defPPr>
-                        <a:defRPr lang="de-DE"/>
-                      </a:defPPr>
-                    </a:lstStyle>
-                    <a:p>
-                      <a:pPr rtl="0"/>
-                      <a:r>
-                        <a:rPr lang="de-DE">
-                          <a:solidFill>
-                            <a:schemeClr val="accent6"/>
-                          </a:solidFill>
-                        </a:rPr>
-                        <a:t>60</a:t>
-                      </a:r>
-                    </a:p>
-                  </a:txBody>
-                  <a:tcPr anchor="ctr"/>
-                </a:tc>
-                <a:tc>
-                  <a:txBody>
-                    <a:bodyPr/>
-                    <a:lstStyle>
-                      <a:defPPr>
-                        <a:defRPr lang="de-DE"/>
-                      </a:defPPr>
-                    </a:lstStyle>
-                    <a:p>
-                      <a:pPr rtl="0"/>
-                      <a:r>
-                        <a:rPr lang="de-DE">
-                          <a:solidFill>
-                            <a:schemeClr val="accent6"/>
-                          </a:solidFill>
-                        </a:rPr>
-                        <a:t>75</a:t>
-                      </a:r>
-                    </a:p>
-                  </a:txBody>
-                  <a:tcPr anchor="ctr"/>
-                </a:tc>
-                <a:extLst>
-                  <a:ext uri="{0D108BD9-81ED-4DB2-BD59-A6C34878D82A}">
-                    <a16:rowId xmlns:a16="http://schemas.microsoft.com/office/drawing/2014/main" val="1626410507"/>
-                  </a:ext>
-                </a:extLst>
-              </a:tr>
-              <a:tr h="606129">
-                <a:tc>
-                  <a:txBody>
-                    <a:bodyPr/>
-                    <a:lstStyle>
-                      <a:defPPr>
-                        <a:defRPr lang="de-DE"/>
-                      </a:defPPr>
-                    </a:lstStyle>
-                    <a:p>
-                      <a:pPr rtl="0"/>
-                      <a:r>
-                        <a:rPr lang="de-DE" dirty="0">
-                          <a:solidFill>
-                            <a:schemeClr val="accent6"/>
-                          </a:solidFill>
-                        </a:rPr>
-                        <a:t>Frage-Antwort-Interaktion</a:t>
-                      </a:r>
-                    </a:p>
-                  </a:txBody>
-                  <a:tcPr anchor="ctr"/>
-                </a:tc>
-                <a:tc>
-                  <a:txBody>
-                    <a:bodyPr/>
-                    <a:lstStyle>
-                      <a:defPPr>
-                        <a:defRPr lang="de-DE"/>
-                      </a:defPPr>
-                    </a:lstStyle>
-                    <a:p>
-                      <a:pPr rtl="0"/>
-                      <a:r>
-                        <a:rPr lang="de-DE">
-                          <a:solidFill>
-                            <a:schemeClr val="accent6"/>
-                          </a:solidFill>
-                        </a:rPr>
-                        <a:t>Anzahl der Fragen</a:t>
-                      </a:r>
-                    </a:p>
-                  </a:txBody>
-                  <a:tcPr anchor="ctr"/>
-                </a:tc>
-                <a:tc>
-                  <a:txBody>
-                    <a:bodyPr/>
-                    <a:lstStyle>
-                      <a:defPPr>
-                        <a:defRPr lang="de-DE"/>
-                      </a:defPPr>
-                    </a:lstStyle>
-                    <a:p>
-                      <a:pPr rtl="0"/>
-                      <a:r>
-                        <a:rPr lang="de-DE">
-                          <a:solidFill>
-                            <a:schemeClr val="accent6"/>
-                          </a:solidFill>
-                        </a:rPr>
-                        <a:t>10</a:t>
-                      </a:r>
-                    </a:p>
-                  </a:txBody>
-                  <a:tcPr anchor="ctr"/>
-                </a:tc>
-                <a:tc>
-                  <a:txBody>
-                    <a:bodyPr/>
-                    <a:lstStyle>
-                      <a:defPPr>
-                        <a:defRPr lang="de-DE"/>
-                      </a:defPPr>
-                    </a:lstStyle>
-                    <a:p>
-                      <a:pPr rtl="0"/>
-                      <a:r>
-                        <a:rPr lang="de-DE">
-                          <a:solidFill>
-                            <a:schemeClr val="accent6"/>
-                          </a:solidFill>
-                        </a:rPr>
-                        <a:t>15</a:t>
-                      </a:r>
-                    </a:p>
-                  </a:txBody>
-                  <a:tcPr anchor="ctr"/>
-                </a:tc>
-                <a:extLst>
-                  <a:ext uri="{0D108BD9-81ED-4DB2-BD59-A6C34878D82A}">
-                    <a16:rowId xmlns:a16="http://schemas.microsoft.com/office/drawing/2014/main" val="1888116840"/>
-                  </a:ext>
-                </a:extLst>
-              </a:tr>
-              <a:tr h="606129">
-                <a:tc>
-                  <a:txBody>
-                    <a:bodyPr/>
-                    <a:lstStyle>
-                      <a:defPPr>
-                        <a:defRPr lang="de-DE"/>
-                      </a:defPPr>
-                    </a:lstStyle>
-                    <a:p>
-                      <a:pPr rtl="0"/>
-                      <a:r>
-                        <a:rPr lang="de-DE">
-                          <a:solidFill>
-                            <a:schemeClr val="accent6"/>
-                          </a:solidFill>
-                        </a:rPr>
-                        <a:t>Positives Feedback</a:t>
-                      </a:r>
-                    </a:p>
-                  </a:txBody>
-                  <a:tcPr anchor="ctr"/>
-                </a:tc>
-                <a:tc>
-                  <a:txBody>
-                    <a:bodyPr/>
-                    <a:lstStyle>
-                      <a:defPPr>
-                        <a:defRPr lang="de-DE"/>
-                      </a:defPPr>
-                    </a:lstStyle>
-                    <a:p>
-                      <a:pPr rtl="0"/>
-                      <a:r>
-                        <a:rPr lang="de-DE">
-                          <a:solidFill>
-                            <a:schemeClr val="accent6"/>
-                          </a:solidFill>
-                        </a:rPr>
-                        <a:t>Prozentsatz (%)</a:t>
-                      </a:r>
-                    </a:p>
-                  </a:txBody>
-                  <a:tcPr anchor="ctr"/>
-                </a:tc>
-                <a:tc>
-                  <a:txBody>
-                    <a:bodyPr/>
-                    <a:lstStyle>
-                      <a:defPPr>
-                        <a:defRPr lang="de-DE"/>
-                      </a:defPPr>
-                    </a:lstStyle>
-                    <a:p>
-                      <a:pPr rtl="0"/>
-                      <a:r>
-                        <a:rPr lang="de-DE">
-                          <a:solidFill>
-                            <a:schemeClr val="accent6"/>
-                          </a:solidFill>
-                        </a:rPr>
-                        <a:t>90</a:t>
-                      </a:r>
-                    </a:p>
-                  </a:txBody>
-                  <a:tcPr anchor="ctr"/>
-                </a:tc>
-                <a:tc>
-                  <a:txBody>
-                    <a:bodyPr/>
-                    <a:lstStyle>
-                      <a:defPPr>
-                        <a:defRPr lang="de-DE"/>
-                      </a:defPPr>
-                    </a:lstStyle>
-                    <a:p>
-                      <a:pPr rtl="0"/>
-                      <a:r>
-                        <a:rPr lang="de-DE">
-                          <a:solidFill>
-                            <a:schemeClr val="accent6"/>
-                          </a:solidFill>
-                        </a:rPr>
-                        <a:t>95</a:t>
-                      </a:r>
-                    </a:p>
-                  </a:txBody>
-                  <a:tcPr anchor="ctr"/>
-                </a:tc>
-                <a:extLst>
-                  <a:ext uri="{0D108BD9-81ED-4DB2-BD59-A6C34878D82A}">
-                    <a16:rowId xmlns:a16="http://schemas.microsoft.com/office/drawing/2014/main" val="4023592559"/>
-                  </a:ext>
-                </a:extLst>
-              </a:tr>
-              <a:tr h="811265">
-                <a:tc>
-                  <a:txBody>
-                    <a:bodyPr/>
-                    <a:lstStyle>
-                      <a:defPPr>
-                        <a:defRPr lang="de-DE"/>
-                      </a:defPPr>
-                    </a:lstStyle>
-                    <a:p>
-                      <a:pPr rtl="0"/>
-                      <a:r>
-                        <a:rPr lang="de-DE" dirty="0">
-                          <a:solidFill>
-                            <a:schemeClr val="accent6"/>
-                          </a:solidFill>
-                        </a:rPr>
-                        <a:t>Rate der Informationsspeicherung</a:t>
-                      </a:r>
-                    </a:p>
-                  </a:txBody>
-                  <a:tcPr anchor="ctr"/>
-                </a:tc>
-                <a:tc>
-                  <a:txBody>
-                    <a:bodyPr/>
-                    <a:lstStyle>
-                      <a:defPPr>
-                        <a:defRPr lang="de-DE"/>
-                      </a:defPPr>
-                    </a:lstStyle>
-                    <a:p>
-                      <a:pPr rtl="0"/>
-                      <a:r>
-                        <a:rPr lang="de-DE">
-                          <a:solidFill>
-                            <a:schemeClr val="accent6"/>
-                          </a:solidFill>
-                        </a:rPr>
-                        <a:t>Prozentsatz (%)</a:t>
-                      </a:r>
-                    </a:p>
-                  </a:txBody>
-                  <a:tcPr anchor="ctr"/>
-                </a:tc>
-                <a:tc>
-                  <a:txBody>
-                    <a:bodyPr/>
-                    <a:lstStyle>
-                      <a:defPPr>
-                        <a:defRPr lang="de-DE"/>
-                      </a:defPPr>
-                    </a:lstStyle>
-                    <a:p>
-                      <a:pPr rtl="0"/>
-                      <a:r>
-                        <a:rPr lang="de-DE">
-                          <a:solidFill>
-                            <a:schemeClr val="accent6"/>
-                          </a:solidFill>
-                        </a:rPr>
-                        <a:t>80</a:t>
-                      </a:r>
-                    </a:p>
-                  </a:txBody>
-                  <a:tcPr anchor="ctr"/>
-                </a:tc>
-                <a:tc>
-                  <a:txBody>
-                    <a:bodyPr/>
-                    <a:lstStyle>
-                      <a:defPPr>
-                        <a:defRPr lang="de-DE"/>
-                      </a:defPPr>
-                    </a:lstStyle>
-                    <a:p>
-                      <a:pPr rtl="0"/>
-                      <a:r>
-                        <a:rPr lang="de-DE" dirty="0">
-                          <a:solidFill>
-                            <a:schemeClr val="accent6"/>
-                          </a:solidFill>
-                        </a:rPr>
-                        <a:t>85</a:t>
-                      </a:r>
-                    </a:p>
-                  </a:txBody>
-                  <a:tcPr anchor="ctr"/>
-                </a:tc>
-                <a:extLst>
-                  <a:ext uri="{0D108BD9-81ED-4DB2-BD59-A6C34878D82A}">
-                    <a16:rowId xmlns:a16="http://schemas.microsoft.com/office/drawing/2014/main" val="2426564953"/>
-                  </a:ext>
-                </a:extLst>
-              </a:tr>
-            </a:tbl>
-          </a:graphicData>
-        </a:graphic>
-      </p:graphicFrame>
-      <p:sp>
-        <p:nvSpPr>
-          <p:cNvPr id="2" name="Foliennummernplatzhalter 1">
-            <a:extLst>
-              <a:ext uri="{FF2B5EF4-FFF2-40B4-BE49-F238E27FC236}">
-                <a16:creationId xmlns:a16="http://schemas.microsoft.com/office/drawing/2014/main" id="{A913EEC9-16E3-6C86-97D0-A7EC7EA09CDA}"/>
-              </a:ext>
-            </a:extLst>
-          </p:cNvPr>
-          <p:cNvSpPr>
-            <a:spLocks noGrp="1"/>
-          </p:cNvSpPr>
-          <p:nvPr>
-            <p:ph type="sldNum" sz="quarter" idx="10"/>
-          </p:nvPr>
-        </p:nvSpPr>
-        <p:spPr>
-          <a:xfrm>
-            <a:off x="10358437" y="457199"/>
-            <a:ext cx="1067589" cy="471489"/>
-          </a:xfrm>
-        </p:spPr>
-        <p:txBody>
-          <a:bodyPr rtlCol="0"/>
-          <a:lstStyle>
-            <a:defPPr>
-              <a:defRPr lang="de-DE"/>
-            </a:defPPr>
-          </a:lstStyle>
-          <a:p>
-            <a:pPr rtl="0"/>
-            <a:fld id="{48F63A3B-78C7-47BE-AE5E-E10140E04643}" type="slidenum">
-              <a:rPr lang="de-DE" smtClean="0"/>
-              <a:pPr rtl="0"/>
-              <a:t>9</a:t>
-            </a:fld>
-            <a:endParaRPr lang="de-DE" dirty="0"/>
+              <a:t>Welche Logik wurde in Skripte umgesetzt?</a:t>
+            </a:r>
           </a:p>
         </p:txBody>
       </p:sp>
     </p:spTree>
     <p:extLst>
       <p:ext uri="{BB962C8B-B14F-4D97-AF65-F5344CB8AC3E}">
-        <p14:creationId xmlns:p14="http://schemas.microsoft.com/office/powerpoint/2010/main" val="3969996159"/>
+        <p14:creationId xmlns:p14="http://schemas.microsoft.com/office/powerpoint/2010/main" val="992136454"/>
       </p:ext>
     </p:extLst>
   </p:cSld>

--- a/Praesentation.pptx
+++ b/Praesentation.pptx
@@ -18870,8 +18870,8 @@
         </p:nvSpPr>
         <p:spPr>
           <a:xfrm>
-            <a:off x="1550564" y="2331958"/>
-            <a:ext cx="10172044" cy="4379738"/>
+            <a:off x="1550563" y="2331958"/>
+            <a:ext cx="10401291" cy="4379738"/>
           </a:xfrm>
         </p:spPr>
         <p:txBody>
@@ -18884,21 +18884,6 @@
           <a:p>
             <a:pPr rtl="0"/>
             <a:r>
-              <a:rPr lang="de-DE" dirty="0"/>
-              <a:t>Interaktionen mit Canvas und mit 3D </a:t>
-            </a:r>
-            <a:r>
-              <a:rPr lang="de-DE" dirty="0" err="1"/>
-              <a:t>Object</a:t>
-            </a:r>
-            <a:r>
-              <a:rPr lang="de-DE" dirty="0"/>
-              <a:t> Square</a:t>
-            </a:r>
-          </a:p>
-          <a:p>
-            <a:pPr rtl="0"/>
-            <a:r>
               <a:rPr lang="de-DE" b="1" dirty="0"/>
               <a:t>1. 3D </a:t>
             </a:r>
@@ -18990,8 +18975,58 @@
           </a:p>
           <a:p>
             <a:r>
+              <a:rPr lang="de-AT" dirty="0" err="1"/>
+              <a:t>Rigidbody</a:t>
+            </a:r>
+            <a:r>
+              <a:rPr lang="de-AT" dirty="0"/>
+              <a:t> für Rotation in Detailansicht mit </a:t>
+            </a:r>
+            <a:r>
+              <a:rPr lang="de-AT" dirty="0" err="1"/>
+              <a:t>Grabbable</a:t>
+            </a:r>
+            <a:r>
+              <a:rPr lang="de-AT" dirty="0"/>
+              <a:t>, Hand Grab </a:t>
+            </a:r>
+            <a:r>
+              <a:rPr lang="de-AT" dirty="0" err="1"/>
+              <a:t>Interactable</a:t>
+            </a:r>
+            <a:r>
+              <a:rPr lang="de-AT" dirty="0"/>
+              <a:t> und </a:t>
+            </a:r>
+            <a:r>
+              <a:rPr lang="de-AT" dirty="0" err="1"/>
+              <a:t>One</a:t>
+            </a:r>
+            <a:r>
+              <a:rPr lang="de-AT" dirty="0"/>
+              <a:t> Grab </a:t>
+            </a:r>
+            <a:r>
+              <a:rPr lang="de-AT" dirty="0" err="1"/>
+              <a:t>Rotate</a:t>
+            </a:r>
+            <a:r>
+              <a:rPr lang="de-AT" dirty="0"/>
+              <a:t> Transformer</a:t>
+            </a:r>
+          </a:p>
+          <a:p>
+            <a:r>
               <a:rPr lang="de-AT" b="1" dirty="0"/>
-              <a:t>2. Canvas mit Buttons:</a:t>
+              <a:t>2. </a:t>
+            </a:r>
+            <a:r>
+              <a:rPr lang="de-AT" b="1"/>
+              <a:t>UI-Canvas </a:t>
+            </a:r>
+            <a:r>
+              <a:rPr lang="de-AT" b="1" dirty="0"/>
+              <a:t>mit Buttons:</a:t>
             </a:r>
           </a:p>
           <a:p>
@@ -23178,35 +23213,6 @@
 </file>
 
 <file path=customXml/item1.xml><?xml version="1.0" encoding="utf-8"?>
-<p:properties xmlns:p="http://schemas.microsoft.com/office/2006/metadata/properties" xmlns:xsi="http://www.w3.org/2001/XMLSchema-instance" xmlns:pc="http://schemas.microsoft.com/office/infopath/2007/PartnerControls">
-  <documentManagement>
-    <_ip_UnifiedCompliancePolicyUIAction xmlns="http://schemas.microsoft.com/sharepoint/v3" xsi:nil="true"/>
-    <Image xmlns="71af3243-3dd4-4a8d-8c0d-dd76da1f02a5">
-      <Url xsi:nil="true"/>
-      <Description xsi:nil="true"/>
-    </Image>
-    <Status xmlns="71af3243-3dd4-4a8d-8c0d-dd76da1f02a5">Not started</Status>
-    <Background xmlns="71af3243-3dd4-4a8d-8c0d-dd76da1f02a5">false</Background>
-    <_ip_UnifiedCompliancePolicyProperties xmlns="http://schemas.microsoft.com/sharepoint/v3" xsi:nil="true"/>
-    <ImageTagsTaxHTField xmlns="71af3243-3dd4-4a8d-8c0d-dd76da1f02a5">
-      <Terms xmlns="http://schemas.microsoft.com/office/infopath/2007/PartnerControls"/>
-    </ImageTagsTaxHTField>
-    <TaxCatchAll xmlns="230e9df3-be65-4c73-a93b-d1236ebd677e" xsi:nil="true"/>
-    <MediaServiceKeyPoints xmlns="71af3243-3dd4-4a8d-8c0d-dd76da1f02a5" xsi:nil="true"/>
-  </documentManagement>
-</p:properties>
-</file>
-
-<file path=customXml/item2.xml><?xml version="1.0" encoding="utf-8"?>
-<?mso-contentType ?>
-<FormTemplates xmlns="http://schemas.microsoft.com/sharepoint/v3/contenttype/forms">
-  <Display>DocumentLibraryForm</Display>
-  <Edit>DocumentLibraryForm</Edit>
-  <New>DocumentLibraryForm</New>
-</FormTemplates>
-</file>
-
-<file path=customXml/item3.xml><?xml version="1.0" encoding="utf-8"?>
 <ct:contentTypeSchema xmlns:ct="http://schemas.microsoft.com/office/2006/metadata/contentType" xmlns:ma="http://schemas.microsoft.com/office/2006/metadata/properties/metaAttributes" ct:_="" ma:_="" ma:contentTypeName="Document" ma:contentTypeID="0x01010079F111ED35F8CC479449609E8A0923A6" ma:contentTypeVersion="28" ma:contentTypeDescription="Create a new document." ma:contentTypeScope="" ma:versionID="60f5a4f2d2b0abadcf532d48ebf9cb71">
   <xsd:schema xmlns:xsd="http://www.w3.org/2001/XMLSchema" xmlns:xs="http://www.w3.org/2001/XMLSchema" xmlns:p="http://schemas.microsoft.com/office/2006/metadata/properties" xmlns:ns1="http://schemas.microsoft.com/sharepoint/v3" xmlns:ns2="71af3243-3dd4-4a8d-8c0d-dd76da1f02a5" xmlns:ns3="16c05727-aa75-4e4a-9b5f-8a80a1165891" xmlns:ns4="230e9df3-be65-4c73-a93b-d1236ebd677e" targetNamespace="http://schemas.microsoft.com/office/2006/metadata/properties" ma:root="true" ma:fieldsID="7dd78129e6a1811f84807ad11c651531" ns1:_="" ns2:_="" ns3:_="" ns4:_="">
     <xsd:import namespace="http://schemas.microsoft.com/sharepoint/v3"/>
@@ -23518,27 +23524,36 @@
 </ct:contentTypeSchema>
 </file>
 
-<file path=customXml/itemProps1.xml><?xml version="1.0" encoding="utf-8"?>
-<ds:datastoreItem xmlns:ds="http://schemas.openxmlformats.org/officeDocument/2006/customXml" ds:itemID="{BA719FA4-954C-4FA8-82CB-206659C3B826}">
-  <ds:schemaRefs>
-    <ds:schemaRef ds:uri="http://schemas.microsoft.com/office/2006/metadata/properties"/>
-    <ds:schemaRef ds:uri="http://schemas.microsoft.com/office/infopath/2007/PartnerControls"/>
-    <ds:schemaRef ds:uri="http://schemas.microsoft.com/sharepoint/v3"/>
-    <ds:schemaRef ds:uri="71af3243-3dd4-4a8d-8c0d-dd76da1f02a5"/>
-    <ds:schemaRef ds:uri="230e9df3-be65-4c73-a93b-d1236ebd677e"/>
-  </ds:schemaRefs>
-</ds:datastoreItem>
+<file path=customXml/item2.xml><?xml version="1.0" encoding="utf-8"?>
+<?mso-contentType ?>
+<FormTemplates xmlns="http://schemas.microsoft.com/sharepoint/v3/contenttype/forms">
+  <Display>DocumentLibraryForm</Display>
+  <Edit>DocumentLibraryForm</Edit>
+  <New>DocumentLibraryForm</New>
+</FormTemplates>
 </file>
 
-<file path=customXml/itemProps2.xml><?xml version="1.0" encoding="utf-8"?>
-<ds:datastoreItem xmlns:ds="http://schemas.openxmlformats.org/officeDocument/2006/customXml" ds:itemID="{16DBB56F-4362-4386-A1A1-3DF898896616}">
-  <ds:schemaRefs>
-    <ds:schemaRef ds:uri="http://schemas.microsoft.com/sharepoint/v3/contenttype/forms"/>
-  </ds:schemaRefs>
-</ds:datastoreItem>
+<file path=customXml/item3.xml><?xml version="1.0" encoding="utf-8"?>
+<p:properties xmlns:p="http://schemas.microsoft.com/office/2006/metadata/properties" xmlns:xsi="http://www.w3.org/2001/XMLSchema-instance" xmlns:pc="http://schemas.microsoft.com/office/infopath/2007/PartnerControls">
+  <documentManagement>
+    <_ip_UnifiedCompliancePolicyUIAction xmlns="http://schemas.microsoft.com/sharepoint/v3" xsi:nil="true"/>
+    <Image xmlns="71af3243-3dd4-4a8d-8c0d-dd76da1f02a5">
+      <Url xsi:nil="true"/>
+      <Description xsi:nil="true"/>
+    </Image>
+    <Status xmlns="71af3243-3dd4-4a8d-8c0d-dd76da1f02a5">Not started</Status>
+    <Background xmlns="71af3243-3dd4-4a8d-8c0d-dd76da1f02a5">false</Background>
+    <_ip_UnifiedCompliancePolicyProperties xmlns="http://schemas.microsoft.com/sharepoint/v3" xsi:nil="true"/>
+    <ImageTagsTaxHTField xmlns="71af3243-3dd4-4a8d-8c0d-dd76da1f02a5">
+      <Terms xmlns="http://schemas.microsoft.com/office/infopath/2007/PartnerControls"/>
+    </ImageTagsTaxHTField>
+    <TaxCatchAll xmlns="230e9df3-be65-4c73-a93b-d1236ebd677e" xsi:nil="true"/>
+    <MediaServiceKeyPoints xmlns="71af3243-3dd4-4a8d-8c0d-dd76da1f02a5" xsi:nil="true"/>
+  </documentManagement>
+</p:properties>
 </file>
 
-<file path=customXml/itemProps3.xml><?xml version="1.0" encoding="utf-8"?>
+<file path=customXml/itemProps1.xml><?xml version="1.0" encoding="utf-8"?>
 <ds:datastoreItem xmlns:ds="http://schemas.openxmlformats.org/officeDocument/2006/customXml" ds:itemID="{04948363-B267-4BAC-8655-100FBEC280C1}">
   <ds:schemaRefs>
     <ds:schemaRef ds:uri="http://schemas.microsoft.com/office/2006/metadata/contentType"/>
@@ -23559,6 +23574,26 @@
 </ds:datastoreItem>
 </file>
 
+<file path=customXml/itemProps2.xml><?xml version="1.0" encoding="utf-8"?>
+<ds:datastoreItem xmlns:ds="http://schemas.openxmlformats.org/officeDocument/2006/customXml" ds:itemID="{16DBB56F-4362-4386-A1A1-3DF898896616}">
+  <ds:schemaRefs>
+    <ds:schemaRef ds:uri="http://schemas.microsoft.com/sharepoint/v3/contenttype/forms"/>
+  </ds:schemaRefs>
+</ds:datastoreItem>
+</file>
+
+<file path=customXml/itemProps3.xml><?xml version="1.0" encoding="utf-8"?>
+<ds:datastoreItem xmlns:ds="http://schemas.openxmlformats.org/officeDocument/2006/customXml" ds:itemID="{BA719FA4-954C-4FA8-82CB-206659C3B826}">
+  <ds:schemaRefs>
+    <ds:schemaRef ds:uri="http://schemas.microsoft.com/office/2006/metadata/properties"/>
+    <ds:schemaRef ds:uri="http://schemas.microsoft.com/office/infopath/2007/PartnerControls"/>
+    <ds:schemaRef ds:uri="http://schemas.microsoft.com/sharepoint/v3"/>
+    <ds:schemaRef ds:uri="71af3243-3dd4-4a8d-8c0d-dd76da1f02a5"/>
+    <ds:schemaRef ds:uri="230e9df3-be65-4c73-a93b-d1236ebd677e"/>
+  </ds:schemaRefs>
+</ds:datastoreItem>
+</file>
+
 <file path=docMetadata/LabelInfo.xml><?xml version="1.0" encoding="utf-8"?>
 <clbl:labelList xmlns:clbl="http://schemas.microsoft.com/office/2020/mipLabelMetadata">
   <clbl:label id="{a4153a30-97aa-49dd-8839-66f72081522c}" enabled="1" method="Standard" siteId="{9ffff5c3-bdfa-4a9d-b595-ff68329945ef}" contentBits="0" removed="0"/>

--- a/Praesentation.pptx
+++ b/Praesentation.pptx
@@ -18483,7 +18483,7 @@
         <p:spPr>
           <a:xfrm>
             <a:off x="914400" y="2331791"/>
-            <a:ext cx="9381744" cy="4123873"/>
+            <a:ext cx="10049256" cy="4526209"/>
           </a:xfrm>
         </p:spPr>
         <p:txBody>
@@ -18508,7 +18508,14 @@
           </a:p>
           <a:p>
             <a:pPr rtl="0"/>
-            <a:endParaRPr lang="de-DE" sz="1800" dirty="0"/>
+            <a:r>
+              <a:rPr lang="de-DE" sz="1800" dirty="0" err="1"/>
+              <a:t>JumpToEarth</a:t>
+            </a:r>
+            <a:r>
+              <a:rPr lang="de-DE" sz="1800" dirty="0"/>
+              <a:t>: Holt sich die Koordinaten vom Planeten und stellt uns mit einem Offset dorthin</a:t>
+            </a:r>
           </a:p>
           <a:p>
             <a:pPr rtl="0"/>
@@ -23213,6 +23220,35 @@
 </file>
 
 <file path=customXml/item1.xml><?xml version="1.0" encoding="utf-8"?>
+<p:properties xmlns:p="http://schemas.microsoft.com/office/2006/metadata/properties" xmlns:xsi="http://www.w3.org/2001/XMLSchema-instance" xmlns:pc="http://schemas.microsoft.com/office/infopath/2007/PartnerControls">
+  <documentManagement>
+    <_ip_UnifiedCompliancePolicyUIAction xmlns="http://schemas.microsoft.com/sharepoint/v3" xsi:nil="true"/>
+    <Image xmlns="71af3243-3dd4-4a8d-8c0d-dd76da1f02a5">
+      <Url xsi:nil="true"/>
+      <Description xsi:nil="true"/>
+    </Image>
+    <Status xmlns="71af3243-3dd4-4a8d-8c0d-dd76da1f02a5">Not started</Status>
+    <Background xmlns="71af3243-3dd4-4a8d-8c0d-dd76da1f02a5">false</Background>
+    <_ip_UnifiedCompliancePolicyProperties xmlns="http://schemas.microsoft.com/sharepoint/v3" xsi:nil="true"/>
+    <ImageTagsTaxHTField xmlns="71af3243-3dd4-4a8d-8c0d-dd76da1f02a5">
+      <Terms xmlns="http://schemas.microsoft.com/office/infopath/2007/PartnerControls"/>
+    </ImageTagsTaxHTField>
+    <TaxCatchAll xmlns="230e9df3-be65-4c73-a93b-d1236ebd677e" xsi:nil="true"/>
+    <MediaServiceKeyPoints xmlns="71af3243-3dd4-4a8d-8c0d-dd76da1f02a5" xsi:nil="true"/>
+  </documentManagement>
+</p:properties>
+</file>
+
+<file path=customXml/item2.xml><?xml version="1.0" encoding="utf-8"?>
+<?mso-contentType ?>
+<FormTemplates xmlns="http://schemas.microsoft.com/sharepoint/v3/contenttype/forms">
+  <Display>DocumentLibraryForm</Display>
+  <Edit>DocumentLibraryForm</Edit>
+  <New>DocumentLibraryForm</New>
+</FormTemplates>
+</file>
+
+<file path=customXml/item3.xml><?xml version="1.0" encoding="utf-8"?>
 <ct:contentTypeSchema xmlns:ct="http://schemas.microsoft.com/office/2006/metadata/contentType" xmlns:ma="http://schemas.microsoft.com/office/2006/metadata/properties/metaAttributes" ct:_="" ma:_="" ma:contentTypeName="Document" ma:contentTypeID="0x01010079F111ED35F8CC479449609E8A0923A6" ma:contentTypeVersion="28" ma:contentTypeDescription="Create a new document." ma:contentTypeScope="" ma:versionID="60f5a4f2d2b0abadcf532d48ebf9cb71">
   <xsd:schema xmlns:xsd="http://www.w3.org/2001/XMLSchema" xmlns:xs="http://www.w3.org/2001/XMLSchema" xmlns:p="http://schemas.microsoft.com/office/2006/metadata/properties" xmlns:ns1="http://schemas.microsoft.com/sharepoint/v3" xmlns:ns2="71af3243-3dd4-4a8d-8c0d-dd76da1f02a5" xmlns:ns3="16c05727-aa75-4e4a-9b5f-8a80a1165891" xmlns:ns4="230e9df3-be65-4c73-a93b-d1236ebd677e" targetNamespace="http://schemas.microsoft.com/office/2006/metadata/properties" ma:root="true" ma:fieldsID="7dd78129e6a1811f84807ad11c651531" ns1:_="" ns2:_="" ns3:_="" ns4:_="">
     <xsd:import namespace="http://schemas.microsoft.com/sharepoint/v3"/>
@@ -23524,36 +23560,34 @@
 </ct:contentTypeSchema>
 </file>
 
-<file path=customXml/item2.xml><?xml version="1.0" encoding="utf-8"?>
-<?mso-contentType ?>
-<FormTemplates xmlns="http://schemas.microsoft.com/sharepoint/v3/contenttype/forms">
-  <Display>DocumentLibraryForm</Display>
-  <Edit>DocumentLibraryForm</Edit>
-  <New>DocumentLibraryForm</New>
-</FormTemplates>
+<file path=customXml/itemProps1.xml><?xml version="1.0" encoding="utf-8"?>
+<ds:datastoreItem xmlns:ds="http://schemas.openxmlformats.org/officeDocument/2006/customXml" ds:itemID="{BA719FA4-954C-4FA8-82CB-206659C3B826}">
+  <ds:schemaRefs>
+    <ds:schemaRef ds:uri="http://schemas.microsoft.com/office/2006/documentManagement/types"/>
+    <ds:schemaRef ds:uri="http://purl.org/dc/dcmitype/"/>
+    <ds:schemaRef ds:uri="http://schemas.microsoft.com/office/2006/metadata/properties"/>
+    <ds:schemaRef ds:uri="http://www.w3.org/XML/1998/namespace"/>
+    <ds:schemaRef ds:uri="http://purl.org/dc/terms/"/>
+    <ds:schemaRef ds:uri="http://schemas.microsoft.com/sharepoint/v3"/>
+    <ds:schemaRef ds:uri="16c05727-aa75-4e4a-9b5f-8a80a1165891"/>
+    <ds:schemaRef ds:uri="http://schemas.openxmlformats.org/package/2006/metadata/core-properties"/>
+    <ds:schemaRef ds:uri="http://schemas.microsoft.com/office/infopath/2007/PartnerControls"/>
+    <ds:schemaRef ds:uri="230e9df3-be65-4c73-a93b-d1236ebd677e"/>
+    <ds:schemaRef ds:uri="71af3243-3dd4-4a8d-8c0d-dd76da1f02a5"/>
+    <ds:schemaRef ds:uri="http://purl.org/dc/elements/1.1/"/>
+  </ds:schemaRefs>
+</ds:datastoreItem>
 </file>
 
-<file path=customXml/item3.xml><?xml version="1.0" encoding="utf-8"?>
-<p:properties xmlns:p="http://schemas.microsoft.com/office/2006/metadata/properties" xmlns:xsi="http://www.w3.org/2001/XMLSchema-instance" xmlns:pc="http://schemas.microsoft.com/office/infopath/2007/PartnerControls">
-  <documentManagement>
-    <_ip_UnifiedCompliancePolicyUIAction xmlns="http://schemas.microsoft.com/sharepoint/v3" xsi:nil="true"/>
-    <Image xmlns="71af3243-3dd4-4a8d-8c0d-dd76da1f02a5">
-      <Url xsi:nil="true"/>
-      <Description xsi:nil="true"/>
-    </Image>
-    <Status xmlns="71af3243-3dd4-4a8d-8c0d-dd76da1f02a5">Not started</Status>
-    <Background xmlns="71af3243-3dd4-4a8d-8c0d-dd76da1f02a5">false</Background>
-    <_ip_UnifiedCompliancePolicyProperties xmlns="http://schemas.microsoft.com/sharepoint/v3" xsi:nil="true"/>
-    <ImageTagsTaxHTField xmlns="71af3243-3dd4-4a8d-8c0d-dd76da1f02a5">
-      <Terms xmlns="http://schemas.microsoft.com/office/infopath/2007/PartnerControls"/>
-    </ImageTagsTaxHTField>
-    <TaxCatchAll xmlns="230e9df3-be65-4c73-a93b-d1236ebd677e" xsi:nil="true"/>
-    <MediaServiceKeyPoints xmlns="71af3243-3dd4-4a8d-8c0d-dd76da1f02a5" xsi:nil="true"/>
-  </documentManagement>
-</p:properties>
+<file path=customXml/itemProps2.xml><?xml version="1.0" encoding="utf-8"?>
+<ds:datastoreItem xmlns:ds="http://schemas.openxmlformats.org/officeDocument/2006/customXml" ds:itemID="{16DBB56F-4362-4386-A1A1-3DF898896616}">
+  <ds:schemaRefs>
+    <ds:schemaRef ds:uri="http://schemas.microsoft.com/sharepoint/v3/contenttype/forms"/>
+  </ds:schemaRefs>
+</ds:datastoreItem>
 </file>
 
-<file path=customXml/itemProps1.xml><?xml version="1.0" encoding="utf-8"?>
+<file path=customXml/itemProps3.xml><?xml version="1.0" encoding="utf-8"?>
 <ds:datastoreItem xmlns:ds="http://schemas.openxmlformats.org/officeDocument/2006/customXml" ds:itemID="{04948363-B267-4BAC-8655-100FBEC280C1}">
   <ds:schemaRefs>
     <ds:schemaRef ds:uri="http://schemas.microsoft.com/office/2006/metadata/contentType"/>
@@ -23574,26 +23608,6 @@
 </ds:datastoreItem>
 </file>
 
-<file path=customXml/itemProps2.xml><?xml version="1.0" encoding="utf-8"?>
-<ds:datastoreItem xmlns:ds="http://schemas.openxmlformats.org/officeDocument/2006/customXml" ds:itemID="{16DBB56F-4362-4386-A1A1-3DF898896616}">
-  <ds:schemaRefs>
-    <ds:schemaRef ds:uri="http://schemas.microsoft.com/sharepoint/v3/contenttype/forms"/>
-  </ds:schemaRefs>
-</ds:datastoreItem>
-</file>
-
-<file path=customXml/itemProps3.xml><?xml version="1.0" encoding="utf-8"?>
-<ds:datastoreItem xmlns:ds="http://schemas.openxmlformats.org/officeDocument/2006/customXml" ds:itemID="{BA719FA4-954C-4FA8-82CB-206659C3B826}">
-  <ds:schemaRefs>
-    <ds:schemaRef ds:uri="http://schemas.microsoft.com/office/2006/metadata/properties"/>
-    <ds:schemaRef ds:uri="http://schemas.microsoft.com/office/infopath/2007/PartnerControls"/>
-    <ds:schemaRef ds:uri="http://schemas.microsoft.com/sharepoint/v3"/>
-    <ds:schemaRef ds:uri="71af3243-3dd4-4a8d-8c0d-dd76da1f02a5"/>
-    <ds:schemaRef ds:uri="230e9df3-be65-4c73-a93b-d1236ebd677e"/>
-  </ds:schemaRefs>
-</ds:datastoreItem>
-</file>
-
 <file path=docMetadata/LabelInfo.xml><?xml version="1.0" encoding="utf-8"?>
 <clbl:labelList xmlns:clbl="http://schemas.microsoft.com/office/2020/mipLabelMetadata">
   <clbl:label id="{a4153a30-97aa-49dd-8839-66f72081522c}" enabled="1" method="Standard" siteId="{9ffff5c3-bdfa-4a9d-b595-ff68329945ef}" contentBits="0" removed="0"/>
